--- a/docs/management-plan/ROOTIVE_GROUP_5year_plan_2026-2031.pptx
+++ b/docs/management-plan/ROOTIVE_GROUP_5year_plan_2026-2031.pptx
@@ -3370,7 +3370,7 @@
           <a:p>
             <a:r>
               <a:rPr lang="en-US" dirty="0"/>
-              <a:t>グループのKPIは売上だけでは見ない。成長・利益・キャッシュ・組織・M&amp;Aの5つの視点で経営を測る。主な責任は、P.16の所有と執行の分担に沿って置く（売上・利益は各子会社の社長、資本・財務・社長人事・M&amp;Aは親会社）。目標値が決まっているのは連結売上（FY2031 30億円・暫定）だけで、ほかのKPIの目標値・算定方法・見る頻度は財務モデルを作ってから確定する。</a:t>
+              <a:t>グループのKPIは売上だけでは見ない。成長・利益・キャッシュ・組織・M&amp;Aの5つの視点で経営を測る。目標値が決まっているのは連結売上（FY2027〜FY2031の暫定経営目標、FY2031は30億円）だけで、ほかのKPIの目標値・算定方法・見る頻度・責任の置き方は財務モデルを作ってから確定する。</a:t>
             </a:r>
             <a:endParaRPr lang="en-US" dirty="0"/>
           </a:p>
@@ -4758,7 +4758,7 @@
         </p:nvSpPr>
         <p:spPr>
           <a:xfrm>
-            <a:off x="8897112" y="685800"/>
+            <a:off x="8714232" y="685800"/>
             <a:ext cx="2743200" cy="274320"/>
           </a:xfrm>
           <a:prstGeom prst="rect">
@@ -5760,7 +5760,7 @@
             <a:r>
               <a:rPr lang="en-US" altLang="en-US" sz="1000" b="1" dirty="0">
                 <a:solidFill>
-                  <a:srgbClr val="8C96A6"/>
+                  <a:srgbClr val="7A8494"/>
                 </a:solidFill>
                 <a:latin typeface="Arial" pitchFamily="34" charset="0"/>
                 <a:ea typeface="Arial" charset="-128"/>
@@ -5819,7 +5819,7 @@
             <a:r>
               <a:rPr lang="en-US" altLang="en-US" sz="1000" b="1" dirty="0">
                 <a:solidFill>
-                  <a:srgbClr val="8C96A6"/>
+                  <a:srgbClr val="7A8494"/>
                 </a:solidFill>
                 <a:latin typeface="Arial" pitchFamily="34" charset="0"/>
                 <a:ea typeface="Arial" charset="-128"/>
@@ -5878,7 +5878,7 @@
             <a:r>
               <a:rPr lang="en-US" altLang="en-US" sz="1000" b="1" dirty="0">
                 <a:solidFill>
-                  <a:srgbClr val="8C96A6"/>
+                  <a:srgbClr val="7A8494"/>
                 </a:solidFill>
                 <a:latin typeface="Arial" pitchFamily="34" charset="0"/>
                 <a:ea typeface="Arial" charset="-128"/>
@@ -6174,8 +6174,8 @@
           <p:nvPr/>
         </p:nvGraphicFramePr>
         <p:xfrm>
-          <a:off x="7178040" y="1664208"/>
-          <a:ext cx="2240280" cy="694944"/>
+          <a:off x="7178040" y="1627632"/>
+          <a:ext cx="2240280" cy="640080"/>
         </p:xfrm>
         <a:graphic xmlns:a="http://schemas.openxmlformats.org/drawingml/2006/main">
           <a:graphicData uri="http://schemas.openxmlformats.org/drawingml/2006/chart">
@@ -8036,7 +8036,7 @@
             <a:r>
               <a:rPr lang="en-US" altLang="en-US" sz="1000" b="1" dirty="0">
                 <a:solidFill>
-                  <a:srgbClr val="8C96A6"/>
+                  <a:srgbClr val="7A8494"/>
                 </a:solidFill>
                 <a:latin typeface="Arial" pitchFamily="34" charset="0"/>
                 <a:ea typeface="Arial" charset="-128"/>
@@ -8154,7 +8154,7 @@
             <a:r>
               <a:rPr lang="en-US" altLang="en-US" sz="1000" b="1" dirty="0">
                 <a:solidFill>
-                  <a:srgbClr val="8C96A6"/>
+                  <a:srgbClr val="7A8494"/>
                 </a:solidFill>
                 <a:latin typeface="Arial" pitchFamily="34" charset="0"/>
                 <a:ea typeface="Arial" charset="-128"/>
@@ -8213,7 +8213,7 @@
             <a:r>
               <a:rPr lang="en-US" altLang="en-US" sz="1000" b="1" dirty="0">
                 <a:solidFill>
-                  <a:srgbClr val="8C96A6"/>
+                  <a:srgbClr val="7A8494"/>
                 </a:solidFill>
                 <a:latin typeface="Arial" pitchFamily="34" charset="0"/>
                 <a:ea typeface="Arial" charset="-128"/>
@@ -8509,8 +8509,8 @@
           <p:nvPr/>
         </p:nvGraphicFramePr>
         <p:xfrm>
-          <a:off x="7178040" y="1664208"/>
-          <a:ext cx="2240280" cy="694944"/>
+          <a:off x="7178040" y="1627632"/>
+          <a:ext cx="2240280" cy="640080"/>
         </p:xfrm>
         <a:graphic xmlns:a="http://schemas.openxmlformats.org/drawingml/2006/main">
           <a:graphicData uri="http://schemas.openxmlformats.org/drawingml/2006/chart">
@@ -8720,7 +8720,7 @@
         <p:spPr>
           <a:xfrm>
             <a:off x="548640" y="3401568"/>
-            <a:ext cx="1737360" cy="219456"/>
+            <a:ext cx="2103120" cy="219456"/>
           </a:xfrm>
           <a:prstGeom prst="rect">
             <a:avLst/>
@@ -8759,7 +8759,7 @@
         <p:spPr>
           <a:xfrm>
             <a:off x="548640" y="3657600"/>
-            <a:ext cx="1737360" cy="384048"/>
+            <a:ext cx="2103120" cy="384048"/>
           </a:xfrm>
           <a:prstGeom prst="rect">
             <a:avLst/>
@@ -8801,7 +8801,7 @@
         </p:nvSpPr>
         <p:spPr>
           <a:xfrm>
-            <a:off x="1417320" y="4041648"/>
+            <a:off x="1600200" y="4041648"/>
             <a:ext cx="0" cy="987552"/>
           </a:xfrm>
           <a:prstGeom prst="line">
@@ -8825,7 +8825,7 @@
         <p:spPr>
           <a:xfrm>
             <a:off x="548640" y="5029200"/>
-            <a:ext cx="1737360" cy="438912"/>
+            <a:ext cx="2103120" cy="438912"/>
           </a:xfrm>
           <a:prstGeom prst="rect">
             <a:avLst/>
@@ -8867,8 +8867,8 @@
         </p:nvSpPr>
         <p:spPr>
           <a:xfrm>
-            <a:off x="2514600" y="4562856"/>
-            <a:ext cx="502920" cy="0"/>
+            <a:off x="2743200" y="4562856"/>
+            <a:ext cx="365760" cy="0"/>
           </a:xfrm>
           <a:prstGeom prst="line">
             <a:avLst/>
@@ -8891,8 +8891,8 @@
         </p:nvSpPr>
         <p:spPr>
           <a:xfrm>
-            <a:off x="3200400" y="3401568"/>
-            <a:ext cx="2468880" cy="219456"/>
+            <a:off x="3291840" y="3401568"/>
+            <a:ext cx="2377440" cy="219456"/>
           </a:xfrm>
           <a:prstGeom prst="rect">
             <a:avLst/>
@@ -8930,8 +8930,8 @@
         </p:nvSpPr>
         <p:spPr>
           <a:xfrm>
-            <a:off x="3200400" y="3657600"/>
-            <a:ext cx="2468880" cy="384048"/>
+            <a:off x="3291840" y="3657600"/>
+            <a:ext cx="2377440" cy="384048"/>
           </a:xfrm>
           <a:prstGeom prst="rect">
             <a:avLst/>
@@ -8973,7 +8973,7 @@
         </p:nvSpPr>
         <p:spPr>
           <a:xfrm>
-            <a:off x="4434840" y="4041648"/>
+            <a:off x="4480560" y="4041648"/>
             <a:ext cx="0" cy="274320"/>
           </a:xfrm>
           <a:prstGeom prst="line">
@@ -8996,7 +8996,7 @@
         </p:nvSpPr>
         <p:spPr>
           <a:xfrm>
-            <a:off x="4526280" y="4069080"/>
+            <a:off x="4572000" y="4069080"/>
             <a:ext cx="640080" cy="219456"/>
           </a:xfrm>
           <a:prstGeom prst="rect">
@@ -9035,8 +9035,8 @@
         </p:nvSpPr>
         <p:spPr>
           <a:xfrm>
-            <a:off x="3200400" y="4315968"/>
-            <a:ext cx="2468880" cy="438912"/>
+            <a:off x="3291840" y="4315968"/>
+            <a:ext cx="2377440" cy="438912"/>
           </a:xfrm>
           <a:prstGeom prst="rect">
             <a:avLst/>
@@ -9076,7 +9076,7 @@
         </p:nvSpPr>
         <p:spPr>
           <a:xfrm>
-            <a:off x="4434840" y="4754880"/>
+            <a:off x="4480560" y="4754880"/>
             <a:ext cx="0" cy="274320"/>
           </a:xfrm>
           <a:prstGeom prst="line">
@@ -9099,7 +9099,7 @@
         </p:nvSpPr>
         <p:spPr>
           <a:xfrm>
-            <a:off x="4526280" y="4782312"/>
+            <a:off x="4572000" y="4782312"/>
             <a:ext cx="640080" cy="219456"/>
           </a:xfrm>
           <a:prstGeom prst="rect">
@@ -9138,8 +9138,8 @@
         </p:nvSpPr>
         <p:spPr>
           <a:xfrm>
-            <a:off x="3200400" y="5029200"/>
-            <a:ext cx="2468880" cy="438912"/>
+            <a:off x="3291840" y="5029200"/>
+            <a:ext cx="2377440" cy="438912"/>
           </a:xfrm>
           <a:prstGeom prst="rect">
             <a:avLst/>
@@ -10333,7 +10333,7 @@
             <a:r>
               <a:rPr lang="en-US" altLang="en-US" sz="1000" b="1" dirty="0">
                 <a:solidFill>
-                  <a:srgbClr val="8C96A6"/>
+                  <a:srgbClr val="7A8494"/>
                 </a:solidFill>
                 <a:latin typeface="Arial" pitchFamily="34" charset="0"/>
                 <a:ea typeface="Arial" charset="-128"/>
@@ -10392,7 +10392,7 @@
             <a:r>
               <a:rPr lang="en-US" altLang="en-US" sz="1000" b="1" dirty="0">
                 <a:solidFill>
-                  <a:srgbClr val="8C96A6"/>
+                  <a:srgbClr val="7A8494"/>
                 </a:solidFill>
                 <a:latin typeface="Arial" pitchFamily="34" charset="0"/>
                 <a:ea typeface="Arial" charset="-128"/>
@@ -10451,7 +10451,7 @@
             <a:r>
               <a:rPr lang="en-US" altLang="en-US" sz="1000" b="1" dirty="0">
                 <a:solidFill>
-                  <a:srgbClr val="8C96A6"/>
+                  <a:srgbClr val="7A8494"/>
                 </a:solidFill>
                 <a:latin typeface="Arial" pitchFamily="34" charset="0"/>
                 <a:ea typeface="Arial" charset="-128"/>
@@ -10510,7 +10510,7 @@
             <a:r>
               <a:rPr lang="en-US" altLang="en-US" sz="1000" b="1" dirty="0">
                 <a:solidFill>
-                  <a:srgbClr val="8C96A6"/>
+                  <a:srgbClr val="7A8494"/>
                 </a:solidFill>
                 <a:latin typeface="Arial" pitchFamily="34" charset="0"/>
                 <a:ea typeface="Arial" charset="-128"/>
@@ -10806,8 +10806,8 @@
           <p:nvPr/>
         </p:nvGraphicFramePr>
         <p:xfrm>
-          <a:off x="7178040" y="1664208"/>
-          <a:ext cx="2240280" cy="694944"/>
+          <a:off x="7178040" y="1627632"/>
+          <a:ext cx="2240280" cy="640080"/>
         </p:xfrm>
         <a:graphic xmlns:a="http://schemas.openxmlformats.org/drawingml/2006/main">
           <a:graphicData uri="http://schemas.openxmlformats.org/drawingml/2006/chart">
@@ -12012,7 +12012,7 @@
         </p:nvSpPr>
         <p:spPr>
           <a:xfrm>
-            <a:off x="548640" y="5394960"/>
+            <a:off x="548640" y="5349240"/>
             <a:ext cx="4114800" cy="530352"/>
           </a:xfrm>
           <a:prstGeom prst="rect">
@@ -12128,7 +12128,7 @@
         <p:spPr>
           <a:xfrm>
             <a:off x="4846320" y="4681728"/>
-            <a:ext cx="1517904" cy="1005840"/>
+            <a:ext cx="1517904" cy="1197864"/>
           </a:xfrm>
           <a:prstGeom prst="rect">
             <a:avLst/>
@@ -12147,7 +12147,7 @@
         </p:nvSpPr>
         <p:spPr>
           <a:xfrm>
-            <a:off x="5010912" y="4791456"/>
+            <a:off x="5010912" y="4864608"/>
             <a:ext cx="1188720" cy="219456"/>
           </a:xfrm>
           <a:prstGeom prst="rect">
@@ -12186,7 +12186,7 @@
         </p:nvSpPr>
         <p:spPr>
           <a:xfrm>
-            <a:off x="5010912" y="5074920"/>
+            <a:off x="5010912" y="5148072"/>
             <a:ext cx="1280160" cy="411480"/>
           </a:xfrm>
           <a:prstGeom prst="rect">
@@ -12225,7 +12225,7 @@
         </p:nvSpPr>
         <p:spPr>
           <a:xfrm>
-            <a:off x="6409944" y="5184648"/>
+            <a:off x="6409944" y="5280660"/>
             <a:ext cx="150266" cy="0"/>
           </a:xfrm>
           <a:prstGeom prst="line">
@@ -12250,7 +12250,7 @@
         <p:spPr>
           <a:xfrm>
             <a:off x="6605930" y="4681728"/>
-            <a:ext cx="1517904" cy="1005840"/>
+            <a:ext cx="1517904" cy="1197864"/>
           </a:xfrm>
           <a:prstGeom prst="rect">
             <a:avLst/>
@@ -12269,7 +12269,7 @@
         </p:nvSpPr>
         <p:spPr>
           <a:xfrm>
-            <a:off x="6770522" y="4791456"/>
+            <a:off x="6770522" y="4864608"/>
             <a:ext cx="1188720" cy="219456"/>
           </a:xfrm>
           <a:prstGeom prst="rect">
@@ -12308,7 +12308,7 @@
         </p:nvSpPr>
         <p:spPr>
           <a:xfrm>
-            <a:off x="6770522" y="5074920"/>
+            <a:off x="6770522" y="5148072"/>
             <a:ext cx="1280160" cy="411480"/>
           </a:xfrm>
           <a:prstGeom prst="rect">
@@ -12347,7 +12347,7 @@
         </p:nvSpPr>
         <p:spPr>
           <a:xfrm>
-            <a:off x="8169554" y="5184648"/>
+            <a:off x="8169554" y="5280660"/>
             <a:ext cx="150266" cy="0"/>
           </a:xfrm>
           <a:prstGeom prst="line">
@@ -12372,7 +12372,7 @@
         <p:spPr>
           <a:xfrm>
             <a:off x="8365541" y="4681728"/>
-            <a:ext cx="1517904" cy="1005840"/>
+            <a:ext cx="1517904" cy="1197864"/>
           </a:xfrm>
           <a:prstGeom prst="rect">
             <a:avLst/>
@@ -12391,7 +12391,7 @@
         </p:nvSpPr>
         <p:spPr>
           <a:xfrm>
-            <a:off x="8530133" y="4791456"/>
+            <a:off x="8530133" y="4864608"/>
             <a:ext cx="1188720" cy="219456"/>
           </a:xfrm>
           <a:prstGeom prst="rect">
@@ -12430,7 +12430,7 @@
         </p:nvSpPr>
         <p:spPr>
           <a:xfrm>
-            <a:off x="8530133" y="5074920"/>
+            <a:off x="8530133" y="5148072"/>
             <a:ext cx="1280160" cy="411480"/>
           </a:xfrm>
           <a:prstGeom prst="rect">
@@ -12469,7 +12469,7 @@
         </p:nvSpPr>
         <p:spPr>
           <a:xfrm>
-            <a:off x="9929165" y="5184648"/>
+            <a:off x="9929165" y="5280660"/>
             <a:ext cx="150266" cy="0"/>
           </a:xfrm>
           <a:prstGeom prst="line">
@@ -12494,7 +12494,7 @@
         <p:spPr>
           <a:xfrm>
             <a:off x="10125151" y="4681728"/>
-            <a:ext cx="1517904" cy="1005840"/>
+            <a:ext cx="1517904" cy="1197864"/>
           </a:xfrm>
           <a:prstGeom prst="rect">
             <a:avLst/>
@@ -12513,7 +12513,7 @@
         </p:nvSpPr>
         <p:spPr>
           <a:xfrm>
-            <a:off x="10289743" y="4791456"/>
+            <a:off x="10289743" y="4864608"/>
             <a:ext cx="1188720" cy="219456"/>
           </a:xfrm>
           <a:prstGeom prst="rect">
@@ -12552,7 +12552,7 @@
         </p:nvSpPr>
         <p:spPr>
           <a:xfrm>
-            <a:off x="10289743" y="5074920"/>
+            <a:off x="10289743" y="5148072"/>
             <a:ext cx="1280160" cy="411480"/>
           </a:xfrm>
           <a:prstGeom prst="rect">
@@ -12837,7 +12837,7 @@
             <a:r>
               <a:rPr lang="en-US" altLang="en-US" sz="1000" b="1" dirty="0">
                 <a:solidFill>
-                  <a:srgbClr val="8C96A6"/>
+                  <a:srgbClr val="7A8494"/>
                 </a:solidFill>
                 <a:latin typeface="Arial" pitchFamily="34" charset="0"/>
                 <a:ea typeface="Arial" charset="-128"/>
@@ -12896,7 +12896,7 @@
             <a:r>
               <a:rPr lang="en-US" altLang="en-US" sz="1000" b="1" dirty="0">
                 <a:solidFill>
-                  <a:srgbClr val="8C96A6"/>
+                  <a:srgbClr val="7A8494"/>
                 </a:solidFill>
                 <a:latin typeface="Arial" pitchFamily="34" charset="0"/>
                 <a:ea typeface="Arial" charset="-128"/>
@@ -12955,7 +12955,7 @@
             <a:r>
               <a:rPr lang="en-US" altLang="en-US" sz="1000" b="1" dirty="0">
                 <a:solidFill>
-                  <a:srgbClr val="8C96A6"/>
+                  <a:srgbClr val="7A8494"/>
                 </a:solidFill>
                 <a:latin typeface="Arial" pitchFamily="34" charset="0"/>
                 <a:ea typeface="Arial" charset="-128"/>
@@ -13014,7 +13014,7 @@
             <a:r>
               <a:rPr lang="en-US" altLang="en-US" sz="1000" b="1" dirty="0">
                 <a:solidFill>
-                  <a:srgbClr val="8C96A6"/>
+                  <a:srgbClr val="7A8494"/>
                 </a:solidFill>
                 <a:latin typeface="Arial" pitchFamily="34" charset="0"/>
                 <a:ea typeface="Arial" charset="-128"/>
@@ -13310,8 +13310,8 @@
           <p:nvPr/>
         </p:nvGraphicFramePr>
         <p:xfrm>
-          <a:off x="7178040" y="1664208"/>
-          <a:ext cx="2240280" cy="694944"/>
+          <a:off x="7178040" y="1627632"/>
+          <a:ext cx="2240280" cy="640080"/>
         </p:xfrm>
         <a:graphic xmlns:a="http://schemas.openxmlformats.org/drawingml/2006/main">
           <a:graphicData uri="http://schemas.openxmlformats.org/drawingml/2006/chart">
@@ -14148,7 +14148,7 @@
         </p:nvSpPr>
         <p:spPr>
           <a:xfrm>
-            <a:off x="7680960" y="3182112"/>
+            <a:off x="7680960" y="3163824"/>
             <a:ext cx="3657600" cy="274320"/>
           </a:xfrm>
           <a:prstGeom prst="rect">
@@ -14187,7 +14187,7 @@
         </p:nvSpPr>
         <p:spPr>
           <a:xfrm>
-            <a:off x="7680960" y="3547872"/>
+            <a:off x="7680960" y="3493008"/>
             <a:ext cx="3840480" cy="1234440"/>
           </a:xfrm>
           <a:prstGeom prst="rect">
@@ -14269,7 +14269,7 @@
         </p:nvSpPr>
         <p:spPr>
           <a:xfrm>
-            <a:off x="7680960" y="4983480"/>
+            <a:off x="7680960" y="4846320"/>
             <a:ext cx="1463040" cy="402336"/>
           </a:xfrm>
           <a:prstGeom prst="rect">
@@ -14314,7 +14314,7 @@
         </p:nvSpPr>
         <p:spPr>
           <a:xfrm>
-            <a:off x="9198864" y="5184648"/>
+            <a:off x="9198864" y="5047488"/>
             <a:ext cx="493776" cy="0"/>
           </a:xfrm>
           <a:prstGeom prst="line">
@@ -14338,7 +14338,7 @@
         </p:nvSpPr>
         <p:spPr>
           <a:xfrm>
-            <a:off x="9765792" y="4983480"/>
+            <a:off x="9765792" y="4846320"/>
             <a:ext cx="1645920" cy="402336"/>
           </a:xfrm>
           <a:prstGeom prst="rect">
@@ -14379,7 +14379,7 @@
         </p:nvSpPr>
         <p:spPr>
           <a:xfrm>
-            <a:off x="7589520" y="5458968"/>
+            <a:off x="7589520" y="5321808"/>
             <a:ext cx="1645920" cy="237744"/>
           </a:xfrm>
           <a:prstGeom prst="rect">
@@ -14418,7 +14418,7 @@
         </p:nvSpPr>
         <p:spPr>
           <a:xfrm>
-            <a:off x="9582912" y="5458968"/>
+            <a:off x="9582912" y="5321808"/>
             <a:ext cx="2011680" cy="237744"/>
           </a:xfrm>
           <a:prstGeom prst="rect">
@@ -14703,7 +14703,7 @@
             <a:r>
               <a:rPr lang="en-US" altLang="en-US" sz="1000" b="1" dirty="0">
                 <a:solidFill>
-                  <a:srgbClr val="8C96A6"/>
+                  <a:srgbClr val="7A8494"/>
                 </a:solidFill>
                 <a:latin typeface="Arial" pitchFamily="34" charset="0"/>
                 <a:ea typeface="Arial" charset="-128"/>
@@ -14762,7 +14762,7 @@
             <a:r>
               <a:rPr lang="en-US" altLang="en-US" sz="1000" b="1" dirty="0">
                 <a:solidFill>
-                  <a:srgbClr val="8C96A6"/>
+                  <a:srgbClr val="7A8494"/>
                 </a:solidFill>
                 <a:latin typeface="Arial" pitchFamily="34" charset="0"/>
                 <a:ea typeface="Arial" charset="-128"/>
@@ -14880,7 +14880,7 @@
             <a:r>
               <a:rPr lang="en-US" altLang="en-US" sz="1000" b="1" dirty="0">
                 <a:solidFill>
-                  <a:srgbClr val="8C96A6"/>
+                  <a:srgbClr val="7A8494"/>
                 </a:solidFill>
                 <a:latin typeface="Arial" pitchFamily="34" charset="0"/>
                 <a:ea typeface="Arial" charset="-128"/>
@@ -15176,8 +15176,8 @@
           <p:nvPr/>
         </p:nvGraphicFramePr>
         <p:xfrm>
-          <a:off x="7178040" y="1664208"/>
-          <a:ext cx="2240280" cy="694944"/>
+          <a:off x="7178040" y="1627632"/>
+          <a:ext cx="2240280" cy="640080"/>
         </p:xfrm>
         <a:graphic xmlns:a="http://schemas.openxmlformats.org/drawingml/2006/main">
           <a:graphicData uri="http://schemas.openxmlformats.org/drawingml/2006/chart">
@@ -16764,7 +16764,7 @@
             <a:r>
               <a:rPr lang="en-US" altLang="en-US" sz="1000" b="1" dirty="0">
                 <a:solidFill>
-                  <a:srgbClr val="8C96A6"/>
+                  <a:srgbClr val="7A8494"/>
                 </a:solidFill>
                 <a:latin typeface="Arial" pitchFamily="34" charset="0"/>
                 <a:ea typeface="Arial" charset="-128"/>
@@ -16941,7 +16941,7 @@
             <a:r>
               <a:rPr lang="en-US" altLang="en-US" sz="1000" b="1" dirty="0">
                 <a:solidFill>
-                  <a:srgbClr val="8C96A6"/>
+                  <a:srgbClr val="7A8494"/>
                 </a:solidFill>
                 <a:latin typeface="Arial" pitchFamily="34" charset="0"/>
                 <a:ea typeface="Arial" charset="-128"/>
@@ -20914,7 +20914,7 @@
             <a:r>
               <a:rPr lang="en-US" altLang="en-US" sz="1000" b="1" dirty="0">
                 <a:solidFill>
-                  <a:srgbClr val="8C96A6"/>
+                  <a:srgbClr val="7A8494"/>
                 </a:solidFill>
                 <a:latin typeface="Arial" pitchFamily="34" charset="0"/>
                 <a:ea typeface="Arial" charset="-128"/>
@@ -21091,7 +21091,7 @@
             <a:r>
               <a:rPr lang="en-US" altLang="en-US" sz="1000" b="1" dirty="0">
                 <a:solidFill>
-                  <a:srgbClr val="8C96A6"/>
+                  <a:srgbClr val="7A8494"/>
                 </a:solidFill>
                 <a:latin typeface="Arial" pitchFamily="34" charset="0"/>
                 <a:ea typeface="Arial" charset="-128"/>
@@ -21226,7 +21226,7 @@
               <a:buNone/>
             </a:pPr>
             <a:r>
-              <a:rPr lang="en-US" altLang="en-US" sz="2000" b="1" spc="100" kern="0" dirty="0">
+              <a:rPr lang="en-US" altLang="en-US" sz="1600" b="1" spc="100" kern="0" dirty="0">
                 <a:solidFill>
                   <a:srgbClr val="14284B"/>
                 </a:solidFill>
@@ -21236,7 +21236,7 @@
               </a:rPr>
               <a:t>CASH</a:t>
             </a:r>
-            <a:endParaRPr lang="en-US" sz="2000" dirty="0"/>
+            <a:endParaRPr lang="en-US" sz="1600" dirty="0"/>
           </a:p>
         </p:txBody>
       </p:sp>
@@ -21499,7 +21499,7 @@
         </p:nvSpPr>
         <p:spPr>
           <a:xfrm>
-            <a:off x="2834640" y="2834640"/>
+            <a:off x="2834640" y="3127248"/>
             <a:ext cx="2286000" cy="475488"/>
           </a:xfrm>
           <a:prstGeom prst="rect">
@@ -21561,7 +21561,7 @@
         </p:nvSpPr>
         <p:spPr>
           <a:xfrm>
-            <a:off x="2834640" y="3429000"/>
+            <a:off x="2834640" y="3721608"/>
             <a:ext cx="2286000" cy="548640"/>
           </a:xfrm>
           <a:prstGeom prst="rect">
@@ -21600,7 +21600,7 @@
         </p:nvSpPr>
         <p:spPr>
           <a:xfrm>
-            <a:off x="2834640" y="4114800"/>
+            <a:off x="2834640" y="4407408"/>
             <a:ext cx="2286000" cy="237744"/>
           </a:xfrm>
           <a:prstGeom prst="rect">
@@ -23066,7 +23066,7 @@
             <a:r>
               <a:rPr lang="en-US" altLang="en-US" sz="1000" b="1" dirty="0">
                 <a:solidFill>
-                  <a:srgbClr val="8C96A6"/>
+                  <a:srgbClr val="7A8494"/>
                 </a:solidFill>
                 <a:latin typeface="Arial" pitchFamily="34" charset="0"/>
                 <a:ea typeface="Arial" charset="-128"/>
@@ -23243,7 +23243,7 @@
             <a:r>
               <a:rPr lang="en-US" altLang="en-US" sz="1000" b="1" dirty="0">
                 <a:solidFill>
-                  <a:srgbClr val="8C96A6"/>
+                  <a:srgbClr val="7A8494"/>
                 </a:solidFill>
                 <a:latin typeface="Arial" pitchFamily="34" charset="0"/>
                 <a:ea typeface="Arial" charset="-128"/>
@@ -24666,7 +24666,7 @@
                 <a:ea typeface="Yu Gothic" charset="-128"/>
                 <a:cs typeface="Yu Gothic" pitchFamily="34" charset="-120"/>
               </a:rPr>
-              <a:t>条件を満たし、P.19 の投資規律を通過した会社を買う。</a:t>
+              <a:t>候補条件で絞り込み、P.19 の投資規律で「買うべき会社」かを見極める。</a:t>
             </a:r>
             <a:endParaRPr lang="ja-JP" sz="1400" dirty="0"/>
           </a:p>
@@ -24926,7 +24926,7 @@
             <a:r>
               <a:rPr lang="en-US" altLang="en-US" sz="1000" b="1" dirty="0">
                 <a:solidFill>
-                  <a:srgbClr val="8C96A6"/>
+                  <a:srgbClr val="7A8494"/>
                 </a:solidFill>
                 <a:latin typeface="Arial" pitchFamily="34" charset="0"/>
                 <a:ea typeface="Arial" charset="-128"/>
@@ -25103,7 +25103,7 @@
             <a:r>
               <a:rPr lang="en-US" altLang="en-US" sz="1000" b="1" dirty="0">
                 <a:solidFill>
-                  <a:srgbClr val="8C96A6"/>
+                  <a:srgbClr val="7A8494"/>
                 </a:solidFill>
                 <a:latin typeface="Arial" pitchFamily="34" charset="0"/>
                 <a:ea typeface="Arial" charset="-128"/>
@@ -25758,7 +25758,7 @@
                 <a:ea typeface="Yu Gothic Medium" charset="-128"/>
                 <a:cs typeface="Yu Gothic Medium" pitchFamily="34" charset="-120"/>
               </a:rPr>
-              <a:t>返済の原資となる利益</a:t>
+              <a:t>借入余力の目安となる利益</a:t>
             </a:r>
             <a:endParaRPr lang="ja-JP" sz="1200" dirty="0"/>
           </a:p>
@@ -25809,9 +25809,6 @@
           <a:lstStyle/>
           <a:p>
             <a:pPr algn="l" indent="0" marL="0">
-              <a:lnSpc>
-                <a:spcPts val="1600"/>
-              </a:lnSpc>
               <a:buNone/>
             </a:pPr>
             <a:r>
@@ -25823,27 +25820,7 @@
                 <a:ea typeface="Yu Gothic" charset="-128"/>
                 <a:cs typeface="Yu Gothic" pitchFamily="34" charset="-120"/>
               </a:rPr>
-              <a:t>キャッシュ・</a:t>
-            </a:r>
-            <a:endParaRPr lang="ja-JP" sz="1200" dirty="0"/>
-          </a:p>
-          <a:p>
-            <a:pPr algn="l" indent="0" marL="0">
-              <a:lnSpc>
-                <a:spcPts val="1600"/>
-              </a:lnSpc>
-              <a:buNone/>
-            </a:pPr>
-            <a:r>
-              <a:rPr lang="ja-JP" altLang="en-US" sz="1200" b="1" dirty="0">
-                <a:solidFill>
-                  <a:srgbClr val="14284B"/>
-                </a:solidFill>
-                <a:latin typeface="Yu Gothic" pitchFamily="34" charset="0"/>
-                <a:ea typeface="Yu Gothic" charset="-128"/>
-                <a:cs typeface="Yu Gothic" pitchFamily="34" charset="-120"/>
-              </a:rPr>
-              <a:t>財務</a:t>
+              <a:t>資金・財務</a:t>
             </a:r>
             <a:endParaRPr lang="ja-JP" sz="1200" dirty="0"/>
           </a:p>
@@ -26022,7 +25999,7 @@
                 <a:ea typeface="Yu Gothic Medium" charset="-128"/>
                 <a:cs typeface="Yu Gothic Medium" pitchFamily="34" charset="-120"/>
               </a:rPr>
-              <a:t>引き継ぐ借入の重さ</a:t>
+              <a:t>現預金を引いた実質の借入</a:t>
             </a:r>
             <a:endParaRPr lang="ja-JP" sz="1200" dirty="0"/>
           </a:p>
@@ -26194,9 +26171,6 @@
           <a:lstStyle/>
           <a:p>
             <a:pPr algn="l" indent="0" marL="0">
-              <a:lnSpc>
-                <a:spcPts val="1600"/>
-              </a:lnSpc>
               <a:buNone/>
             </a:pPr>
             <a:r>
@@ -26208,27 +26182,7 @@
                 <a:ea typeface="Yu Gothic" charset="-128"/>
                 <a:cs typeface="Yu Gothic" pitchFamily="34" charset="-120"/>
               </a:rPr>
-              <a:t>価値・</a:t>
-            </a:r>
-            <a:endParaRPr lang="ja-JP" sz="1200" dirty="0"/>
-          </a:p>
-          <a:p>
-            <a:pPr algn="l" indent="0" marL="0">
-              <a:lnSpc>
-                <a:spcPts val="1600"/>
-              </a:lnSpc>
-              <a:buNone/>
-            </a:pPr>
-            <a:r>
-              <a:rPr lang="ja-JP" altLang="en-US" sz="1200" b="1" dirty="0">
-                <a:solidFill>
-                  <a:srgbClr val="14284B"/>
-                </a:solidFill>
-                <a:latin typeface="Yu Gothic" pitchFamily="34" charset="0"/>
-                <a:ea typeface="Yu Gothic" charset="-128"/>
-                <a:cs typeface="Yu Gothic" pitchFamily="34" charset="-120"/>
-              </a:rPr>
-              <a:t>リターン</a:t>
+              <a:t>価値・リターン</a:t>
             </a:r>
             <a:endParaRPr lang="ja-JP" sz="1200" dirty="0"/>
           </a:p>
@@ -29489,7 +29443,7 @@
             <a:r>
               <a:rPr lang="en-US" altLang="en-US" sz="1000" b="1" dirty="0">
                 <a:solidFill>
-                  <a:srgbClr val="8C96A6"/>
+                  <a:srgbClr val="7A8494"/>
                 </a:solidFill>
                 <a:latin typeface="Arial" pitchFamily="34" charset="0"/>
                 <a:ea typeface="Arial" charset="-128"/>
@@ -29548,7 +29502,7 @@
             <a:r>
               <a:rPr lang="en-US" altLang="en-US" sz="1000" b="1" dirty="0">
                 <a:solidFill>
-                  <a:srgbClr val="8C96A6"/>
+                  <a:srgbClr val="7A8494"/>
                 </a:solidFill>
                 <a:latin typeface="Arial" pitchFamily="34" charset="0"/>
                 <a:ea typeface="Arial" charset="-128"/>
@@ -29666,7 +29620,7 @@
             <a:r>
               <a:rPr lang="en-US" altLang="en-US" sz="1000" b="1" dirty="0">
                 <a:solidFill>
-                  <a:srgbClr val="8C96A6"/>
+                  <a:srgbClr val="7A8494"/>
                 </a:solidFill>
                 <a:latin typeface="Arial" pitchFamily="34" charset="0"/>
                 <a:ea typeface="Arial" charset="-128"/>
@@ -29765,7 +29719,7 @@
         <p:spPr>
           <a:xfrm>
             <a:off x="548640" y="1691640"/>
-            <a:ext cx="2035454" cy="4069080"/>
+            <a:ext cx="2035454" cy="4050792"/>
           </a:xfrm>
           <a:prstGeom prst="rect">
             <a:avLst/>
@@ -29784,7 +29738,7 @@
         </p:nvSpPr>
         <p:spPr>
           <a:xfrm>
-            <a:off x="731520" y="1801368"/>
+            <a:off x="731520" y="1819656"/>
             <a:ext cx="1737360" cy="274320"/>
           </a:xfrm>
           <a:prstGeom prst="rect">
@@ -29823,7 +29777,7 @@
         </p:nvSpPr>
         <p:spPr>
           <a:xfrm>
-            <a:off x="731520" y="2075688"/>
+            <a:off x="731520" y="2093976"/>
             <a:ext cx="1737360" cy="256032"/>
           </a:xfrm>
           <a:prstGeom prst="rect">
@@ -29862,8 +29816,8 @@
         </p:nvSpPr>
         <p:spPr>
           <a:xfrm>
-            <a:off x="676656" y="2468880"/>
-            <a:ext cx="1779422" cy="384048"/>
+            <a:off x="676656" y="2478024"/>
+            <a:ext cx="1779422" cy="365760"/>
           </a:xfrm>
           <a:prstGeom prst="rect">
             <a:avLst/>
@@ -29887,8 +29841,8 @@
         </p:nvSpPr>
         <p:spPr>
           <a:xfrm>
-            <a:off x="804672" y="2624328"/>
-            <a:ext cx="73152" cy="73152"/>
+            <a:off x="745236" y="2628900"/>
+            <a:ext cx="64008" cy="64008"/>
           </a:xfrm>
           <a:prstGeom prst="ellipse">
             <a:avLst/>
@@ -29907,24 +29861,24 @@
         </p:nvSpPr>
         <p:spPr>
           <a:xfrm>
-            <a:off x="969264" y="2468880"/>
-            <a:ext cx="822960" cy="384048"/>
-          </a:xfrm>
-          <a:prstGeom prst="rect">
-            <a:avLst/>
-          </a:prstGeom>
-          <a:noFill/>
-          <a:ln/>
-        </p:spPr>
-        <p:txBody>
-          <a:bodyPr wrap="square" lIns="0" tIns="0" rIns="0" bIns="0" rtlCol="0" anchor="ctr"/>
-          <a:lstStyle/>
-          <a:p>
-            <a:pPr algn="l" indent="0" marL="0">
-              <a:buNone/>
-            </a:pPr>
-            <a:r>
-              <a:rPr lang="ja-JP" altLang="en-US" sz="1200" b="1" dirty="0">
+            <a:off x="886968" y="2478024"/>
+            <a:ext cx="1554480" cy="365760"/>
+          </a:xfrm>
+          <a:prstGeom prst="rect">
+            <a:avLst/>
+          </a:prstGeom>
+          <a:noFill/>
+          <a:ln/>
+        </p:spPr>
+        <p:txBody>
+          <a:bodyPr wrap="square" lIns="0" tIns="0" rIns="0" bIns="0" rtlCol="0" anchor="ctr"/>
+          <a:lstStyle/>
+          <a:p>
+            <a:pPr algn="l" indent="0" marL="0">
+              <a:buNone/>
+            </a:pPr>
+            <a:r>
+              <a:rPr lang="ja-JP" altLang="en-US" sz="1100" b="1" dirty="0">
                 <a:solidFill>
                   <a:srgbClr val="14284B"/>
                 </a:solidFill>
@@ -29934,59 +29888,99 @@
               </a:rPr>
               <a:t>連結売上</a:t>
             </a:r>
-            <a:endParaRPr lang="ja-JP" sz="1200" dirty="0"/>
-          </a:p>
-        </p:txBody>
-      </p:sp>
-      <p:sp>
-        <p:nvSpPr>
-          <p:cNvPr id="24" name="Text 21"/>
-          <p:cNvSpPr txBox="1"/>
-          <p:nvPr/>
-        </p:nvSpPr>
-        <p:spPr>
-          <a:xfrm>
-            <a:off x="1700784" y="2468880"/>
-            <a:ext cx="603504" cy="384048"/>
-          </a:xfrm>
-          <a:prstGeom prst="rect">
-            <a:avLst/>
-          </a:prstGeom>
-          <a:noFill/>
-          <a:ln/>
-        </p:spPr>
-        <p:txBody>
-          <a:bodyPr wrap="square" lIns="0" tIns="0" rIns="0" bIns="0" rtlCol="0" anchor="ctr"/>
-          <a:lstStyle/>
-          <a:p>
-            <a:pPr algn="r" indent="0" marL="0">
-              <a:buNone/>
-            </a:pPr>
-            <a:r>
-              <a:rPr lang="ja-JP" altLang="en-US" sz="1200" b="1" dirty="0">
-                <a:solidFill>
-                  <a:srgbClr val="8C6D3F"/>
+            <a:endParaRPr lang="ja-JP" sz="1100" dirty="0"/>
+          </a:p>
+        </p:txBody>
+      </p:sp>
+      <p:sp>
+        <p:nvSpPr>
+          <p:cNvPr id="24" name="Shape 21"/>
+          <p:cNvSpPr/>
+          <p:nvPr/>
+        </p:nvSpPr>
+        <p:spPr>
+          <a:xfrm>
+            <a:off x="676656" y="2916936"/>
+            <a:ext cx="1779422" cy="365760"/>
+          </a:xfrm>
+          <a:prstGeom prst="rect">
+            <a:avLst/>
+          </a:prstGeom>
+          <a:solidFill>
+            <a:srgbClr val="FFFFFF"/>
+          </a:solidFill>
+          <a:ln/>
+        </p:spPr>
+      </p:sp>
+      <p:sp>
+        <p:nvSpPr>
+          <p:cNvPr id="25" name="Shape 22"/>
+          <p:cNvSpPr/>
+          <p:nvPr/>
+        </p:nvSpPr>
+        <p:spPr>
+          <a:xfrm>
+            <a:off x="745236" y="3067812"/>
+            <a:ext cx="64008" cy="64008"/>
+          </a:xfrm>
+          <a:prstGeom prst="ellipse">
+            <a:avLst/>
+          </a:prstGeom>
+          <a:solidFill>
+            <a:srgbClr val="B08D57"/>
+          </a:solidFill>
+          <a:ln/>
+        </p:spPr>
+      </p:sp>
+      <p:sp>
+        <p:nvSpPr>
+          <p:cNvPr id="26" name="Text 23"/>
+          <p:cNvSpPr txBox="1"/>
+          <p:nvPr/>
+        </p:nvSpPr>
+        <p:spPr>
+          <a:xfrm>
+            <a:off x="886968" y="2916936"/>
+            <a:ext cx="1554480" cy="365760"/>
+          </a:xfrm>
+          <a:prstGeom prst="rect">
+            <a:avLst/>
+          </a:prstGeom>
+          <a:noFill/>
+          <a:ln/>
+        </p:spPr>
+        <p:txBody>
+          <a:bodyPr wrap="square" lIns="0" tIns="0" rIns="0" bIns="0" rtlCol="0" anchor="ctr"/>
+          <a:lstStyle/>
+          <a:p>
+            <a:pPr algn="l" indent="0" marL="0">
+              <a:buNone/>
+            </a:pPr>
+            <a:r>
+              <a:rPr lang="ja-JP" altLang="en-US" sz="1100" b="1" dirty="0">
+                <a:solidFill>
+                  <a:srgbClr val="14284B"/>
                 </a:solidFill>
                 <a:latin typeface="Yu Gothic" pitchFamily="34" charset="0"/>
                 <a:ea typeface="Yu Gothic" charset="-128"/>
                 <a:cs typeface="Yu Gothic" pitchFamily="34" charset="-120"/>
               </a:rPr>
-              <a:t>30億円</a:t>
-            </a:r>
-            <a:endParaRPr lang="ja-JP" sz="1200" dirty="0"/>
-          </a:p>
-        </p:txBody>
-      </p:sp>
-      <p:sp>
-        <p:nvSpPr>
-          <p:cNvPr id="25" name="Shape 22"/>
-          <p:cNvSpPr/>
-          <p:nvPr/>
-        </p:nvSpPr>
-        <p:spPr>
-          <a:xfrm>
-            <a:off x="676656" y="2907792"/>
-            <a:ext cx="1779422" cy="384048"/>
+              <a:t>成長率</a:t>
+            </a:r>
+            <a:endParaRPr lang="ja-JP" sz="1100" dirty="0"/>
+          </a:p>
+        </p:txBody>
+      </p:sp>
+      <p:sp>
+        <p:nvSpPr>
+          <p:cNvPr id="27" name="Shape 24"/>
+          <p:cNvSpPr/>
+          <p:nvPr/>
+        </p:nvSpPr>
+        <p:spPr>
+          <a:xfrm>
+            <a:off x="676656" y="3355848"/>
+            <a:ext cx="1779422" cy="365760"/>
           </a:xfrm>
           <a:prstGeom prst="rect">
             <a:avLst/>
@@ -29999,14 +29993,14 @@
       </p:sp>
       <p:sp>
         <p:nvSpPr>
-          <p:cNvPr id="26" name="Shape 23"/>
-          <p:cNvSpPr/>
-          <p:nvPr/>
-        </p:nvSpPr>
-        <p:spPr>
-          <a:xfrm>
-            <a:off x="804672" y="3063240"/>
-            <a:ext cx="73152" cy="73152"/>
+          <p:cNvPr id="28" name="Shape 25"/>
+          <p:cNvSpPr/>
+          <p:nvPr/>
+        </p:nvSpPr>
+        <p:spPr>
+          <a:xfrm>
+            <a:off x="745236" y="3506724"/>
+            <a:ext cx="64008" cy="64008"/>
           </a:xfrm>
           <a:prstGeom prst="ellipse">
             <a:avLst/>
@@ -30019,30 +30013,30 @@
       </p:sp>
       <p:sp>
         <p:nvSpPr>
-          <p:cNvPr id="27" name="Text 24"/>
-          <p:cNvSpPr txBox="1"/>
-          <p:nvPr/>
-        </p:nvSpPr>
-        <p:spPr>
-          <a:xfrm>
-            <a:off x="969264" y="2907792"/>
-            <a:ext cx="1444752" cy="384048"/>
-          </a:xfrm>
-          <a:prstGeom prst="rect">
-            <a:avLst/>
-          </a:prstGeom>
-          <a:noFill/>
-          <a:ln/>
-        </p:spPr>
-        <p:txBody>
-          <a:bodyPr wrap="square" lIns="0" tIns="0" rIns="0" bIns="0" rtlCol="0" anchor="ctr"/>
-          <a:lstStyle/>
-          <a:p>
-            <a:pPr algn="l" indent="0" marL="0">
-              <a:buNone/>
-            </a:pPr>
-            <a:r>
-              <a:rPr lang="ja-JP" altLang="en-US" sz="1200" b="1" dirty="0">
+          <p:cNvPr id="29" name="Text 26"/>
+          <p:cNvSpPr txBox="1"/>
+          <p:nvPr/>
+        </p:nvSpPr>
+        <p:spPr>
+          <a:xfrm>
+            <a:off x="886968" y="3355848"/>
+            <a:ext cx="1554480" cy="365760"/>
+          </a:xfrm>
+          <a:prstGeom prst="rect">
+            <a:avLst/>
+          </a:prstGeom>
+          <a:noFill/>
+          <a:ln/>
+        </p:spPr>
+        <p:txBody>
+          <a:bodyPr wrap="square" lIns="0" tIns="0" rIns="0" bIns="0" rtlCol="0" anchor="ctr"/>
+          <a:lstStyle/>
+          <a:p>
+            <a:pPr algn="l" indent="0" marL="0">
+              <a:buNone/>
+            </a:pPr>
+            <a:r>
+              <a:rPr lang="ja-JP" altLang="en-US" sz="1100" b="1" dirty="0">
                 <a:solidFill>
                   <a:srgbClr val="14284B"/>
                 </a:solidFill>
@@ -30050,22 +30044,22 @@
                 <a:ea typeface="Yu Gothic" charset="-128"/>
                 <a:cs typeface="Yu Gothic" pitchFamily="34" charset="-120"/>
               </a:rPr>
-              <a:t>成長率</a:t>
-            </a:r>
-            <a:endParaRPr lang="ja-JP" sz="1200" dirty="0"/>
-          </a:p>
-        </p:txBody>
-      </p:sp>
-      <p:sp>
-        <p:nvSpPr>
-          <p:cNvPr id="28" name="Shape 25"/>
-          <p:cNvSpPr/>
-          <p:nvPr/>
-        </p:nvSpPr>
-        <p:spPr>
-          <a:xfrm>
-            <a:off x="676656" y="3346704"/>
-            <a:ext cx="1779422" cy="384048"/>
+              <a:t>M&amp;A寄与売上</a:t>
+            </a:r>
+            <a:endParaRPr lang="ja-JP" sz="1100" dirty="0"/>
+          </a:p>
+        </p:txBody>
+      </p:sp>
+      <p:sp>
+        <p:nvSpPr>
+          <p:cNvPr id="30" name="Shape 27"/>
+          <p:cNvSpPr/>
+          <p:nvPr/>
+        </p:nvSpPr>
+        <p:spPr>
+          <a:xfrm>
+            <a:off x="676656" y="3794760"/>
+            <a:ext cx="1779422" cy="365760"/>
           </a:xfrm>
           <a:prstGeom prst="rect">
             <a:avLst/>
@@ -30078,14 +30072,14 @@
       </p:sp>
       <p:sp>
         <p:nvSpPr>
-          <p:cNvPr id="29" name="Shape 26"/>
-          <p:cNvSpPr/>
-          <p:nvPr/>
-        </p:nvSpPr>
-        <p:spPr>
-          <a:xfrm>
-            <a:off x="804672" y="3502152"/>
-            <a:ext cx="73152" cy="73152"/>
+          <p:cNvPr id="31" name="Shape 28"/>
+          <p:cNvSpPr/>
+          <p:nvPr/>
+        </p:nvSpPr>
+        <p:spPr>
+          <a:xfrm>
+            <a:off x="745236" y="3945636"/>
+            <a:ext cx="64008" cy="64008"/>
           </a:xfrm>
           <a:prstGeom prst="ellipse">
             <a:avLst/>
@@ -30098,30 +30092,30 @@
       </p:sp>
       <p:sp>
         <p:nvSpPr>
-          <p:cNvPr id="30" name="Text 27"/>
-          <p:cNvSpPr txBox="1"/>
-          <p:nvPr/>
-        </p:nvSpPr>
-        <p:spPr>
-          <a:xfrm>
-            <a:off x="969264" y="3346704"/>
-            <a:ext cx="1444752" cy="384048"/>
-          </a:xfrm>
-          <a:prstGeom prst="rect">
-            <a:avLst/>
-          </a:prstGeom>
-          <a:noFill/>
-          <a:ln/>
-        </p:spPr>
-        <p:txBody>
-          <a:bodyPr wrap="square" lIns="0" tIns="0" rIns="0" bIns="0" rtlCol="0" anchor="ctr"/>
-          <a:lstStyle/>
-          <a:p>
-            <a:pPr algn="l" indent="0" marL="0">
-              <a:buNone/>
-            </a:pPr>
-            <a:r>
-              <a:rPr lang="ja-JP" altLang="en-US" sz="1200" b="1" dirty="0">
+          <p:cNvPr id="32" name="Text 29"/>
+          <p:cNvSpPr txBox="1"/>
+          <p:nvPr/>
+        </p:nvSpPr>
+        <p:spPr>
+          <a:xfrm>
+            <a:off x="886968" y="3794760"/>
+            <a:ext cx="1554480" cy="365760"/>
+          </a:xfrm>
+          <a:prstGeom prst="rect">
+            <a:avLst/>
+          </a:prstGeom>
+          <a:noFill/>
+          <a:ln/>
+        </p:spPr>
+        <p:txBody>
+          <a:bodyPr wrap="square" lIns="0" tIns="0" rIns="0" bIns="0" rtlCol="0" anchor="ctr"/>
+          <a:lstStyle/>
+          <a:p>
+            <a:pPr algn="l" indent="0" marL="0">
+              <a:buNone/>
+            </a:pPr>
+            <a:r>
+              <a:rPr lang="ja-JP" altLang="en-US" sz="1100" b="1" dirty="0">
                 <a:solidFill>
                   <a:srgbClr val="14284B"/>
                 </a:solidFill>
@@ -30129,100 +30123,21 @@
                 <a:ea typeface="Yu Gothic" charset="-128"/>
                 <a:cs typeface="Yu Gothic" pitchFamily="34" charset="-120"/>
               </a:rPr>
-              <a:t>M&amp;A寄与売上</a:t>
-            </a:r>
-            <a:endParaRPr lang="ja-JP" sz="1200" dirty="0"/>
-          </a:p>
-        </p:txBody>
-      </p:sp>
-      <p:sp>
-        <p:nvSpPr>
-          <p:cNvPr id="31" name="Shape 28"/>
-          <p:cNvSpPr/>
-          <p:nvPr/>
-        </p:nvSpPr>
-        <p:spPr>
-          <a:xfrm>
-            <a:off x="676656" y="3785616"/>
-            <a:ext cx="1779422" cy="384048"/>
-          </a:xfrm>
-          <a:prstGeom prst="rect">
-            <a:avLst/>
-          </a:prstGeom>
-          <a:solidFill>
-            <a:srgbClr val="FFFFFF"/>
-          </a:solidFill>
-          <a:ln/>
-        </p:spPr>
-      </p:sp>
-      <p:sp>
-        <p:nvSpPr>
-          <p:cNvPr id="32" name="Shape 29"/>
-          <p:cNvSpPr/>
-          <p:nvPr/>
-        </p:nvSpPr>
-        <p:spPr>
-          <a:xfrm>
-            <a:off x="804672" y="3941064"/>
-            <a:ext cx="73152" cy="73152"/>
-          </a:xfrm>
-          <a:prstGeom prst="ellipse">
-            <a:avLst/>
-          </a:prstGeom>
-          <a:solidFill>
-            <a:srgbClr val="B08D57"/>
-          </a:solidFill>
-          <a:ln/>
-        </p:spPr>
-      </p:sp>
-      <p:sp>
-        <p:nvSpPr>
-          <p:cNvPr id="33" name="Text 30"/>
-          <p:cNvSpPr txBox="1"/>
-          <p:nvPr/>
-        </p:nvSpPr>
-        <p:spPr>
-          <a:xfrm>
-            <a:off x="969264" y="3785616"/>
-            <a:ext cx="1444752" cy="384048"/>
-          </a:xfrm>
-          <a:prstGeom prst="rect">
-            <a:avLst/>
-          </a:prstGeom>
-          <a:noFill/>
-          <a:ln/>
-        </p:spPr>
-        <p:txBody>
-          <a:bodyPr wrap="square" lIns="0" tIns="0" rIns="0" bIns="0" rtlCol="0" anchor="ctr"/>
-          <a:lstStyle/>
-          <a:p>
-            <a:pPr algn="l" indent="0" marL="0">
-              <a:buNone/>
-            </a:pPr>
-            <a:r>
-              <a:rPr lang="ja-JP" altLang="en-US" sz="1200" b="1" dirty="0">
-                <a:solidFill>
-                  <a:srgbClr val="14284B"/>
-                </a:solidFill>
-                <a:latin typeface="Yu Gothic" pitchFamily="34" charset="0"/>
-                <a:ea typeface="Yu Gothic" charset="-128"/>
-                <a:cs typeface="Yu Gothic" pitchFamily="34" charset="-120"/>
-              </a:rPr>
               <a:t>新規事業売上</a:t>
             </a:r>
-            <a:endParaRPr lang="ja-JP" sz="1200" dirty="0"/>
-          </a:p>
-        </p:txBody>
-      </p:sp>
-      <p:sp>
-        <p:nvSpPr>
-          <p:cNvPr id="34" name="Shape 31"/>
-          <p:cNvSpPr/>
-          <p:nvPr/>
-        </p:nvSpPr>
-        <p:spPr>
-          <a:xfrm>
-            <a:off x="731520" y="5212080"/>
+            <a:endParaRPr lang="ja-JP" sz="1100" dirty="0"/>
+          </a:p>
+        </p:txBody>
+      </p:sp>
+      <p:sp>
+        <p:nvSpPr>
+          <p:cNvPr id="33" name="Shape 30"/>
+          <p:cNvSpPr/>
+          <p:nvPr/>
+        </p:nvSpPr>
+        <p:spPr>
+          <a:xfrm>
+            <a:off x="731520" y="5138928"/>
             <a:ext cx="1673352" cy="0"/>
           </a:xfrm>
           <a:prstGeom prst="line">
@@ -30239,14 +30154,14 @@
       </p:sp>
       <p:sp>
         <p:nvSpPr>
-          <p:cNvPr id="35" name="Text 32"/>
-          <p:cNvSpPr txBox="1"/>
-          <p:nvPr/>
-        </p:nvSpPr>
-        <p:spPr>
-          <a:xfrm>
-            <a:off x="731520" y="5257800"/>
-            <a:ext cx="1737360" cy="219456"/>
+          <p:cNvPr id="34" name="Text 31"/>
+          <p:cNvSpPr txBox="1"/>
+          <p:nvPr/>
+        </p:nvSpPr>
+        <p:spPr>
+          <a:xfrm>
+            <a:off x="731520" y="5193792"/>
+            <a:ext cx="1737360" cy="201168"/>
           </a:xfrm>
           <a:prstGeom prst="rect">
             <a:avLst/>
@@ -30270,7 +30185,7 @@
                 <a:ea typeface="Yu Gothic Medium" charset="-128"/>
                 <a:cs typeface="Yu Gothic Medium" pitchFamily="34" charset="-120"/>
               </a:rPr>
-              <a:t>主な責任</a:t>
+              <a:t>FY2031 目標</a:t>
             </a:r>
             <a:endParaRPr lang="ja-JP" sz="1000" dirty="0"/>
           </a:p>
@@ -30278,14 +30193,14 @@
       </p:sp>
       <p:sp>
         <p:nvSpPr>
-          <p:cNvPr id="36" name="Text 33"/>
-          <p:cNvSpPr txBox="1"/>
-          <p:nvPr/>
-        </p:nvSpPr>
-        <p:spPr>
-          <a:xfrm>
-            <a:off x="731520" y="5468112"/>
-            <a:ext cx="1737360" cy="256032"/>
+          <p:cNvPr id="35" name="Text 32"/>
+          <p:cNvSpPr txBox="1"/>
+          <p:nvPr/>
+        </p:nvSpPr>
+        <p:spPr>
+          <a:xfrm>
+            <a:off x="731520" y="5394960"/>
+            <a:ext cx="1737360" cy="237744"/>
           </a:xfrm>
           <a:prstGeom prst="rect">
             <a:avLst/>
@@ -30303,13 +30218,13 @@
             <a:r>
               <a:rPr lang="ja-JP" altLang="en-US" sz="1200" b="1" dirty="0">
                 <a:solidFill>
-                  <a:srgbClr val="14284B"/>
+                  <a:srgbClr val="8C6D3F"/>
                 </a:solidFill>
                 <a:latin typeface="Yu Gothic" pitchFamily="34" charset="0"/>
                 <a:ea typeface="Yu Gothic" charset="-128"/>
                 <a:cs typeface="Yu Gothic" pitchFamily="34" charset="-120"/>
               </a:rPr>
-              <a:t>各社社長・親会社</a:t>
+              <a:t>30億円（暫定）</a:t>
             </a:r>
             <a:endParaRPr lang="ja-JP" sz="1200" dirty="0"/>
           </a:p>
@@ -30317,14 +30232,14 @@
       </p:sp>
       <p:sp>
         <p:nvSpPr>
-          <p:cNvPr id="37" name="Shape 34"/>
+          <p:cNvPr id="36" name="Shape 33"/>
           <p:cNvSpPr/>
           <p:nvPr/>
         </p:nvSpPr>
         <p:spPr>
           <a:xfrm>
             <a:off x="2812694" y="1691640"/>
-            <a:ext cx="2035454" cy="4069080"/>
+            <a:ext cx="2035454" cy="4050792"/>
           </a:xfrm>
           <a:prstGeom prst="rect">
             <a:avLst/>
@@ -30337,13 +30252,13 @@
       </p:sp>
       <p:sp>
         <p:nvSpPr>
-          <p:cNvPr id="38" name="Text 35"/>
-          <p:cNvSpPr txBox="1"/>
-          <p:nvPr/>
-        </p:nvSpPr>
-        <p:spPr>
-          <a:xfrm>
-            <a:off x="2995574" y="1801368"/>
+          <p:cNvPr id="37" name="Text 34"/>
+          <p:cNvSpPr txBox="1"/>
+          <p:nvPr/>
+        </p:nvSpPr>
+        <p:spPr>
+          <a:xfrm>
+            <a:off x="2995574" y="1819656"/>
             <a:ext cx="1737360" cy="274320"/>
           </a:xfrm>
           <a:prstGeom prst="rect">
@@ -30376,13 +30291,13 @@
       </p:sp>
       <p:sp>
         <p:nvSpPr>
-          <p:cNvPr id="39" name="Text 36"/>
-          <p:cNvSpPr txBox="1"/>
-          <p:nvPr/>
-        </p:nvSpPr>
-        <p:spPr>
-          <a:xfrm>
-            <a:off x="2995574" y="2075688"/>
+          <p:cNvPr id="38" name="Text 35"/>
+          <p:cNvSpPr txBox="1"/>
+          <p:nvPr/>
+        </p:nvSpPr>
+        <p:spPr>
+          <a:xfrm>
+            <a:off x="2995574" y="2093976"/>
             <a:ext cx="1737360" cy="256032"/>
           </a:xfrm>
           <a:prstGeom prst="rect">
@@ -30415,14 +30330,14 @@
       </p:sp>
       <p:sp>
         <p:nvSpPr>
-          <p:cNvPr id="40" name="Shape 37"/>
-          <p:cNvSpPr/>
-          <p:nvPr/>
-        </p:nvSpPr>
-        <p:spPr>
-          <a:xfrm>
-            <a:off x="2940710" y="2468880"/>
-            <a:ext cx="1779422" cy="384048"/>
+          <p:cNvPr id="39" name="Shape 36"/>
+          <p:cNvSpPr/>
+          <p:nvPr/>
+        </p:nvSpPr>
+        <p:spPr>
+          <a:xfrm>
+            <a:off x="2940710" y="2478024"/>
+            <a:ext cx="1779422" cy="365760"/>
           </a:xfrm>
           <a:prstGeom prst="rect">
             <a:avLst/>
@@ -30435,14 +30350,14 @@
       </p:sp>
       <p:sp>
         <p:nvSpPr>
-          <p:cNvPr id="41" name="Shape 38"/>
-          <p:cNvSpPr/>
-          <p:nvPr/>
-        </p:nvSpPr>
-        <p:spPr>
-          <a:xfrm>
-            <a:off x="3068726" y="2624328"/>
-            <a:ext cx="73152" cy="73152"/>
+          <p:cNvPr id="40" name="Shape 37"/>
+          <p:cNvSpPr/>
+          <p:nvPr/>
+        </p:nvSpPr>
+        <p:spPr>
+          <a:xfrm>
+            <a:off x="3009290" y="2628900"/>
+            <a:ext cx="64008" cy="64008"/>
           </a:xfrm>
           <a:prstGeom prst="ellipse">
             <a:avLst/>
@@ -30455,30 +30370,30 @@
       </p:sp>
       <p:sp>
         <p:nvSpPr>
-          <p:cNvPr id="42" name="Text 39"/>
-          <p:cNvSpPr txBox="1"/>
-          <p:nvPr/>
-        </p:nvSpPr>
-        <p:spPr>
-          <a:xfrm>
-            <a:off x="3233318" y="2468880"/>
-            <a:ext cx="1444752" cy="384048"/>
-          </a:xfrm>
-          <a:prstGeom prst="rect">
-            <a:avLst/>
-          </a:prstGeom>
-          <a:noFill/>
-          <a:ln/>
-        </p:spPr>
-        <p:txBody>
-          <a:bodyPr wrap="square" lIns="0" tIns="0" rIns="0" bIns="0" rtlCol="0" anchor="ctr"/>
-          <a:lstStyle/>
-          <a:p>
-            <a:pPr algn="l" indent="0" marL="0">
-              <a:buNone/>
-            </a:pPr>
-            <a:r>
-              <a:rPr lang="ja-JP" altLang="en-US" sz="1200" b="1" dirty="0">
+          <p:cNvPr id="41" name="Text 38"/>
+          <p:cNvSpPr txBox="1"/>
+          <p:nvPr/>
+        </p:nvSpPr>
+        <p:spPr>
+          <a:xfrm>
+            <a:off x="3151022" y="2478024"/>
+            <a:ext cx="1554480" cy="365760"/>
+          </a:xfrm>
+          <a:prstGeom prst="rect">
+            <a:avLst/>
+          </a:prstGeom>
+          <a:noFill/>
+          <a:ln/>
+        </p:spPr>
+        <p:txBody>
+          <a:bodyPr wrap="square" lIns="0" tIns="0" rIns="0" bIns="0" rtlCol="0" anchor="ctr"/>
+          <a:lstStyle/>
+          <a:p>
+            <a:pPr algn="l" indent="0" marL="0">
+              <a:buNone/>
+            </a:pPr>
+            <a:r>
+              <a:rPr lang="ja-JP" altLang="en-US" sz="1100" b="1" dirty="0">
                 <a:solidFill>
                   <a:srgbClr val="14284B"/>
                 </a:solidFill>
@@ -30488,20 +30403,20 @@
               </a:rPr>
               <a:t>営業利益</a:t>
             </a:r>
-            <a:endParaRPr lang="ja-JP" sz="1200" dirty="0"/>
-          </a:p>
-        </p:txBody>
-      </p:sp>
-      <p:sp>
-        <p:nvSpPr>
-          <p:cNvPr id="43" name="Shape 40"/>
-          <p:cNvSpPr/>
-          <p:nvPr/>
-        </p:nvSpPr>
-        <p:spPr>
-          <a:xfrm>
-            <a:off x="2940710" y="2907792"/>
-            <a:ext cx="1779422" cy="384048"/>
+            <a:endParaRPr lang="ja-JP" sz="1100" dirty="0"/>
+          </a:p>
+        </p:txBody>
+      </p:sp>
+      <p:sp>
+        <p:nvSpPr>
+          <p:cNvPr id="42" name="Shape 39"/>
+          <p:cNvSpPr/>
+          <p:nvPr/>
+        </p:nvSpPr>
+        <p:spPr>
+          <a:xfrm>
+            <a:off x="2940710" y="2916936"/>
+            <a:ext cx="1779422" cy="365760"/>
           </a:xfrm>
           <a:prstGeom prst="rect">
             <a:avLst/>
@@ -30514,14 +30429,14 @@
       </p:sp>
       <p:sp>
         <p:nvSpPr>
-          <p:cNvPr id="44" name="Shape 41"/>
-          <p:cNvSpPr/>
-          <p:nvPr/>
-        </p:nvSpPr>
-        <p:spPr>
-          <a:xfrm>
-            <a:off x="3068726" y="3063240"/>
-            <a:ext cx="73152" cy="73152"/>
+          <p:cNvPr id="43" name="Shape 40"/>
+          <p:cNvSpPr/>
+          <p:nvPr/>
+        </p:nvSpPr>
+        <p:spPr>
+          <a:xfrm>
+            <a:off x="3009290" y="3067812"/>
+            <a:ext cx="64008" cy="64008"/>
           </a:xfrm>
           <a:prstGeom prst="ellipse">
             <a:avLst/>
@@ -30534,30 +30449,30 @@
       </p:sp>
       <p:sp>
         <p:nvSpPr>
-          <p:cNvPr id="45" name="Text 42"/>
-          <p:cNvSpPr txBox="1"/>
-          <p:nvPr/>
-        </p:nvSpPr>
-        <p:spPr>
-          <a:xfrm>
-            <a:off x="3233318" y="2907792"/>
-            <a:ext cx="1444752" cy="384048"/>
-          </a:xfrm>
-          <a:prstGeom prst="rect">
-            <a:avLst/>
-          </a:prstGeom>
-          <a:noFill/>
-          <a:ln/>
-        </p:spPr>
-        <p:txBody>
-          <a:bodyPr wrap="square" lIns="0" tIns="0" rIns="0" bIns="0" rtlCol="0" anchor="ctr"/>
-          <a:lstStyle/>
-          <a:p>
-            <a:pPr algn="l" indent="0" marL="0">
-              <a:buNone/>
-            </a:pPr>
-            <a:r>
-              <a:rPr lang="ja-JP" altLang="en-US" sz="1200" b="1" dirty="0">
+          <p:cNvPr id="44" name="Text 41"/>
+          <p:cNvSpPr txBox="1"/>
+          <p:nvPr/>
+        </p:nvSpPr>
+        <p:spPr>
+          <a:xfrm>
+            <a:off x="3151022" y="2916936"/>
+            <a:ext cx="1554480" cy="365760"/>
+          </a:xfrm>
+          <a:prstGeom prst="rect">
+            <a:avLst/>
+          </a:prstGeom>
+          <a:noFill/>
+          <a:ln/>
+        </p:spPr>
+        <p:txBody>
+          <a:bodyPr wrap="square" lIns="0" tIns="0" rIns="0" bIns="0" rtlCol="0" anchor="ctr"/>
+          <a:lstStyle/>
+          <a:p>
+            <a:pPr algn="l" indent="0" marL="0">
+              <a:buNone/>
+            </a:pPr>
+            <a:r>
+              <a:rPr lang="ja-JP" altLang="en-US" sz="1100" b="1" dirty="0">
                 <a:solidFill>
                   <a:srgbClr val="14284B"/>
                 </a:solidFill>
@@ -30567,20 +30482,20 @@
               </a:rPr>
               <a:t>営業利益率</a:t>
             </a:r>
-            <a:endParaRPr lang="ja-JP" sz="1200" dirty="0"/>
-          </a:p>
-        </p:txBody>
-      </p:sp>
-      <p:sp>
-        <p:nvSpPr>
-          <p:cNvPr id="46" name="Shape 43"/>
-          <p:cNvSpPr/>
-          <p:nvPr/>
-        </p:nvSpPr>
-        <p:spPr>
-          <a:xfrm>
-            <a:off x="2940710" y="3346704"/>
-            <a:ext cx="1779422" cy="384048"/>
+            <a:endParaRPr lang="ja-JP" sz="1100" dirty="0"/>
+          </a:p>
+        </p:txBody>
+      </p:sp>
+      <p:sp>
+        <p:nvSpPr>
+          <p:cNvPr id="45" name="Shape 42"/>
+          <p:cNvSpPr/>
+          <p:nvPr/>
+        </p:nvSpPr>
+        <p:spPr>
+          <a:xfrm>
+            <a:off x="2940710" y="3355848"/>
+            <a:ext cx="1779422" cy="365760"/>
           </a:xfrm>
           <a:prstGeom prst="rect">
             <a:avLst/>
@@ -30593,14 +30508,14 @@
       </p:sp>
       <p:sp>
         <p:nvSpPr>
-          <p:cNvPr id="47" name="Shape 44"/>
-          <p:cNvSpPr/>
-          <p:nvPr/>
-        </p:nvSpPr>
-        <p:spPr>
-          <a:xfrm>
-            <a:off x="3068726" y="3502152"/>
-            <a:ext cx="73152" cy="73152"/>
+          <p:cNvPr id="46" name="Shape 43"/>
+          <p:cNvSpPr/>
+          <p:nvPr/>
+        </p:nvSpPr>
+        <p:spPr>
+          <a:xfrm>
+            <a:off x="3009290" y="3506724"/>
+            <a:ext cx="64008" cy="64008"/>
           </a:xfrm>
           <a:prstGeom prst="ellipse">
             <a:avLst/>
@@ -30613,30 +30528,30 @@
       </p:sp>
       <p:sp>
         <p:nvSpPr>
-          <p:cNvPr id="48" name="Text 45"/>
-          <p:cNvSpPr txBox="1"/>
-          <p:nvPr/>
-        </p:nvSpPr>
-        <p:spPr>
-          <a:xfrm>
-            <a:off x="3233318" y="3346704"/>
-            <a:ext cx="1444752" cy="384048"/>
-          </a:xfrm>
-          <a:prstGeom prst="rect">
-            <a:avLst/>
-          </a:prstGeom>
-          <a:noFill/>
-          <a:ln/>
-        </p:spPr>
-        <p:txBody>
-          <a:bodyPr wrap="square" lIns="0" tIns="0" rIns="0" bIns="0" rtlCol="0" anchor="ctr"/>
-          <a:lstStyle/>
-          <a:p>
-            <a:pPr algn="l" indent="0" marL="0">
-              <a:buNone/>
-            </a:pPr>
-            <a:r>
-              <a:rPr lang="ja-JP" altLang="en-US" sz="1200" b="1" dirty="0">
+          <p:cNvPr id="47" name="Text 44"/>
+          <p:cNvSpPr txBox="1"/>
+          <p:nvPr/>
+        </p:nvSpPr>
+        <p:spPr>
+          <a:xfrm>
+            <a:off x="3151022" y="3355848"/>
+            <a:ext cx="1554480" cy="365760"/>
+          </a:xfrm>
+          <a:prstGeom prst="rect">
+            <a:avLst/>
+          </a:prstGeom>
+          <a:noFill/>
+          <a:ln/>
+        </p:spPr>
+        <p:txBody>
+          <a:bodyPr wrap="square" lIns="0" tIns="0" rIns="0" bIns="0" rtlCol="0" anchor="ctr"/>
+          <a:lstStyle/>
+          <a:p>
+            <a:pPr algn="l" indent="0" marL="0">
+              <a:buNone/>
+            </a:pPr>
+            <a:r>
+              <a:rPr lang="ja-JP" altLang="en-US" sz="1100" b="1" dirty="0">
                 <a:solidFill>
                   <a:srgbClr val="14284B"/>
                 </a:solidFill>
@@ -30646,20 +30561,20 @@
               </a:rPr>
               <a:t>EBITDA</a:t>
             </a:r>
-            <a:endParaRPr lang="ja-JP" sz="1200" dirty="0"/>
-          </a:p>
-        </p:txBody>
-      </p:sp>
-      <p:sp>
-        <p:nvSpPr>
-          <p:cNvPr id="49" name="Shape 46"/>
-          <p:cNvSpPr/>
-          <p:nvPr/>
-        </p:nvSpPr>
-        <p:spPr>
-          <a:xfrm>
-            <a:off x="2940710" y="3785616"/>
-            <a:ext cx="1779422" cy="384048"/>
+            <a:endParaRPr lang="ja-JP" sz="1100" dirty="0"/>
+          </a:p>
+        </p:txBody>
+      </p:sp>
+      <p:sp>
+        <p:nvSpPr>
+          <p:cNvPr id="48" name="Shape 45"/>
+          <p:cNvSpPr/>
+          <p:nvPr/>
+        </p:nvSpPr>
+        <p:spPr>
+          <a:xfrm>
+            <a:off x="2940710" y="3794760"/>
+            <a:ext cx="1779422" cy="365760"/>
           </a:xfrm>
           <a:prstGeom prst="rect">
             <a:avLst/>
@@ -30672,14 +30587,14 @@
       </p:sp>
       <p:sp>
         <p:nvSpPr>
-          <p:cNvPr id="50" name="Shape 47"/>
-          <p:cNvSpPr/>
-          <p:nvPr/>
-        </p:nvSpPr>
-        <p:spPr>
-          <a:xfrm>
-            <a:off x="3068726" y="3941064"/>
-            <a:ext cx="73152" cy="73152"/>
+          <p:cNvPr id="49" name="Shape 46"/>
+          <p:cNvSpPr/>
+          <p:nvPr/>
+        </p:nvSpPr>
+        <p:spPr>
+          <a:xfrm>
+            <a:off x="3009290" y="3945636"/>
+            <a:ext cx="64008" cy="64008"/>
           </a:xfrm>
           <a:prstGeom prst="ellipse">
             <a:avLst/>
@@ -30692,30 +30607,30 @@
       </p:sp>
       <p:sp>
         <p:nvSpPr>
-          <p:cNvPr id="51" name="Text 48"/>
-          <p:cNvSpPr txBox="1"/>
-          <p:nvPr/>
-        </p:nvSpPr>
-        <p:spPr>
-          <a:xfrm>
-            <a:off x="3233318" y="3785616"/>
-            <a:ext cx="1444752" cy="384048"/>
-          </a:xfrm>
-          <a:prstGeom prst="rect">
-            <a:avLst/>
-          </a:prstGeom>
-          <a:noFill/>
-          <a:ln/>
-        </p:spPr>
-        <p:txBody>
-          <a:bodyPr wrap="square" lIns="0" tIns="0" rIns="0" bIns="0" rtlCol="0" anchor="ctr"/>
-          <a:lstStyle/>
-          <a:p>
-            <a:pPr algn="l" indent="0" marL="0">
-              <a:buNone/>
-            </a:pPr>
-            <a:r>
-              <a:rPr lang="ja-JP" altLang="en-US" sz="1200" b="1" dirty="0">
+          <p:cNvPr id="50" name="Text 47"/>
+          <p:cNvSpPr txBox="1"/>
+          <p:nvPr/>
+        </p:nvSpPr>
+        <p:spPr>
+          <a:xfrm>
+            <a:off x="3151022" y="3794760"/>
+            <a:ext cx="1554480" cy="365760"/>
+          </a:xfrm>
+          <a:prstGeom prst="rect">
+            <a:avLst/>
+          </a:prstGeom>
+          <a:noFill/>
+          <a:ln/>
+        </p:spPr>
+        <p:txBody>
+          <a:bodyPr wrap="square" lIns="0" tIns="0" rIns="0" bIns="0" rtlCol="0" anchor="ctr"/>
+          <a:lstStyle/>
+          <a:p>
+            <a:pPr algn="l" indent="0" marL="0">
+              <a:buNone/>
+            </a:pPr>
+            <a:r>
+              <a:rPr lang="ja-JP" altLang="en-US" sz="1100" b="1" dirty="0">
                 <a:solidFill>
                   <a:srgbClr val="14284B"/>
                 </a:solidFill>
@@ -30725,19 +30640,19 @@
               </a:rPr>
               <a:t>ROIC</a:t>
             </a:r>
-            <a:endParaRPr lang="ja-JP" sz="1200" dirty="0"/>
-          </a:p>
-        </p:txBody>
-      </p:sp>
-      <p:sp>
-        <p:nvSpPr>
-          <p:cNvPr id="52" name="Shape 49"/>
-          <p:cNvSpPr/>
-          <p:nvPr/>
-        </p:nvSpPr>
-        <p:spPr>
-          <a:xfrm>
-            <a:off x="2995574" y="5212080"/>
+            <a:endParaRPr lang="ja-JP" sz="1100" dirty="0"/>
+          </a:p>
+        </p:txBody>
+      </p:sp>
+      <p:sp>
+        <p:nvSpPr>
+          <p:cNvPr id="51" name="Shape 48"/>
+          <p:cNvSpPr/>
+          <p:nvPr/>
+        </p:nvSpPr>
+        <p:spPr>
+          <a:xfrm>
+            <a:off x="2995574" y="5138928"/>
             <a:ext cx="1673352" cy="0"/>
           </a:xfrm>
           <a:prstGeom prst="line">
@@ -30754,14 +30669,14 @@
       </p:sp>
       <p:sp>
         <p:nvSpPr>
-          <p:cNvPr id="53" name="Text 50"/>
-          <p:cNvSpPr txBox="1"/>
-          <p:nvPr/>
-        </p:nvSpPr>
-        <p:spPr>
-          <a:xfrm>
-            <a:off x="2995574" y="5257800"/>
-            <a:ext cx="1737360" cy="219456"/>
+          <p:cNvPr id="52" name="Text 49"/>
+          <p:cNvSpPr txBox="1"/>
+          <p:nvPr/>
+        </p:nvSpPr>
+        <p:spPr>
+          <a:xfrm>
+            <a:off x="2995574" y="5193792"/>
+            <a:ext cx="1737360" cy="201168"/>
           </a:xfrm>
           <a:prstGeom prst="rect">
             <a:avLst/>
@@ -30785,7 +30700,7 @@
                 <a:ea typeface="Yu Gothic Medium" charset="-128"/>
                 <a:cs typeface="Yu Gothic Medium" pitchFamily="34" charset="-120"/>
               </a:rPr>
-              <a:t>主な責任</a:t>
+              <a:t>FY2031 目標</a:t>
             </a:r>
             <a:endParaRPr lang="ja-JP" sz="1000" dirty="0"/>
           </a:p>
@@ -30793,53 +30708,53 @@
       </p:sp>
       <p:sp>
         <p:nvSpPr>
-          <p:cNvPr id="54" name="Text 51"/>
-          <p:cNvSpPr txBox="1"/>
-          <p:nvPr/>
-        </p:nvSpPr>
-        <p:spPr>
-          <a:xfrm>
-            <a:off x="2995574" y="5468112"/>
-            <a:ext cx="1737360" cy="256032"/>
-          </a:xfrm>
-          <a:prstGeom prst="rect">
-            <a:avLst/>
-          </a:prstGeom>
-          <a:noFill/>
-          <a:ln/>
-        </p:spPr>
-        <p:txBody>
-          <a:bodyPr wrap="square" lIns="0" tIns="0" rIns="0" bIns="0" rtlCol="0" anchor="ctr"/>
-          <a:lstStyle/>
-          <a:p>
-            <a:pPr algn="l" indent="0" marL="0">
-              <a:buNone/>
-            </a:pPr>
-            <a:r>
-              <a:rPr lang="ja-JP" altLang="en-US" sz="1200" b="1" dirty="0">
-                <a:solidFill>
-                  <a:srgbClr val="14284B"/>
+          <p:cNvPr id="53" name="Text 50"/>
+          <p:cNvSpPr txBox="1"/>
+          <p:nvPr/>
+        </p:nvSpPr>
+        <p:spPr>
+          <a:xfrm>
+            <a:off x="2995574" y="5394960"/>
+            <a:ext cx="1737360" cy="237744"/>
+          </a:xfrm>
+          <a:prstGeom prst="rect">
+            <a:avLst/>
+          </a:prstGeom>
+          <a:noFill/>
+          <a:ln/>
+        </p:spPr>
+        <p:txBody>
+          <a:bodyPr wrap="square" lIns="0" tIns="0" rIns="0" bIns="0" rtlCol="0" anchor="ctr"/>
+          <a:lstStyle/>
+          <a:p>
+            <a:pPr algn="l" indent="0" marL="0">
+              <a:buNone/>
+            </a:pPr>
+            <a:r>
+              <a:rPr lang="ja-JP" altLang="en-US" sz="1100" b="1" dirty="0">
+                <a:solidFill>
+                  <a:srgbClr val="5B6675"/>
                 </a:solidFill>
                 <a:latin typeface="Yu Gothic" pitchFamily="34" charset="0"/>
                 <a:ea typeface="Yu Gothic" charset="-128"/>
                 <a:cs typeface="Yu Gothic" pitchFamily="34" charset="-120"/>
               </a:rPr>
-              <a:t>各子会社の社長</a:t>
-            </a:r>
-            <a:endParaRPr lang="ja-JP" sz="1200" dirty="0"/>
-          </a:p>
-        </p:txBody>
-      </p:sp>
-      <p:sp>
-        <p:nvSpPr>
-          <p:cNvPr id="55" name="Shape 52"/>
+              <a:t>財務モデル策定後に確定</a:t>
+            </a:r>
+            <a:endParaRPr lang="ja-JP" sz="1100" dirty="0"/>
+          </a:p>
+        </p:txBody>
+      </p:sp>
+      <p:sp>
+        <p:nvSpPr>
+          <p:cNvPr id="54" name="Shape 51"/>
           <p:cNvSpPr/>
           <p:nvPr/>
         </p:nvSpPr>
         <p:spPr>
           <a:xfrm>
             <a:off x="5076749" y="1691640"/>
-            <a:ext cx="2035454" cy="4069080"/>
+            <a:ext cx="2035454" cy="4050792"/>
           </a:xfrm>
           <a:prstGeom prst="rect">
             <a:avLst/>
@@ -30852,13 +30767,13 @@
       </p:sp>
       <p:sp>
         <p:nvSpPr>
-          <p:cNvPr id="56" name="Text 53"/>
-          <p:cNvSpPr txBox="1"/>
-          <p:nvPr/>
-        </p:nvSpPr>
-        <p:spPr>
-          <a:xfrm>
-            <a:off x="5259629" y="1801368"/>
+          <p:cNvPr id="55" name="Text 52"/>
+          <p:cNvSpPr txBox="1"/>
+          <p:nvPr/>
+        </p:nvSpPr>
+        <p:spPr>
+          <a:xfrm>
+            <a:off x="5259629" y="1819656"/>
             <a:ext cx="1737360" cy="274320"/>
           </a:xfrm>
           <a:prstGeom prst="rect">
@@ -30891,13 +30806,13 @@
       </p:sp>
       <p:sp>
         <p:nvSpPr>
-          <p:cNvPr id="57" name="Text 54"/>
-          <p:cNvSpPr txBox="1"/>
-          <p:nvPr/>
-        </p:nvSpPr>
-        <p:spPr>
-          <a:xfrm>
-            <a:off x="5259629" y="2075688"/>
+          <p:cNvPr id="56" name="Text 53"/>
+          <p:cNvSpPr txBox="1"/>
+          <p:nvPr/>
+        </p:nvSpPr>
+        <p:spPr>
+          <a:xfrm>
+            <a:off x="5259629" y="2093976"/>
             <a:ext cx="1737360" cy="256032"/>
           </a:xfrm>
           <a:prstGeom prst="rect">
@@ -30930,14 +30845,14 @@
       </p:sp>
       <p:sp>
         <p:nvSpPr>
-          <p:cNvPr id="58" name="Shape 55"/>
-          <p:cNvSpPr/>
-          <p:nvPr/>
-        </p:nvSpPr>
-        <p:spPr>
-          <a:xfrm>
-            <a:off x="5204765" y="2468880"/>
-            <a:ext cx="1779422" cy="384048"/>
+          <p:cNvPr id="57" name="Shape 54"/>
+          <p:cNvSpPr/>
+          <p:nvPr/>
+        </p:nvSpPr>
+        <p:spPr>
+          <a:xfrm>
+            <a:off x="5204765" y="2478024"/>
+            <a:ext cx="1779422" cy="365760"/>
           </a:xfrm>
           <a:prstGeom prst="rect">
             <a:avLst/>
@@ -30950,14 +30865,14 @@
       </p:sp>
       <p:sp>
         <p:nvSpPr>
-          <p:cNvPr id="59" name="Shape 56"/>
-          <p:cNvSpPr/>
-          <p:nvPr/>
-        </p:nvSpPr>
-        <p:spPr>
-          <a:xfrm>
-            <a:off x="5332781" y="2624328"/>
-            <a:ext cx="73152" cy="73152"/>
+          <p:cNvPr id="58" name="Shape 55"/>
+          <p:cNvSpPr/>
+          <p:nvPr/>
+        </p:nvSpPr>
+        <p:spPr>
+          <a:xfrm>
+            <a:off x="5273345" y="2628900"/>
+            <a:ext cx="64008" cy="64008"/>
           </a:xfrm>
           <a:prstGeom prst="ellipse">
             <a:avLst/>
@@ -30970,30 +30885,30 @@
       </p:sp>
       <p:sp>
         <p:nvSpPr>
-          <p:cNvPr id="60" name="Text 57"/>
-          <p:cNvSpPr txBox="1"/>
-          <p:nvPr/>
-        </p:nvSpPr>
-        <p:spPr>
-          <a:xfrm>
-            <a:off x="5497373" y="2468880"/>
-            <a:ext cx="1444752" cy="384048"/>
-          </a:xfrm>
-          <a:prstGeom prst="rect">
-            <a:avLst/>
-          </a:prstGeom>
-          <a:noFill/>
-          <a:ln/>
-        </p:spPr>
-        <p:txBody>
-          <a:bodyPr wrap="square" lIns="0" tIns="0" rIns="0" bIns="0" rtlCol="0" anchor="ctr"/>
-          <a:lstStyle/>
-          <a:p>
-            <a:pPr algn="l" indent="0" marL="0">
-              <a:buNone/>
-            </a:pPr>
-            <a:r>
-              <a:rPr lang="ja-JP" altLang="en-US" sz="1200" b="1" dirty="0">
+          <p:cNvPr id="59" name="Text 56"/>
+          <p:cNvSpPr txBox="1"/>
+          <p:nvPr/>
+        </p:nvSpPr>
+        <p:spPr>
+          <a:xfrm>
+            <a:off x="5415077" y="2478024"/>
+            <a:ext cx="1554480" cy="365760"/>
+          </a:xfrm>
+          <a:prstGeom prst="rect">
+            <a:avLst/>
+          </a:prstGeom>
+          <a:noFill/>
+          <a:ln/>
+        </p:spPr>
+        <p:txBody>
+          <a:bodyPr wrap="square" lIns="0" tIns="0" rIns="0" bIns="0" rtlCol="0" anchor="ctr"/>
+          <a:lstStyle/>
+          <a:p>
+            <a:pPr algn="l" indent="0" marL="0">
+              <a:buNone/>
+            </a:pPr>
+            <a:r>
+              <a:rPr lang="ja-JP" altLang="en-US" sz="1100" b="1" dirty="0">
                 <a:solidFill>
                   <a:srgbClr val="14284B"/>
                 </a:solidFill>
@@ -31003,20 +30918,20 @@
               </a:rPr>
               <a:t>営業CF</a:t>
             </a:r>
-            <a:endParaRPr lang="ja-JP" sz="1200" dirty="0"/>
-          </a:p>
-        </p:txBody>
-      </p:sp>
-      <p:sp>
-        <p:nvSpPr>
-          <p:cNvPr id="61" name="Shape 58"/>
-          <p:cNvSpPr/>
-          <p:nvPr/>
-        </p:nvSpPr>
-        <p:spPr>
-          <a:xfrm>
-            <a:off x="5204765" y="2907792"/>
-            <a:ext cx="1779422" cy="384048"/>
+            <a:endParaRPr lang="ja-JP" sz="1100" dirty="0"/>
+          </a:p>
+        </p:txBody>
+      </p:sp>
+      <p:sp>
+        <p:nvSpPr>
+          <p:cNvPr id="60" name="Shape 57"/>
+          <p:cNvSpPr/>
+          <p:nvPr/>
+        </p:nvSpPr>
+        <p:spPr>
+          <a:xfrm>
+            <a:off x="5204765" y="2916936"/>
+            <a:ext cx="1779422" cy="365760"/>
           </a:xfrm>
           <a:prstGeom prst="rect">
             <a:avLst/>
@@ -31029,14 +30944,14 @@
       </p:sp>
       <p:sp>
         <p:nvSpPr>
-          <p:cNvPr id="62" name="Shape 59"/>
-          <p:cNvSpPr/>
-          <p:nvPr/>
-        </p:nvSpPr>
-        <p:spPr>
-          <a:xfrm>
-            <a:off x="5332781" y="3063240"/>
-            <a:ext cx="73152" cy="73152"/>
+          <p:cNvPr id="61" name="Shape 58"/>
+          <p:cNvSpPr/>
+          <p:nvPr/>
+        </p:nvSpPr>
+        <p:spPr>
+          <a:xfrm>
+            <a:off x="5273345" y="3067812"/>
+            <a:ext cx="64008" cy="64008"/>
           </a:xfrm>
           <a:prstGeom prst="ellipse">
             <a:avLst/>
@@ -31049,30 +30964,30 @@
       </p:sp>
       <p:sp>
         <p:nvSpPr>
-          <p:cNvPr id="63" name="Text 60"/>
-          <p:cNvSpPr txBox="1"/>
-          <p:nvPr/>
-        </p:nvSpPr>
-        <p:spPr>
-          <a:xfrm>
-            <a:off x="5497373" y="2907792"/>
-            <a:ext cx="1444752" cy="384048"/>
-          </a:xfrm>
-          <a:prstGeom prst="rect">
-            <a:avLst/>
-          </a:prstGeom>
-          <a:noFill/>
-          <a:ln/>
-        </p:spPr>
-        <p:txBody>
-          <a:bodyPr wrap="square" lIns="0" tIns="0" rIns="0" bIns="0" rtlCol="0" anchor="ctr"/>
-          <a:lstStyle/>
-          <a:p>
-            <a:pPr algn="l" indent="0" marL="0">
-              <a:buNone/>
-            </a:pPr>
-            <a:r>
-              <a:rPr lang="ja-JP" altLang="en-US" sz="1200" b="1" dirty="0">
+          <p:cNvPr id="62" name="Text 59"/>
+          <p:cNvSpPr txBox="1"/>
+          <p:nvPr/>
+        </p:nvSpPr>
+        <p:spPr>
+          <a:xfrm>
+            <a:off x="5415077" y="2916936"/>
+            <a:ext cx="1554480" cy="365760"/>
+          </a:xfrm>
+          <a:prstGeom prst="rect">
+            <a:avLst/>
+          </a:prstGeom>
+          <a:noFill/>
+          <a:ln/>
+        </p:spPr>
+        <p:txBody>
+          <a:bodyPr wrap="square" lIns="0" tIns="0" rIns="0" bIns="0" rtlCol="0" anchor="ctr"/>
+          <a:lstStyle/>
+          <a:p>
+            <a:pPr algn="l" indent="0" marL="0">
+              <a:buNone/>
+            </a:pPr>
+            <a:r>
+              <a:rPr lang="ja-JP" altLang="en-US" sz="1100" b="1" dirty="0">
                 <a:solidFill>
                   <a:srgbClr val="14284B"/>
                 </a:solidFill>
@@ -31082,20 +30997,20 @@
               </a:rPr>
               <a:t>現預金</a:t>
             </a:r>
-            <a:endParaRPr lang="ja-JP" sz="1200" dirty="0"/>
-          </a:p>
-        </p:txBody>
-      </p:sp>
-      <p:sp>
-        <p:nvSpPr>
-          <p:cNvPr id="64" name="Shape 61"/>
-          <p:cNvSpPr/>
-          <p:nvPr/>
-        </p:nvSpPr>
-        <p:spPr>
-          <a:xfrm>
-            <a:off x="5204765" y="3346704"/>
-            <a:ext cx="1779422" cy="384048"/>
+            <a:endParaRPr lang="ja-JP" sz="1100" dirty="0"/>
+          </a:p>
+        </p:txBody>
+      </p:sp>
+      <p:sp>
+        <p:nvSpPr>
+          <p:cNvPr id="63" name="Shape 60"/>
+          <p:cNvSpPr/>
+          <p:nvPr/>
+        </p:nvSpPr>
+        <p:spPr>
+          <a:xfrm>
+            <a:off x="5204765" y="3355848"/>
+            <a:ext cx="1779422" cy="365760"/>
           </a:xfrm>
           <a:prstGeom prst="rect">
             <a:avLst/>
@@ -31108,14 +31023,14 @@
       </p:sp>
       <p:sp>
         <p:nvSpPr>
-          <p:cNvPr id="65" name="Shape 62"/>
-          <p:cNvSpPr/>
-          <p:nvPr/>
-        </p:nvSpPr>
-        <p:spPr>
-          <a:xfrm>
-            <a:off x="5332781" y="3502152"/>
-            <a:ext cx="73152" cy="73152"/>
+          <p:cNvPr id="64" name="Shape 61"/>
+          <p:cNvSpPr/>
+          <p:nvPr/>
+        </p:nvSpPr>
+        <p:spPr>
+          <a:xfrm>
+            <a:off x="5273345" y="3506724"/>
+            <a:ext cx="64008" cy="64008"/>
           </a:xfrm>
           <a:prstGeom prst="ellipse">
             <a:avLst/>
@@ -31128,30 +31043,30 @@
       </p:sp>
       <p:sp>
         <p:nvSpPr>
-          <p:cNvPr id="66" name="Text 63"/>
-          <p:cNvSpPr txBox="1"/>
-          <p:nvPr/>
-        </p:nvSpPr>
-        <p:spPr>
-          <a:xfrm>
-            <a:off x="5497373" y="3346704"/>
-            <a:ext cx="1444752" cy="384048"/>
-          </a:xfrm>
-          <a:prstGeom prst="rect">
-            <a:avLst/>
-          </a:prstGeom>
-          <a:noFill/>
-          <a:ln/>
-        </p:spPr>
-        <p:txBody>
-          <a:bodyPr wrap="square" lIns="0" tIns="0" rIns="0" bIns="0" rtlCol="0" anchor="ctr"/>
-          <a:lstStyle/>
-          <a:p>
-            <a:pPr algn="l" indent="0" marL="0">
-              <a:buNone/>
-            </a:pPr>
-            <a:r>
-              <a:rPr lang="ja-JP" altLang="en-US" sz="1200" b="1" dirty="0">
+          <p:cNvPr id="65" name="Text 62"/>
+          <p:cNvSpPr txBox="1"/>
+          <p:nvPr/>
+        </p:nvSpPr>
+        <p:spPr>
+          <a:xfrm>
+            <a:off x="5415077" y="3355848"/>
+            <a:ext cx="1554480" cy="365760"/>
+          </a:xfrm>
+          <a:prstGeom prst="rect">
+            <a:avLst/>
+          </a:prstGeom>
+          <a:noFill/>
+          <a:ln/>
+        </p:spPr>
+        <p:txBody>
+          <a:bodyPr wrap="square" lIns="0" tIns="0" rIns="0" bIns="0" rtlCol="0" anchor="ctr"/>
+          <a:lstStyle/>
+          <a:p>
+            <a:pPr algn="l" indent="0" marL="0">
+              <a:buNone/>
+            </a:pPr>
+            <a:r>
+              <a:rPr lang="ja-JP" altLang="en-US" sz="1100" b="1" dirty="0">
                 <a:solidFill>
                   <a:srgbClr val="14284B"/>
                 </a:solidFill>
@@ -31161,20 +31076,20 @@
               </a:rPr>
               <a:t>Net Debt</a:t>
             </a:r>
-            <a:endParaRPr lang="ja-JP" sz="1200" dirty="0"/>
-          </a:p>
-        </p:txBody>
-      </p:sp>
-      <p:sp>
-        <p:nvSpPr>
-          <p:cNvPr id="67" name="Shape 64"/>
-          <p:cNvSpPr/>
-          <p:nvPr/>
-        </p:nvSpPr>
-        <p:spPr>
-          <a:xfrm>
-            <a:off x="5204765" y="3785616"/>
-            <a:ext cx="1779422" cy="384048"/>
+            <a:endParaRPr lang="ja-JP" sz="1100" dirty="0"/>
+          </a:p>
+        </p:txBody>
+      </p:sp>
+      <p:sp>
+        <p:nvSpPr>
+          <p:cNvPr id="66" name="Shape 63"/>
+          <p:cNvSpPr/>
+          <p:nvPr/>
+        </p:nvSpPr>
+        <p:spPr>
+          <a:xfrm>
+            <a:off x="5204765" y="3794760"/>
+            <a:ext cx="1779422" cy="365760"/>
           </a:xfrm>
           <a:prstGeom prst="rect">
             <a:avLst/>
@@ -31187,14 +31102,14 @@
       </p:sp>
       <p:sp>
         <p:nvSpPr>
-          <p:cNvPr id="68" name="Shape 65"/>
-          <p:cNvSpPr/>
-          <p:nvPr/>
-        </p:nvSpPr>
-        <p:spPr>
-          <a:xfrm>
-            <a:off x="5332781" y="3941064"/>
-            <a:ext cx="73152" cy="73152"/>
+          <p:cNvPr id="67" name="Shape 64"/>
+          <p:cNvSpPr/>
+          <p:nvPr/>
+        </p:nvSpPr>
+        <p:spPr>
+          <a:xfrm>
+            <a:off x="5273345" y="3945636"/>
+            <a:ext cx="64008" cy="64008"/>
           </a:xfrm>
           <a:prstGeom prst="ellipse">
             <a:avLst/>
@@ -31207,30 +31122,30 @@
       </p:sp>
       <p:sp>
         <p:nvSpPr>
-          <p:cNvPr id="69" name="Text 66"/>
-          <p:cNvSpPr txBox="1"/>
-          <p:nvPr/>
-        </p:nvSpPr>
-        <p:spPr>
-          <a:xfrm>
-            <a:off x="5497373" y="3785616"/>
-            <a:ext cx="1444752" cy="384048"/>
-          </a:xfrm>
-          <a:prstGeom prst="rect">
-            <a:avLst/>
-          </a:prstGeom>
-          <a:noFill/>
-          <a:ln/>
-        </p:spPr>
-        <p:txBody>
-          <a:bodyPr wrap="square" lIns="0" tIns="0" rIns="0" bIns="0" rtlCol="0" anchor="ctr"/>
-          <a:lstStyle/>
-          <a:p>
-            <a:pPr algn="l" indent="0" marL="0">
-              <a:buNone/>
-            </a:pPr>
-            <a:r>
-              <a:rPr lang="ja-JP" altLang="en-US" sz="1200" b="1" dirty="0">
+          <p:cNvPr id="68" name="Text 65"/>
+          <p:cNvSpPr txBox="1"/>
+          <p:nvPr/>
+        </p:nvSpPr>
+        <p:spPr>
+          <a:xfrm>
+            <a:off x="5415077" y="3794760"/>
+            <a:ext cx="1554480" cy="365760"/>
+          </a:xfrm>
+          <a:prstGeom prst="rect">
+            <a:avLst/>
+          </a:prstGeom>
+          <a:noFill/>
+          <a:ln/>
+        </p:spPr>
+        <p:txBody>
+          <a:bodyPr wrap="square" lIns="0" tIns="0" rIns="0" bIns="0" rtlCol="0" anchor="ctr"/>
+          <a:lstStyle/>
+          <a:p>
+            <a:pPr algn="l" indent="0" marL="0">
+              <a:buNone/>
+            </a:pPr>
+            <a:r>
+              <a:rPr lang="ja-JP" altLang="en-US" sz="1100" b="1" dirty="0">
                 <a:solidFill>
                   <a:srgbClr val="14284B"/>
                 </a:solidFill>
@@ -31240,19 +31155,19 @@
               </a:rPr>
               <a:t>借入余力</a:t>
             </a:r>
-            <a:endParaRPr lang="ja-JP" sz="1200" dirty="0"/>
-          </a:p>
-        </p:txBody>
-      </p:sp>
-      <p:sp>
-        <p:nvSpPr>
-          <p:cNvPr id="70" name="Shape 67"/>
-          <p:cNvSpPr/>
-          <p:nvPr/>
-        </p:nvSpPr>
-        <p:spPr>
-          <a:xfrm>
-            <a:off x="5259629" y="5212080"/>
+            <a:endParaRPr lang="ja-JP" sz="1100" dirty="0"/>
+          </a:p>
+        </p:txBody>
+      </p:sp>
+      <p:sp>
+        <p:nvSpPr>
+          <p:cNvPr id="69" name="Shape 66"/>
+          <p:cNvSpPr/>
+          <p:nvPr/>
+        </p:nvSpPr>
+        <p:spPr>
+          <a:xfrm>
+            <a:off x="5259629" y="5138928"/>
             <a:ext cx="1673352" cy="0"/>
           </a:xfrm>
           <a:prstGeom prst="line">
@@ -31269,14 +31184,14 @@
       </p:sp>
       <p:sp>
         <p:nvSpPr>
-          <p:cNvPr id="71" name="Text 68"/>
-          <p:cNvSpPr txBox="1"/>
-          <p:nvPr/>
-        </p:nvSpPr>
-        <p:spPr>
-          <a:xfrm>
-            <a:off x="5259629" y="5257800"/>
-            <a:ext cx="1737360" cy="219456"/>
+          <p:cNvPr id="70" name="Text 67"/>
+          <p:cNvSpPr txBox="1"/>
+          <p:nvPr/>
+        </p:nvSpPr>
+        <p:spPr>
+          <a:xfrm>
+            <a:off x="5259629" y="5193792"/>
+            <a:ext cx="1737360" cy="201168"/>
           </a:xfrm>
           <a:prstGeom prst="rect">
             <a:avLst/>
@@ -31300,7 +31215,7 @@
                 <a:ea typeface="Yu Gothic Medium" charset="-128"/>
                 <a:cs typeface="Yu Gothic Medium" pitchFamily="34" charset="-120"/>
               </a:rPr>
-              <a:t>主な責任</a:t>
+              <a:t>FY2031 目標</a:t>
             </a:r>
             <a:endParaRPr lang="ja-JP" sz="1000" dirty="0"/>
           </a:p>
@@ -31308,53 +31223,53 @@
       </p:sp>
       <p:sp>
         <p:nvSpPr>
-          <p:cNvPr id="72" name="Text 69"/>
-          <p:cNvSpPr txBox="1"/>
-          <p:nvPr/>
-        </p:nvSpPr>
-        <p:spPr>
-          <a:xfrm>
-            <a:off x="5259629" y="5468112"/>
-            <a:ext cx="1737360" cy="256032"/>
-          </a:xfrm>
-          <a:prstGeom prst="rect">
-            <a:avLst/>
-          </a:prstGeom>
-          <a:noFill/>
-          <a:ln/>
-        </p:spPr>
-        <p:txBody>
-          <a:bodyPr wrap="square" lIns="0" tIns="0" rIns="0" bIns="0" rtlCol="0" anchor="ctr"/>
-          <a:lstStyle/>
-          <a:p>
-            <a:pPr algn="l" indent="0" marL="0">
-              <a:buNone/>
-            </a:pPr>
-            <a:r>
-              <a:rPr lang="ja-JP" altLang="en-US" sz="1200" b="1" dirty="0">
-                <a:solidFill>
-                  <a:srgbClr val="14284B"/>
+          <p:cNvPr id="71" name="Text 68"/>
+          <p:cNvSpPr txBox="1"/>
+          <p:nvPr/>
+        </p:nvSpPr>
+        <p:spPr>
+          <a:xfrm>
+            <a:off x="5259629" y="5394960"/>
+            <a:ext cx="1737360" cy="237744"/>
+          </a:xfrm>
+          <a:prstGeom prst="rect">
+            <a:avLst/>
+          </a:prstGeom>
+          <a:noFill/>
+          <a:ln/>
+        </p:spPr>
+        <p:txBody>
+          <a:bodyPr wrap="square" lIns="0" tIns="0" rIns="0" bIns="0" rtlCol="0" anchor="ctr"/>
+          <a:lstStyle/>
+          <a:p>
+            <a:pPr algn="l" indent="0" marL="0">
+              <a:buNone/>
+            </a:pPr>
+            <a:r>
+              <a:rPr lang="ja-JP" altLang="en-US" sz="1100" b="1" dirty="0">
+                <a:solidFill>
+                  <a:srgbClr val="5B6675"/>
                 </a:solidFill>
                 <a:latin typeface="Yu Gothic" pitchFamily="34" charset="0"/>
                 <a:ea typeface="Yu Gothic" charset="-128"/>
                 <a:cs typeface="Yu Gothic" pitchFamily="34" charset="-120"/>
               </a:rPr>
-              <a:t>親会社（財務）</a:t>
-            </a:r>
-            <a:endParaRPr lang="ja-JP" sz="1200" dirty="0"/>
-          </a:p>
-        </p:txBody>
-      </p:sp>
-      <p:sp>
-        <p:nvSpPr>
-          <p:cNvPr id="73" name="Shape 70"/>
+              <a:t>財務モデル策定後に確定</a:t>
+            </a:r>
+            <a:endParaRPr lang="ja-JP" sz="1100" dirty="0"/>
+          </a:p>
+        </p:txBody>
+      </p:sp>
+      <p:sp>
+        <p:nvSpPr>
+          <p:cNvPr id="72" name="Shape 69"/>
           <p:cNvSpPr/>
           <p:nvPr/>
         </p:nvSpPr>
         <p:spPr>
           <a:xfrm>
             <a:off x="7340803" y="1691640"/>
-            <a:ext cx="2035454" cy="4069080"/>
+            <a:ext cx="2035454" cy="4050792"/>
           </a:xfrm>
           <a:prstGeom prst="rect">
             <a:avLst/>
@@ -31367,13 +31282,13 @@
       </p:sp>
       <p:sp>
         <p:nvSpPr>
-          <p:cNvPr id="74" name="Text 71"/>
-          <p:cNvSpPr txBox="1"/>
-          <p:nvPr/>
-        </p:nvSpPr>
-        <p:spPr>
-          <a:xfrm>
-            <a:off x="7523683" y="1801368"/>
+          <p:cNvPr id="73" name="Text 70"/>
+          <p:cNvSpPr txBox="1"/>
+          <p:nvPr/>
+        </p:nvSpPr>
+        <p:spPr>
+          <a:xfrm>
+            <a:off x="7523683" y="1819656"/>
             <a:ext cx="1737360" cy="274320"/>
           </a:xfrm>
           <a:prstGeom prst="rect">
@@ -31406,13 +31321,13 @@
       </p:sp>
       <p:sp>
         <p:nvSpPr>
-          <p:cNvPr id="75" name="Text 72"/>
-          <p:cNvSpPr txBox="1"/>
-          <p:nvPr/>
-        </p:nvSpPr>
-        <p:spPr>
-          <a:xfrm>
-            <a:off x="7523683" y="2075688"/>
+          <p:cNvPr id="74" name="Text 71"/>
+          <p:cNvSpPr txBox="1"/>
+          <p:nvPr/>
+        </p:nvSpPr>
+        <p:spPr>
+          <a:xfrm>
+            <a:off x="7523683" y="2093976"/>
             <a:ext cx="1737360" cy="256032"/>
           </a:xfrm>
           <a:prstGeom prst="rect">
@@ -31445,14 +31360,14 @@
       </p:sp>
       <p:sp>
         <p:nvSpPr>
-          <p:cNvPr id="76" name="Shape 73"/>
-          <p:cNvSpPr/>
-          <p:nvPr/>
-        </p:nvSpPr>
-        <p:spPr>
-          <a:xfrm>
-            <a:off x="7468819" y="2468880"/>
-            <a:ext cx="1779422" cy="384048"/>
+          <p:cNvPr id="75" name="Shape 72"/>
+          <p:cNvSpPr/>
+          <p:nvPr/>
+        </p:nvSpPr>
+        <p:spPr>
+          <a:xfrm>
+            <a:off x="7468819" y="2478024"/>
+            <a:ext cx="1779422" cy="365760"/>
           </a:xfrm>
           <a:prstGeom prst="rect">
             <a:avLst/>
@@ -31465,14 +31380,14 @@
       </p:sp>
       <p:sp>
         <p:nvSpPr>
-          <p:cNvPr id="77" name="Shape 74"/>
-          <p:cNvSpPr/>
-          <p:nvPr/>
-        </p:nvSpPr>
-        <p:spPr>
-          <a:xfrm>
-            <a:off x="7596835" y="2624328"/>
-            <a:ext cx="73152" cy="73152"/>
+          <p:cNvPr id="76" name="Shape 73"/>
+          <p:cNvSpPr/>
+          <p:nvPr/>
+        </p:nvSpPr>
+        <p:spPr>
+          <a:xfrm>
+            <a:off x="7537399" y="2628900"/>
+            <a:ext cx="64008" cy="64008"/>
           </a:xfrm>
           <a:prstGeom prst="ellipse">
             <a:avLst/>
@@ -31485,30 +31400,30 @@
       </p:sp>
       <p:sp>
         <p:nvSpPr>
-          <p:cNvPr id="78" name="Text 75"/>
-          <p:cNvSpPr txBox="1"/>
-          <p:nvPr/>
-        </p:nvSpPr>
-        <p:spPr>
-          <a:xfrm>
-            <a:off x="7761427" y="2468880"/>
-            <a:ext cx="1444752" cy="384048"/>
-          </a:xfrm>
-          <a:prstGeom prst="rect">
-            <a:avLst/>
-          </a:prstGeom>
-          <a:noFill/>
-          <a:ln/>
-        </p:spPr>
-        <p:txBody>
-          <a:bodyPr wrap="square" lIns="0" tIns="0" rIns="0" bIns="0" rtlCol="0" anchor="ctr"/>
-          <a:lstStyle/>
-          <a:p>
-            <a:pPr algn="l" indent="0" marL="0">
-              <a:buNone/>
-            </a:pPr>
-            <a:r>
-              <a:rPr lang="ja-JP" altLang="en-US" sz="1200" b="1" dirty="0">
+          <p:cNvPr id="77" name="Text 74"/>
+          <p:cNvSpPr txBox="1"/>
+          <p:nvPr/>
+        </p:nvSpPr>
+        <p:spPr>
+          <a:xfrm>
+            <a:off x="7679131" y="2478024"/>
+            <a:ext cx="1554480" cy="365760"/>
+          </a:xfrm>
+          <a:prstGeom prst="rect">
+            <a:avLst/>
+          </a:prstGeom>
+          <a:noFill/>
+          <a:ln/>
+        </p:spPr>
+        <p:txBody>
+          <a:bodyPr wrap="square" lIns="0" tIns="0" rIns="0" bIns="0" rtlCol="0" anchor="ctr"/>
+          <a:lstStyle/>
+          <a:p>
+            <a:pPr algn="l" indent="0" marL="0">
+              <a:buNone/>
+            </a:pPr>
+            <a:r>
+              <a:rPr lang="ja-JP" altLang="en-US" sz="1100" b="1" dirty="0">
                 <a:solidFill>
                   <a:srgbClr val="14284B"/>
                 </a:solidFill>
@@ -31518,20 +31433,20 @@
               </a:rPr>
               <a:t>子会社社長配置率</a:t>
             </a:r>
-            <a:endParaRPr lang="ja-JP" sz="1200" dirty="0"/>
-          </a:p>
-        </p:txBody>
-      </p:sp>
-      <p:sp>
-        <p:nvSpPr>
-          <p:cNvPr id="79" name="Shape 76"/>
-          <p:cNvSpPr/>
-          <p:nvPr/>
-        </p:nvSpPr>
-        <p:spPr>
-          <a:xfrm>
-            <a:off x="7468819" y="2907792"/>
-            <a:ext cx="1779422" cy="384048"/>
+            <a:endParaRPr lang="ja-JP" sz="1100" dirty="0"/>
+          </a:p>
+        </p:txBody>
+      </p:sp>
+      <p:sp>
+        <p:nvSpPr>
+          <p:cNvPr id="78" name="Shape 75"/>
+          <p:cNvSpPr/>
+          <p:nvPr/>
+        </p:nvSpPr>
+        <p:spPr>
+          <a:xfrm>
+            <a:off x="7468819" y="2916936"/>
+            <a:ext cx="1779422" cy="365760"/>
           </a:xfrm>
           <a:prstGeom prst="rect">
             <a:avLst/>
@@ -31544,14 +31459,14 @@
       </p:sp>
       <p:sp>
         <p:nvSpPr>
-          <p:cNvPr id="80" name="Shape 77"/>
-          <p:cNvSpPr/>
-          <p:nvPr/>
-        </p:nvSpPr>
-        <p:spPr>
-          <a:xfrm>
-            <a:off x="7596835" y="3063240"/>
-            <a:ext cx="73152" cy="73152"/>
+          <p:cNvPr id="79" name="Shape 76"/>
+          <p:cNvSpPr/>
+          <p:nvPr/>
+        </p:nvSpPr>
+        <p:spPr>
+          <a:xfrm>
+            <a:off x="7537399" y="3067812"/>
+            <a:ext cx="64008" cy="64008"/>
           </a:xfrm>
           <a:prstGeom prst="ellipse">
             <a:avLst/>
@@ -31564,30 +31479,30 @@
       </p:sp>
       <p:sp>
         <p:nvSpPr>
-          <p:cNvPr id="81" name="Text 78"/>
-          <p:cNvSpPr txBox="1"/>
-          <p:nvPr/>
-        </p:nvSpPr>
-        <p:spPr>
-          <a:xfrm>
-            <a:off x="7761427" y="2907792"/>
-            <a:ext cx="1444752" cy="384048"/>
-          </a:xfrm>
-          <a:prstGeom prst="rect">
-            <a:avLst/>
-          </a:prstGeom>
-          <a:noFill/>
-          <a:ln/>
-        </p:spPr>
-        <p:txBody>
-          <a:bodyPr wrap="square" lIns="0" tIns="0" rIns="0" bIns="0" rtlCol="0" anchor="ctr"/>
-          <a:lstStyle/>
-          <a:p>
-            <a:pPr algn="l" indent="0" marL="0">
-              <a:buNone/>
-            </a:pPr>
-            <a:r>
-              <a:rPr lang="ja-JP" altLang="en-US" sz="1200" b="1" dirty="0">
+          <p:cNvPr id="80" name="Text 77"/>
+          <p:cNvSpPr txBox="1"/>
+          <p:nvPr/>
+        </p:nvSpPr>
+        <p:spPr>
+          <a:xfrm>
+            <a:off x="7679131" y="2916936"/>
+            <a:ext cx="1554480" cy="365760"/>
+          </a:xfrm>
+          <a:prstGeom prst="rect">
+            <a:avLst/>
+          </a:prstGeom>
+          <a:noFill/>
+          <a:ln/>
+        </p:spPr>
+        <p:txBody>
+          <a:bodyPr wrap="square" lIns="0" tIns="0" rIns="0" bIns="0" rtlCol="0" anchor="ctr"/>
+          <a:lstStyle/>
+          <a:p>
+            <a:pPr algn="l" indent="0" marL="0">
+              <a:buNone/>
+            </a:pPr>
+            <a:r>
+              <a:rPr lang="ja-JP" altLang="en-US" sz="1100" b="1" dirty="0">
                 <a:solidFill>
                   <a:srgbClr val="14284B"/>
                 </a:solidFill>
@@ -31597,20 +31512,20 @@
               </a:rPr>
               <a:t>幹部人数</a:t>
             </a:r>
-            <a:endParaRPr lang="ja-JP" sz="1200" dirty="0"/>
-          </a:p>
-        </p:txBody>
-      </p:sp>
-      <p:sp>
-        <p:nvSpPr>
-          <p:cNvPr id="82" name="Shape 79"/>
-          <p:cNvSpPr/>
-          <p:nvPr/>
-        </p:nvSpPr>
-        <p:spPr>
-          <a:xfrm>
-            <a:off x="7468819" y="3346704"/>
-            <a:ext cx="1779422" cy="384048"/>
+            <a:endParaRPr lang="ja-JP" sz="1100" dirty="0"/>
+          </a:p>
+        </p:txBody>
+      </p:sp>
+      <p:sp>
+        <p:nvSpPr>
+          <p:cNvPr id="81" name="Shape 78"/>
+          <p:cNvSpPr/>
+          <p:nvPr/>
+        </p:nvSpPr>
+        <p:spPr>
+          <a:xfrm>
+            <a:off x="7468819" y="3355848"/>
+            <a:ext cx="1779422" cy="365760"/>
           </a:xfrm>
           <a:prstGeom prst="rect">
             <a:avLst/>
@@ -31623,14 +31538,14 @@
       </p:sp>
       <p:sp>
         <p:nvSpPr>
-          <p:cNvPr id="83" name="Shape 80"/>
-          <p:cNvSpPr/>
-          <p:nvPr/>
-        </p:nvSpPr>
-        <p:spPr>
-          <a:xfrm>
-            <a:off x="7596835" y="3502152"/>
-            <a:ext cx="73152" cy="73152"/>
+          <p:cNvPr id="82" name="Shape 79"/>
+          <p:cNvSpPr/>
+          <p:nvPr/>
+        </p:nvSpPr>
+        <p:spPr>
+          <a:xfrm>
+            <a:off x="7537399" y="3506724"/>
+            <a:ext cx="64008" cy="64008"/>
           </a:xfrm>
           <a:prstGeom prst="ellipse">
             <a:avLst/>
@@ -31643,33 +31558,30 @@
       </p:sp>
       <p:sp>
         <p:nvSpPr>
-          <p:cNvPr id="84" name="Text 81"/>
-          <p:cNvSpPr txBox="1"/>
-          <p:nvPr/>
-        </p:nvSpPr>
-        <p:spPr>
-          <a:xfrm>
-            <a:off x="7761427" y="3346704"/>
-            <a:ext cx="1444752" cy="384048"/>
-          </a:xfrm>
-          <a:prstGeom prst="rect">
-            <a:avLst/>
-          </a:prstGeom>
-          <a:noFill/>
-          <a:ln/>
-        </p:spPr>
-        <p:txBody>
-          <a:bodyPr wrap="square" lIns="0" tIns="0" rIns="0" bIns="0" rtlCol="0" anchor="t"/>
-          <a:lstStyle/>
-          <a:p>
-            <a:pPr algn="l" indent="0" marL="0">
-              <a:lnSpc>
-                <a:spcPts val="1500"/>
-              </a:lnSpc>
-              <a:buNone/>
-            </a:pPr>
-            <a:r>
-              <a:rPr lang="ja-JP" altLang="en-US" sz="1200" b="1" dirty="0">
+          <p:cNvPr id="83" name="Text 80"/>
+          <p:cNvSpPr txBox="1"/>
+          <p:nvPr/>
+        </p:nvSpPr>
+        <p:spPr>
+          <a:xfrm>
+            <a:off x="7679131" y="3355848"/>
+            <a:ext cx="1554480" cy="365760"/>
+          </a:xfrm>
+          <a:prstGeom prst="rect">
+            <a:avLst/>
+          </a:prstGeom>
+          <a:noFill/>
+          <a:ln/>
+        </p:spPr>
+        <p:txBody>
+          <a:bodyPr wrap="square" lIns="0" tIns="0" rIns="0" bIns="0" rtlCol="0" anchor="ctr"/>
+          <a:lstStyle/>
+          <a:p>
+            <a:pPr algn="l" indent="0" marL="0">
+              <a:buNone/>
+            </a:pPr>
+            <a:r>
+              <a:rPr lang="ja-JP" altLang="en-US" sz="1100" b="1" dirty="0">
                 <a:solidFill>
                   <a:srgbClr val="14284B"/>
                 </a:solidFill>
@@ -31677,19 +31589,78 @@
                 <a:ea typeface="Yu Gothic" charset="-128"/>
                 <a:cs typeface="Yu Gothic" pitchFamily="34" charset="-120"/>
               </a:rPr>
-              <a:t>重要ポジション</a:t>
-            </a:r>
-            <a:endParaRPr lang="ja-JP" sz="1200" dirty="0"/>
-          </a:p>
-          <a:p>
-            <a:pPr algn="l" indent="0" marL="0">
-              <a:lnSpc>
-                <a:spcPts val="1500"/>
-              </a:lnSpc>
-              <a:buNone/>
-            </a:pPr>
-            <a:r>
-              <a:rPr lang="ja-JP" altLang="en-US" sz="1200" b="1" dirty="0">
+              <a:t>重要ポジション充足率</a:t>
+            </a:r>
+            <a:endParaRPr lang="ja-JP" sz="1100" dirty="0"/>
+          </a:p>
+        </p:txBody>
+      </p:sp>
+      <p:sp>
+        <p:nvSpPr>
+          <p:cNvPr id="84" name="Shape 81"/>
+          <p:cNvSpPr/>
+          <p:nvPr/>
+        </p:nvSpPr>
+        <p:spPr>
+          <a:xfrm>
+            <a:off x="7468819" y="3794760"/>
+            <a:ext cx="1779422" cy="365760"/>
+          </a:xfrm>
+          <a:prstGeom prst="rect">
+            <a:avLst/>
+          </a:prstGeom>
+          <a:solidFill>
+            <a:srgbClr val="FFFFFF"/>
+          </a:solidFill>
+          <a:ln/>
+        </p:spPr>
+      </p:sp>
+      <p:sp>
+        <p:nvSpPr>
+          <p:cNvPr id="85" name="Shape 82"/>
+          <p:cNvSpPr/>
+          <p:nvPr/>
+        </p:nvSpPr>
+        <p:spPr>
+          <a:xfrm>
+            <a:off x="7537399" y="3945636"/>
+            <a:ext cx="64008" cy="64008"/>
+          </a:xfrm>
+          <a:prstGeom prst="ellipse">
+            <a:avLst/>
+          </a:prstGeom>
+          <a:solidFill>
+            <a:srgbClr val="B08D57"/>
+          </a:solidFill>
+          <a:ln/>
+        </p:spPr>
+      </p:sp>
+      <p:sp>
+        <p:nvSpPr>
+          <p:cNvPr id="86" name="Text 83"/>
+          <p:cNvSpPr txBox="1"/>
+          <p:nvPr/>
+        </p:nvSpPr>
+        <p:spPr>
+          <a:xfrm>
+            <a:off x="7679131" y="3794760"/>
+            <a:ext cx="1554480" cy="365760"/>
+          </a:xfrm>
+          <a:prstGeom prst="rect">
+            <a:avLst/>
+          </a:prstGeom>
+          <a:noFill/>
+          <a:ln/>
+        </p:spPr>
+        <p:txBody>
+          <a:bodyPr wrap="square" lIns="0" tIns="0" rIns="0" bIns="0" rtlCol="0" anchor="ctr"/>
+          <a:lstStyle/>
+          <a:p>
+            <a:pPr algn="l" indent="0" marL="0">
+              <a:buNone/>
+            </a:pPr>
+            <a:r>
+              <a:rPr lang="ja-JP" altLang="en-US" sz="1100" b="1" dirty="0">
                 <a:solidFill>
                   <a:srgbClr val="14284B"/>
                 </a:solidFill>
@@ -31697,100 +31668,21 @@
                 <a:ea typeface="Yu Gothic" charset="-128"/>
                 <a:cs typeface="Yu Gothic" pitchFamily="34" charset="-120"/>
               </a:rPr>
-              <a:t>充足率</a:t>
-            </a:r>
-            <a:endParaRPr lang="ja-JP" sz="1200" dirty="0"/>
-          </a:p>
-        </p:txBody>
-      </p:sp>
-      <p:sp>
-        <p:nvSpPr>
-          <p:cNvPr id="85" name="Shape 82"/>
-          <p:cNvSpPr/>
-          <p:nvPr/>
-        </p:nvSpPr>
-        <p:spPr>
-          <a:xfrm>
-            <a:off x="7468819" y="3785616"/>
-            <a:ext cx="1779422" cy="384048"/>
-          </a:xfrm>
-          <a:prstGeom prst="rect">
-            <a:avLst/>
-          </a:prstGeom>
-          <a:solidFill>
-            <a:srgbClr val="FFFFFF"/>
-          </a:solidFill>
-          <a:ln/>
-        </p:spPr>
-      </p:sp>
-      <p:sp>
-        <p:nvSpPr>
-          <p:cNvPr id="86" name="Shape 83"/>
-          <p:cNvSpPr/>
-          <p:nvPr/>
-        </p:nvSpPr>
-        <p:spPr>
-          <a:xfrm>
-            <a:off x="7596835" y="3941064"/>
-            <a:ext cx="73152" cy="73152"/>
-          </a:xfrm>
-          <a:prstGeom prst="ellipse">
-            <a:avLst/>
-          </a:prstGeom>
-          <a:solidFill>
-            <a:srgbClr val="B08D57"/>
-          </a:solidFill>
-          <a:ln/>
-        </p:spPr>
-      </p:sp>
-      <p:sp>
-        <p:nvSpPr>
-          <p:cNvPr id="87" name="Text 84"/>
-          <p:cNvSpPr txBox="1"/>
-          <p:nvPr/>
-        </p:nvSpPr>
-        <p:spPr>
-          <a:xfrm>
-            <a:off x="7761427" y="3785616"/>
-            <a:ext cx="1444752" cy="384048"/>
-          </a:xfrm>
-          <a:prstGeom prst="rect">
-            <a:avLst/>
-          </a:prstGeom>
-          <a:noFill/>
-          <a:ln/>
-        </p:spPr>
-        <p:txBody>
-          <a:bodyPr wrap="square" lIns="0" tIns="0" rIns="0" bIns="0" rtlCol="0" anchor="ctr"/>
-          <a:lstStyle/>
-          <a:p>
-            <a:pPr algn="l" indent="0" marL="0">
-              <a:buNone/>
-            </a:pPr>
-            <a:r>
-              <a:rPr lang="ja-JP" altLang="en-US" sz="1200" b="1" dirty="0">
-                <a:solidFill>
-                  <a:srgbClr val="14284B"/>
-                </a:solidFill>
-                <a:latin typeface="Yu Gothic" pitchFamily="34" charset="0"/>
-                <a:ea typeface="Yu Gothic" charset="-128"/>
-                <a:cs typeface="Yu Gothic" pitchFamily="34" charset="-120"/>
-              </a:rPr>
               <a:t>創業者依存業務数</a:t>
             </a:r>
-            <a:endParaRPr lang="ja-JP" sz="1200" dirty="0"/>
-          </a:p>
-        </p:txBody>
-      </p:sp>
-      <p:sp>
-        <p:nvSpPr>
-          <p:cNvPr id="88" name="Shape 85"/>
-          <p:cNvSpPr/>
-          <p:nvPr/>
-        </p:nvSpPr>
-        <p:spPr>
-          <a:xfrm>
-            <a:off x="7523683" y="5212080"/>
+            <a:endParaRPr lang="ja-JP" sz="1100" dirty="0"/>
+          </a:p>
+        </p:txBody>
+      </p:sp>
+      <p:sp>
+        <p:nvSpPr>
+          <p:cNvPr id="87" name="Shape 84"/>
+          <p:cNvSpPr/>
+          <p:nvPr/>
+        </p:nvSpPr>
+        <p:spPr>
+          <a:xfrm>
+            <a:off x="7523683" y="5138928"/>
             <a:ext cx="1673352" cy="0"/>
           </a:xfrm>
           <a:prstGeom prst="line">
@@ -31807,14 +31699,14 @@
       </p:sp>
       <p:sp>
         <p:nvSpPr>
-          <p:cNvPr id="89" name="Text 86"/>
-          <p:cNvSpPr txBox="1"/>
-          <p:nvPr/>
-        </p:nvSpPr>
-        <p:spPr>
-          <a:xfrm>
-            <a:off x="7523683" y="5257800"/>
-            <a:ext cx="1737360" cy="219456"/>
+          <p:cNvPr id="88" name="Text 85"/>
+          <p:cNvSpPr txBox="1"/>
+          <p:nvPr/>
+        </p:nvSpPr>
+        <p:spPr>
+          <a:xfrm>
+            <a:off x="7523683" y="5193792"/>
+            <a:ext cx="1737360" cy="201168"/>
           </a:xfrm>
           <a:prstGeom prst="rect">
             <a:avLst/>
@@ -31838,7 +31730,7 @@
                 <a:ea typeface="Yu Gothic Medium" charset="-128"/>
                 <a:cs typeface="Yu Gothic Medium" pitchFamily="34" charset="-120"/>
               </a:rPr>
-              <a:t>主な責任</a:t>
+              <a:t>FY2031 目標</a:t>
             </a:r>
             <a:endParaRPr lang="ja-JP" sz="1000" dirty="0"/>
           </a:p>
@@ -31846,53 +31738,53 @@
       </p:sp>
       <p:sp>
         <p:nvSpPr>
-          <p:cNvPr id="90" name="Text 87"/>
-          <p:cNvSpPr txBox="1"/>
-          <p:nvPr/>
-        </p:nvSpPr>
-        <p:spPr>
-          <a:xfrm>
-            <a:off x="7523683" y="5468112"/>
-            <a:ext cx="1737360" cy="256032"/>
-          </a:xfrm>
-          <a:prstGeom prst="rect">
-            <a:avLst/>
-          </a:prstGeom>
-          <a:noFill/>
-          <a:ln/>
-        </p:spPr>
-        <p:txBody>
-          <a:bodyPr wrap="square" lIns="0" tIns="0" rIns="0" bIns="0" rtlCol="0" anchor="ctr"/>
-          <a:lstStyle/>
-          <a:p>
-            <a:pPr algn="l" indent="0" marL="0">
-              <a:buNone/>
-            </a:pPr>
-            <a:r>
-              <a:rPr lang="ja-JP" altLang="en-US" sz="1200" b="1" dirty="0">
-                <a:solidFill>
-                  <a:srgbClr val="14284B"/>
+          <p:cNvPr id="89" name="Text 86"/>
+          <p:cNvSpPr txBox="1"/>
+          <p:nvPr/>
+        </p:nvSpPr>
+        <p:spPr>
+          <a:xfrm>
+            <a:off x="7523683" y="5394960"/>
+            <a:ext cx="1737360" cy="237744"/>
+          </a:xfrm>
+          <a:prstGeom prst="rect">
+            <a:avLst/>
+          </a:prstGeom>
+          <a:noFill/>
+          <a:ln/>
+        </p:spPr>
+        <p:txBody>
+          <a:bodyPr wrap="square" lIns="0" tIns="0" rIns="0" bIns="0" rtlCol="0" anchor="ctr"/>
+          <a:lstStyle/>
+          <a:p>
+            <a:pPr algn="l" indent="0" marL="0">
+              <a:buNone/>
+            </a:pPr>
+            <a:r>
+              <a:rPr lang="ja-JP" altLang="en-US" sz="1100" b="1" dirty="0">
+                <a:solidFill>
+                  <a:srgbClr val="5B6675"/>
                 </a:solidFill>
                 <a:latin typeface="Yu Gothic" pitchFamily="34" charset="0"/>
                 <a:ea typeface="Yu Gothic" charset="-128"/>
                 <a:cs typeface="Yu Gothic" pitchFamily="34" charset="-120"/>
               </a:rPr>
-              <a:t>親会社（社長人事）</a:t>
-            </a:r>
-            <a:endParaRPr lang="ja-JP" sz="1200" dirty="0"/>
-          </a:p>
-        </p:txBody>
-      </p:sp>
-      <p:sp>
-        <p:nvSpPr>
-          <p:cNvPr id="91" name="Shape 88"/>
+              <a:t>財務モデル策定後に確定</a:t>
+            </a:r>
+            <a:endParaRPr lang="ja-JP" sz="1100" dirty="0"/>
+          </a:p>
+        </p:txBody>
+      </p:sp>
+      <p:sp>
+        <p:nvSpPr>
+          <p:cNvPr id="90" name="Shape 87"/>
           <p:cNvSpPr/>
           <p:nvPr/>
         </p:nvSpPr>
         <p:spPr>
           <a:xfrm>
             <a:off x="9604858" y="1691640"/>
-            <a:ext cx="2035454" cy="4069080"/>
+            <a:ext cx="2035454" cy="4050792"/>
           </a:xfrm>
           <a:prstGeom prst="rect">
             <a:avLst/>
@@ -31905,13 +31797,13 @@
       </p:sp>
       <p:sp>
         <p:nvSpPr>
-          <p:cNvPr id="92" name="Text 89"/>
-          <p:cNvSpPr txBox="1"/>
-          <p:nvPr/>
-        </p:nvSpPr>
-        <p:spPr>
-          <a:xfrm>
-            <a:off x="9787738" y="1801368"/>
+          <p:cNvPr id="91" name="Text 88"/>
+          <p:cNvSpPr txBox="1"/>
+          <p:nvPr/>
+        </p:nvSpPr>
+        <p:spPr>
+          <a:xfrm>
+            <a:off x="9787738" y="1819656"/>
             <a:ext cx="1737360" cy="274320"/>
           </a:xfrm>
           <a:prstGeom prst="rect">
@@ -31944,13 +31836,13 @@
       </p:sp>
       <p:sp>
         <p:nvSpPr>
-          <p:cNvPr id="93" name="Text 90"/>
-          <p:cNvSpPr txBox="1"/>
-          <p:nvPr/>
-        </p:nvSpPr>
-        <p:spPr>
-          <a:xfrm>
-            <a:off x="9787738" y="2075688"/>
+          <p:cNvPr id="92" name="Text 89"/>
+          <p:cNvSpPr txBox="1"/>
+          <p:nvPr/>
+        </p:nvSpPr>
+        <p:spPr>
+          <a:xfrm>
+            <a:off x="9787738" y="2093976"/>
             <a:ext cx="1737360" cy="256032"/>
           </a:xfrm>
           <a:prstGeom prst="rect">
@@ -31983,14 +31875,14 @@
       </p:sp>
       <p:sp>
         <p:nvSpPr>
-          <p:cNvPr id="94" name="Shape 91"/>
-          <p:cNvSpPr/>
-          <p:nvPr/>
-        </p:nvSpPr>
-        <p:spPr>
-          <a:xfrm>
-            <a:off x="9732874" y="2468880"/>
-            <a:ext cx="1779422" cy="384048"/>
+          <p:cNvPr id="93" name="Shape 90"/>
+          <p:cNvSpPr/>
+          <p:nvPr/>
+        </p:nvSpPr>
+        <p:spPr>
+          <a:xfrm>
+            <a:off x="9732874" y="2478024"/>
+            <a:ext cx="1779422" cy="365760"/>
           </a:xfrm>
           <a:prstGeom prst="rect">
             <a:avLst/>
@@ -32003,14 +31895,14 @@
       </p:sp>
       <p:sp>
         <p:nvSpPr>
-          <p:cNvPr id="95" name="Shape 92"/>
-          <p:cNvSpPr/>
-          <p:nvPr/>
-        </p:nvSpPr>
-        <p:spPr>
-          <a:xfrm>
-            <a:off x="9860890" y="2624328"/>
-            <a:ext cx="73152" cy="73152"/>
+          <p:cNvPr id="94" name="Shape 91"/>
+          <p:cNvSpPr/>
+          <p:nvPr/>
+        </p:nvSpPr>
+        <p:spPr>
+          <a:xfrm>
+            <a:off x="9801454" y="2628900"/>
+            <a:ext cx="64008" cy="64008"/>
           </a:xfrm>
           <a:prstGeom prst="ellipse">
             <a:avLst/>
@@ -32023,30 +31915,30 @@
       </p:sp>
       <p:sp>
         <p:nvSpPr>
-          <p:cNvPr id="96" name="Text 93"/>
-          <p:cNvSpPr txBox="1"/>
-          <p:nvPr/>
-        </p:nvSpPr>
-        <p:spPr>
-          <a:xfrm>
-            <a:off x="10025482" y="2468880"/>
-            <a:ext cx="1444752" cy="384048"/>
-          </a:xfrm>
-          <a:prstGeom prst="rect">
-            <a:avLst/>
-          </a:prstGeom>
-          <a:noFill/>
-          <a:ln/>
-        </p:spPr>
-        <p:txBody>
-          <a:bodyPr wrap="square" lIns="0" tIns="0" rIns="0" bIns="0" rtlCol="0" anchor="ctr"/>
-          <a:lstStyle/>
-          <a:p>
-            <a:pPr algn="l" indent="0" marL="0">
-              <a:buNone/>
-            </a:pPr>
-            <a:r>
-              <a:rPr lang="ja-JP" altLang="en-US" sz="1200" b="1" dirty="0">
+          <p:cNvPr id="95" name="Text 92"/>
+          <p:cNvSpPr txBox="1"/>
+          <p:nvPr/>
+        </p:nvSpPr>
+        <p:spPr>
+          <a:xfrm>
+            <a:off x="9943186" y="2478024"/>
+            <a:ext cx="1554480" cy="365760"/>
+          </a:xfrm>
+          <a:prstGeom prst="rect">
+            <a:avLst/>
+          </a:prstGeom>
+          <a:noFill/>
+          <a:ln/>
+        </p:spPr>
+        <p:txBody>
+          <a:bodyPr wrap="square" lIns="0" tIns="0" rIns="0" bIns="0" rtlCol="0" anchor="ctr"/>
+          <a:lstStyle/>
+          <a:p>
+            <a:pPr algn="l" indent="0" marL="0">
+              <a:buNone/>
+            </a:pPr>
+            <a:r>
+              <a:rPr lang="ja-JP" altLang="en-US" sz="1100" b="1" dirty="0">
                 <a:solidFill>
                   <a:srgbClr val="14284B"/>
                 </a:solidFill>
@@ -32056,20 +31948,20 @@
               </a:rPr>
               <a:t>案件パイプライン</a:t>
             </a:r>
-            <a:endParaRPr lang="ja-JP" sz="1200" dirty="0"/>
-          </a:p>
-        </p:txBody>
-      </p:sp>
-      <p:sp>
-        <p:nvSpPr>
-          <p:cNvPr id="97" name="Shape 94"/>
-          <p:cNvSpPr/>
-          <p:nvPr/>
-        </p:nvSpPr>
-        <p:spPr>
-          <a:xfrm>
-            <a:off x="9732874" y="2907792"/>
-            <a:ext cx="1779422" cy="384048"/>
+            <a:endParaRPr lang="ja-JP" sz="1100" dirty="0"/>
+          </a:p>
+        </p:txBody>
+      </p:sp>
+      <p:sp>
+        <p:nvSpPr>
+          <p:cNvPr id="96" name="Shape 93"/>
+          <p:cNvSpPr/>
+          <p:nvPr/>
+        </p:nvSpPr>
+        <p:spPr>
+          <a:xfrm>
+            <a:off x="9732874" y="2916936"/>
+            <a:ext cx="1779422" cy="365760"/>
           </a:xfrm>
           <a:prstGeom prst="rect">
             <a:avLst/>
@@ -32082,14 +31974,14 @@
       </p:sp>
       <p:sp>
         <p:nvSpPr>
-          <p:cNvPr id="98" name="Shape 95"/>
-          <p:cNvSpPr/>
-          <p:nvPr/>
-        </p:nvSpPr>
-        <p:spPr>
-          <a:xfrm>
-            <a:off x="9860890" y="3063240"/>
-            <a:ext cx="73152" cy="73152"/>
+          <p:cNvPr id="97" name="Shape 94"/>
+          <p:cNvSpPr/>
+          <p:nvPr/>
+        </p:nvSpPr>
+        <p:spPr>
+          <a:xfrm>
+            <a:off x="9801454" y="3067812"/>
+            <a:ext cx="64008" cy="64008"/>
           </a:xfrm>
           <a:prstGeom prst="ellipse">
             <a:avLst/>
@@ -32102,30 +31994,30 @@
       </p:sp>
       <p:sp>
         <p:nvSpPr>
-          <p:cNvPr id="99" name="Text 96"/>
-          <p:cNvSpPr txBox="1"/>
-          <p:nvPr/>
-        </p:nvSpPr>
-        <p:spPr>
-          <a:xfrm>
-            <a:off x="10025482" y="2907792"/>
-            <a:ext cx="1444752" cy="384048"/>
-          </a:xfrm>
-          <a:prstGeom prst="rect">
-            <a:avLst/>
-          </a:prstGeom>
-          <a:noFill/>
-          <a:ln/>
-        </p:spPr>
-        <p:txBody>
-          <a:bodyPr wrap="square" lIns="0" tIns="0" rIns="0" bIns="0" rtlCol="0" anchor="ctr"/>
-          <a:lstStyle/>
-          <a:p>
-            <a:pPr algn="l" indent="0" marL="0">
-              <a:buNone/>
-            </a:pPr>
-            <a:r>
-              <a:rPr lang="ja-JP" altLang="en-US" sz="1200" b="1" dirty="0">
+          <p:cNvPr id="98" name="Text 95"/>
+          <p:cNvSpPr txBox="1"/>
+          <p:nvPr/>
+        </p:nvSpPr>
+        <p:spPr>
+          <a:xfrm>
+            <a:off x="9943186" y="2916936"/>
+            <a:ext cx="1554480" cy="365760"/>
+          </a:xfrm>
+          <a:prstGeom prst="rect">
+            <a:avLst/>
+          </a:prstGeom>
+          <a:noFill/>
+          <a:ln/>
+        </p:spPr>
+        <p:txBody>
+          <a:bodyPr wrap="square" lIns="0" tIns="0" rIns="0" bIns="0" rtlCol="0" anchor="ctr"/>
+          <a:lstStyle/>
+          <a:p>
+            <a:pPr algn="l" indent="0" marL="0">
+              <a:buNone/>
+            </a:pPr>
+            <a:r>
+              <a:rPr lang="ja-JP" altLang="en-US" sz="1100" b="1" dirty="0">
                 <a:solidFill>
                   <a:srgbClr val="14284B"/>
                 </a:solidFill>
@@ -32135,20 +32027,20 @@
               </a:rPr>
               <a:t>DD案件数</a:t>
             </a:r>
-            <a:endParaRPr lang="ja-JP" sz="1200" dirty="0"/>
-          </a:p>
-        </p:txBody>
-      </p:sp>
-      <p:sp>
-        <p:nvSpPr>
-          <p:cNvPr id="100" name="Shape 97"/>
-          <p:cNvSpPr/>
-          <p:nvPr/>
-        </p:nvSpPr>
-        <p:spPr>
-          <a:xfrm>
-            <a:off x="9732874" y="3346704"/>
-            <a:ext cx="1779422" cy="384048"/>
+            <a:endParaRPr lang="ja-JP" sz="1100" dirty="0"/>
+          </a:p>
+        </p:txBody>
+      </p:sp>
+      <p:sp>
+        <p:nvSpPr>
+          <p:cNvPr id="99" name="Shape 96"/>
+          <p:cNvSpPr/>
+          <p:nvPr/>
+        </p:nvSpPr>
+        <p:spPr>
+          <a:xfrm>
+            <a:off x="9732874" y="3355848"/>
+            <a:ext cx="1779422" cy="365760"/>
           </a:xfrm>
           <a:prstGeom prst="rect">
             <a:avLst/>
@@ -32161,14 +32053,14 @@
       </p:sp>
       <p:sp>
         <p:nvSpPr>
-          <p:cNvPr id="101" name="Shape 98"/>
-          <p:cNvSpPr/>
-          <p:nvPr/>
-        </p:nvSpPr>
-        <p:spPr>
-          <a:xfrm>
-            <a:off x="9860890" y="3502152"/>
-            <a:ext cx="73152" cy="73152"/>
+          <p:cNvPr id="100" name="Shape 97"/>
+          <p:cNvSpPr/>
+          <p:nvPr/>
+        </p:nvSpPr>
+        <p:spPr>
+          <a:xfrm>
+            <a:off x="9801454" y="3506724"/>
+            <a:ext cx="64008" cy="64008"/>
           </a:xfrm>
           <a:prstGeom prst="ellipse">
             <a:avLst/>
@@ -32181,30 +32073,30 @@
       </p:sp>
       <p:sp>
         <p:nvSpPr>
-          <p:cNvPr id="102" name="Text 99"/>
-          <p:cNvSpPr txBox="1"/>
-          <p:nvPr/>
-        </p:nvSpPr>
-        <p:spPr>
-          <a:xfrm>
-            <a:off x="10025482" y="3346704"/>
-            <a:ext cx="1444752" cy="384048"/>
-          </a:xfrm>
-          <a:prstGeom prst="rect">
-            <a:avLst/>
-          </a:prstGeom>
-          <a:noFill/>
-          <a:ln/>
-        </p:spPr>
-        <p:txBody>
-          <a:bodyPr wrap="square" lIns="0" tIns="0" rIns="0" bIns="0" rtlCol="0" anchor="ctr"/>
-          <a:lstStyle/>
-          <a:p>
-            <a:pPr algn="l" indent="0" marL="0">
-              <a:buNone/>
-            </a:pPr>
-            <a:r>
-              <a:rPr lang="ja-JP" altLang="en-US" sz="1200" b="1" dirty="0">
+          <p:cNvPr id="101" name="Text 98"/>
+          <p:cNvSpPr txBox="1"/>
+          <p:nvPr/>
+        </p:nvSpPr>
+        <p:spPr>
+          <a:xfrm>
+            <a:off x="9943186" y="3355848"/>
+            <a:ext cx="1554480" cy="365760"/>
+          </a:xfrm>
+          <a:prstGeom prst="rect">
+            <a:avLst/>
+          </a:prstGeom>
+          <a:noFill/>
+          <a:ln/>
+        </p:spPr>
+        <p:txBody>
+          <a:bodyPr wrap="square" lIns="0" tIns="0" rIns="0" bIns="0" rtlCol="0" anchor="ctr"/>
+          <a:lstStyle/>
+          <a:p>
+            <a:pPr algn="l" indent="0" marL="0">
+              <a:buNone/>
+            </a:pPr>
+            <a:r>
+              <a:rPr lang="ja-JP" altLang="en-US" sz="1100" b="1" dirty="0">
                 <a:solidFill>
                   <a:srgbClr val="14284B"/>
                 </a:solidFill>
@@ -32214,20 +32106,20 @@
               </a:rPr>
               <a:t>成約数</a:t>
             </a:r>
-            <a:endParaRPr lang="ja-JP" sz="1200" dirty="0"/>
-          </a:p>
-        </p:txBody>
-      </p:sp>
-      <p:sp>
-        <p:nvSpPr>
-          <p:cNvPr id="103" name="Shape 100"/>
-          <p:cNvSpPr/>
-          <p:nvPr/>
-        </p:nvSpPr>
-        <p:spPr>
-          <a:xfrm>
-            <a:off x="9732874" y="3785616"/>
-            <a:ext cx="1779422" cy="384048"/>
+            <a:endParaRPr lang="ja-JP" sz="1100" dirty="0"/>
+          </a:p>
+        </p:txBody>
+      </p:sp>
+      <p:sp>
+        <p:nvSpPr>
+          <p:cNvPr id="102" name="Shape 99"/>
+          <p:cNvSpPr/>
+          <p:nvPr/>
+        </p:nvSpPr>
+        <p:spPr>
+          <a:xfrm>
+            <a:off x="9732874" y="3794760"/>
+            <a:ext cx="1779422" cy="365760"/>
           </a:xfrm>
           <a:prstGeom prst="rect">
             <a:avLst/>
@@ -32240,14 +32132,14 @@
       </p:sp>
       <p:sp>
         <p:nvSpPr>
-          <p:cNvPr id="104" name="Shape 101"/>
-          <p:cNvSpPr/>
-          <p:nvPr/>
-        </p:nvSpPr>
-        <p:spPr>
-          <a:xfrm>
-            <a:off x="9860890" y="3941064"/>
-            <a:ext cx="73152" cy="73152"/>
+          <p:cNvPr id="103" name="Shape 100"/>
+          <p:cNvSpPr/>
+          <p:nvPr/>
+        </p:nvSpPr>
+        <p:spPr>
+          <a:xfrm>
+            <a:off x="9801454" y="3945636"/>
+            <a:ext cx="64008" cy="64008"/>
           </a:xfrm>
           <a:prstGeom prst="ellipse">
             <a:avLst/>
@@ -32260,30 +32152,30 @@
       </p:sp>
       <p:sp>
         <p:nvSpPr>
-          <p:cNvPr id="105" name="Text 102"/>
-          <p:cNvSpPr txBox="1"/>
-          <p:nvPr/>
-        </p:nvSpPr>
-        <p:spPr>
-          <a:xfrm>
-            <a:off x="10025482" y="3785616"/>
-            <a:ext cx="1444752" cy="384048"/>
-          </a:xfrm>
-          <a:prstGeom prst="rect">
-            <a:avLst/>
-          </a:prstGeom>
-          <a:noFill/>
-          <a:ln/>
-        </p:spPr>
-        <p:txBody>
-          <a:bodyPr wrap="square" lIns="0" tIns="0" rIns="0" bIns="0" rtlCol="0" anchor="ctr"/>
-          <a:lstStyle/>
-          <a:p>
-            <a:pPr algn="l" indent="0" marL="0">
-              <a:buNone/>
-            </a:pPr>
-            <a:r>
-              <a:rPr lang="ja-JP" altLang="en-US" sz="1200" b="1" dirty="0">
+          <p:cNvPr id="104" name="Text 101"/>
+          <p:cNvSpPr txBox="1"/>
+          <p:nvPr/>
+        </p:nvSpPr>
+        <p:spPr>
+          <a:xfrm>
+            <a:off x="9943186" y="3794760"/>
+            <a:ext cx="1554480" cy="365760"/>
+          </a:xfrm>
+          <a:prstGeom prst="rect">
+            <a:avLst/>
+          </a:prstGeom>
+          <a:noFill/>
+          <a:ln/>
+        </p:spPr>
+        <p:txBody>
+          <a:bodyPr wrap="square" lIns="0" tIns="0" rIns="0" bIns="0" rtlCol="0" anchor="ctr"/>
+          <a:lstStyle/>
+          <a:p>
+            <a:pPr algn="l" indent="0" marL="0">
+              <a:buNone/>
+            </a:pPr>
+            <a:r>
+              <a:rPr lang="ja-JP" altLang="en-US" sz="1100" b="1" dirty="0">
                 <a:solidFill>
                   <a:srgbClr val="14284B"/>
                 </a:solidFill>
@@ -32293,20 +32185,20 @@
               </a:rPr>
               <a:t>PMI進捗</a:t>
             </a:r>
-            <a:endParaRPr lang="ja-JP" sz="1200" dirty="0"/>
-          </a:p>
-        </p:txBody>
-      </p:sp>
-      <p:sp>
-        <p:nvSpPr>
-          <p:cNvPr id="106" name="Shape 103"/>
-          <p:cNvSpPr/>
-          <p:nvPr/>
-        </p:nvSpPr>
-        <p:spPr>
-          <a:xfrm>
-            <a:off x="9732874" y="4224528"/>
-            <a:ext cx="1779422" cy="384048"/>
+            <a:endParaRPr lang="ja-JP" sz="1100" dirty="0"/>
+          </a:p>
+        </p:txBody>
+      </p:sp>
+      <p:sp>
+        <p:nvSpPr>
+          <p:cNvPr id="105" name="Shape 102"/>
+          <p:cNvSpPr/>
+          <p:nvPr/>
+        </p:nvSpPr>
+        <p:spPr>
+          <a:xfrm>
+            <a:off x="9732874" y="4233672"/>
+            <a:ext cx="1779422" cy="365760"/>
           </a:xfrm>
           <a:prstGeom prst="rect">
             <a:avLst/>
@@ -32319,14 +32211,14 @@
       </p:sp>
       <p:sp>
         <p:nvSpPr>
-          <p:cNvPr id="107" name="Shape 104"/>
-          <p:cNvSpPr/>
-          <p:nvPr/>
-        </p:nvSpPr>
-        <p:spPr>
-          <a:xfrm>
-            <a:off x="9860890" y="4379976"/>
-            <a:ext cx="73152" cy="73152"/>
+          <p:cNvPr id="106" name="Shape 103"/>
+          <p:cNvSpPr/>
+          <p:nvPr/>
+        </p:nvSpPr>
+        <p:spPr>
+          <a:xfrm>
+            <a:off x="9801454" y="4384548"/>
+            <a:ext cx="64008" cy="64008"/>
           </a:xfrm>
           <a:prstGeom prst="ellipse">
             <a:avLst/>
@@ -32339,30 +32231,30 @@
       </p:sp>
       <p:sp>
         <p:nvSpPr>
-          <p:cNvPr id="108" name="Text 105"/>
-          <p:cNvSpPr txBox="1"/>
-          <p:nvPr/>
-        </p:nvSpPr>
-        <p:spPr>
-          <a:xfrm>
-            <a:off x="10025482" y="4224528"/>
-            <a:ext cx="1444752" cy="384048"/>
-          </a:xfrm>
-          <a:prstGeom prst="rect">
-            <a:avLst/>
-          </a:prstGeom>
-          <a:noFill/>
-          <a:ln/>
-        </p:spPr>
-        <p:txBody>
-          <a:bodyPr wrap="square" lIns="0" tIns="0" rIns="0" bIns="0" rtlCol="0" anchor="ctr"/>
-          <a:lstStyle/>
-          <a:p>
-            <a:pPr algn="l" indent="0" marL="0">
-              <a:buNone/>
-            </a:pPr>
-            <a:r>
-              <a:rPr lang="ja-JP" altLang="en-US" sz="1200" b="1" dirty="0">
+          <p:cNvPr id="107" name="Text 104"/>
+          <p:cNvSpPr txBox="1"/>
+          <p:nvPr/>
+        </p:nvSpPr>
+        <p:spPr>
+          <a:xfrm>
+            <a:off x="9943186" y="4233672"/>
+            <a:ext cx="1554480" cy="365760"/>
+          </a:xfrm>
+          <a:prstGeom prst="rect">
+            <a:avLst/>
+          </a:prstGeom>
+          <a:noFill/>
+          <a:ln/>
+        </p:spPr>
+        <p:txBody>
+          <a:bodyPr wrap="square" lIns="0" tIns="0" rIns="0" bIns="0" rtlCol="0" anchor="ctr"/>
+          <a:lstStyle/>
+          <a:p>
+            <a:pPr algn="l" indent="0" marL="0">
+              <a:buNone/>
+            </a:pPr>
+            <a:r>
+              <a:rPr lang="ja-JP" altLang="en-US" sz="1100" b="1" dirty="0">
                 <a:solidFill>
                   <a:srgbClr val="14284B"/>
                 </a:solidFill>
@@ -32372,20 +32264,20 @@
               </a:rPr>
               <a:t>買収後利益成長</a:t>
             </a:r>
-            <a:endParaRPr lang="ja-JP" sz="1200" dirty="0"/>
-          </a:p>
-        </p:txBody>
-      </p:sp>
-      <p:sp>
-        <p:nvSpPr>
-          <p:cNvPr id="109" name="Shape 106"/>
-          <p:cNvSpPr/>
-          <p:nvPr/>
-        </p:nvSpPr>
-        <p:spPr>
-          <a:xfrm>
-            <a:off x="9732874" y="4663440"/>
-            <a:ext cx="1779422" cy="384048"/>
+            <a:endParaRPr lang="ja-JP" sz="1100" dirty="0"/>
+          </a:p>
+        </p:txBody>
+      </p:sp>
+      <p:sp>
+        <p:nvSpPr>
+          <p:cNvPr id="108" name="Shape 105"/>
+          <p:cNvSpPr/>
+          <p:nvPr/>
+        </p:nvSpPr>
+        <p:spPr>
+          <a:xfrm>
+            <a:off x="9732874" y="4672584"/>
+            <a:ext cx="1779422" cy="365760"/>
           </a:xfrm>
           <a:prstGeom prst="rect">
             <a:avLst/>
@@ -32398,14 +32290,14 @@
       </p:sp>
       <p:sp>
         <p:nvSpPr>
-          <p:cNvPr id="110" name="Shape 107"/>
-          <p:cNvSpPr/>
-          <p:nvPr/>
-        </p:nvSpPr>
-        <p:spPr>
-          <a:xfrm>
-            <a:off x="9860890" y="4818888"/>
-            <a:ext cx="73152" cy="73152"/>
+          <p:cNvPr id="109" name="Shape 106"/>
+          <p:cNvSpPr/>
+          <p:nvPr/>
+        </p:nvSpPr>
+        <p:spPr>
+          <a:xfrm>
+            <a:off x="9801454" y="4823460"/>
+            <a:ext cx="64008" cy="64008"/>
           </a:xfrm>
           <a:prstGeom prst="ellipse">
             <a:avLst/>
@@ -32418,30 +32310,30 @@
       </p:sp>
       <p:sp>
         <p:nvSpPr>
-          <p:cNvPr id="111" name="Text 108"/>
-          <p:cNvSpPr txBox="1"/>
-          <p:nvPr/>
-        </p:nvSpPr>
-        <p:spPr>
-          <a:xfrm>
-            <a:off x="10025482" y="4663440"/>
-            <a:ext cx="1444752" cy="384048"/>
-          </a:xfrm>
-          <a:prstGeom prst="rect">
-            <a:avLst/>
-          </a:prstGeom>
-          <a:noFill/>
-          <a:ln/>
-        </p:spPr>
-        <p:txBody>
-          <a:bodyPr wrap="square" lIns="0" tIns="0" rIns="0" bIns="0" rtlCol="0" anchor="ctr"/>
-          <a:lstStyle/>
-          <a:p>
-            <a:pPr algn="l" indent="0" marL="0">
-              <a:buNone/>
-            </a:pPr>
-            <a:r>
-              <a:rPr lang="ja-JP" altLang="en-US" sz="1200" b="1" dirty="0">
+          <p:cNvPr id="110" name="Text 107"/>
+          <p:cNvSpPr txBox="1"/>
+          <p:nvPr/>
+        </p:nvSpPr>
+        <p:spPr>
+          <a:xfrm>
+            <a:off x="9943186" y="4672584"/>
+            <a:ext cx="1554480" cy="365760"/>
+          </a:xfrm>
+          <a:prstGeom prst="rect">
+            <a:avLst/>
+          </a:prstGeom>
+          <a:noFill/>
+          <a:ln/>
+        </p:spPr>
+        <p:txBody>
+          <a:bodyPr wrap="square" lIns="0" tIns="0" rIns="0" bIns="0" rtlCol="0" anchor="ctr"/>
+          <a:lstStyle/>
+          <a:p>
+            <a:pPr algn="l" indent="0" marL="0">
+              <a:buNone/>
+            </a:pPr>
+            <a:r>
+              <a:rPr lang="ja-JP" altLang="en-US" sz="1100" b="1" dirty="0">
                 <a:solidFill>
                   <a:srgbClr val="14284B"/>
                 </a:solidFill>
@@ -32451,19 +32343,19 @@
               </a:rPr>
               <a:t>投資回収</a:t>
             </a:r>
-            <a:endParaRPr lang="ja-JP" sz="1200" dirty="0"/>
-          </a:p>
-        </p:txBody>
-      </p:sp>
-      <p:sp>
-        <p:nvSpPr>
-          <p:cNvPr id="112" name="Shape 109"/>
-          <p:cNvSpPr/>
-          <p:nvPr/>
-        </p:nvSpPr>
-        <p:spPr>
-          <a:xfrm>
-            <a:off x="9787738" y="5212080"/>
+            <a:endParaRPr lang="ja-JP" sz="1100" dirty="0"/>
+          </a:p>
+        </p:txBody>
+      </p:sp>
+      <p:sp>
+        <p:nvSpPr>
+          <p:cNvPr id="111" name="Shape 108"/>
+          <p:cNvSpPr/>
+          <p:nvPr/>
+        </p:nvSpPr>
+        <p:spPr>
+          <a:xfrm>
+            <a:off x="9787738" y="5138928"/>
             <a:ext cx="1673352" cy="0"/>
           </a:xfrm>
           <a:prstGeom prst="line">
@@ -32480,14 +32372,14 @@
       </p:sp>
       <p:sp>
         <p:nvSpPr>
-          <p:cNvPr id="113" name="Text 110"/>
-          <p:cNvSpPr txBox="1"/>
-          <p:nvPr/>
-        </p:nvSpPr>
-        <p:spPr>
-          <a:xfrm>
-            <a:off x="9787738" y="5257800"/>
-            <a:ext cx="1737360" cy="219456"/>
+          <p:cNvPr id="112" name="Text 109"/>
+          <p:cNvSpPr txBox="1"/>
+          <p:nvPr/>
+        </p:nvSpPr>
+        <p:spPr>
+          <a:xfrm>
+            <a:off x="9787738" y="5193792"/>
+            <a:ext cx="1737360" cy="201168"/>
           </a:xfrm>
           <a:prstGeom prst="rect">
             <a:avLst/>
@@ -32511,7 +32403,7 @@
                 <a:ea typeface="Yu Gothic Medium" charset="-128"/>
                 <a:cs typeface="Yu Gothic Medium" pitchFamily="34" charset="-120"/>
               </a:rPr>
-              <a:t>主な責任</a:t>
+              <a:t>FY2031 目標</a:t>
             </a:r>
             <a:endParaRPr lang="ja-JP" sz="1000" dirty="0"/>
           </a:p>
@@ -32519,53 +32411,53 @@
       </p:sp>
       <p:sp>
         <p:nvSpPr>
-          <p:cNvPr id="114" name="Text 111"/>
-          <p:cNvSpPr txBox="1"/>
-          <p:nvPr/>
-        </p:nvSpPr>
-        <p:spPr>
-          <a:xfrm>
-            <a:off x="9787738" y="5468112"/>
-            <a:ext cx="1737360" cy="256032"/>
-          </a:xfrm>
-          <a:prstGeom prst="rect">
-            <a:avLst/>
-          </a:prstGeom>
-          <a:noFill/>
-          <a:ln/>
-        </p:spPr>
-        <p:txBody>
-          <a:bodyPr wrap="square" lIns="0" tIns="0" rIns="0" bIns="0" rtlCol="0" anchor="ctr"/>
-          <a:lstStyle/>
-          <a:p>
-            <a:pPr algn="l" indent="0" marL="0">
-              <a:buNone/>
-            </a:pPr>
-            <a:r>
-              <a:rPr lang="ja-JP" altLang="en-US" sz="1200" b="1" dirty="0">
-                <a:solidFill>
-                  <a:srgbClr val="14284B"/>
+          <p:cNvPr id="113" name="Text 110"/>
+          <p:cNvSpPr txBox="1"/>
+          <p:nvPr/>
+        </p:nvSpPr>
+        <p:spPr>
+          <a:xfrm>
+            <a:off x="9787738" y="5394960"/>
+            <a:ext cx="1737360" cy="237744"/>
+          </a:xfrm>
+          <a:prstGeom prst="rect">
+            <a:avLst/>
+          </a:prstGeom>
+          <a:noFill/>
+          <a:ln/>
+        </p:spPr>
+        <p:txBody>
+          <a:bodyPr wrap="square" lIns="0" tIns="0" rIns="0" bIns="0" rtlCol="0" anchor="ctr"/>
+          <a:lstStyle/>
+          <a:p>
+            <a:pPr algn="l" indent="0" marL="0">
+              <a:buNone/>
+            </a:pPr>
+            <a:r>
+              <a:rPr lang="ja-JP" altLang="en-US" sz="1100" b="1" dirty="0">
+                <a:solidFill>
+                  <a:srgbClr val="5B6675"/>
                 </a:solidFill>
                 <a:latin typeface="Yu Gothic" pitchFamily="34" charset="0"/>
                 <a:ea typeface="Yu Gothic" charset="-128"/>
                 <a:cs typeface="Yu Gothic" pitchFamily="34" charset="-120"/>
               </a:rPr>
-              <a:t>親会社（M&amp;A）</a:t>
-            </a:r>
-            <a:endParaRPr lang="ja-JP" sz="1200" dirty="0"/>
-          </a:p>
-        </p:txBody>
-      </p:sp>
-      <p:sp>
-        <p:nvSpPr>
-          <p:cNvPr id="115" name="Text 112"/>
+              <a:t>財務モデル策定後に確定</a:t>
+            </a:r>
+            <a:endParaRPr lang="ja-JP" sz="1100" dirty="0"/>
+          </a:p>
+        </p:txBody>
+      </p:sp>
+      <p:sp>
+        <p:nvSpPr>
+          <p:cNvPr id="114" name="Text 111"/>
           <p:cNvSpPr txBox="1"/>
           <p:nvPr/>
         </p:nvSpPr>
         <p:spPr>
           <a:xfrm>
             <a:off x="548640" y="5833872"/>
-            <a:ext cx="11094415" cy="274320"/>
+            <a:ext cx="11094415" cy="256032"/>
           </a:xfrm>
           <a:prstGeom prst="rect">
             <a:avLst/>
@@ -32589,7 +32481,7 @@
                 <a:ea typeface="Yu Gothic Medium" charset="-128"/>
                 <a:cs typeface="Yu Gothic Medium" pitchFamily="34" charset="-120"/>
               </a:rPr>
-              <a:t>※ 目標値が決まっているのは連結売上（FY2031 30億円・暫定）のみ。その他のKPIの目標値・算定方法・頻度は財務モデル策定後に確定する。主な責任はP.16の分担による。</a:t>
+              <a:t>※ 連結売上の目標は暫定経営目標（FY2027〜FY2031の推移はP.06）。その他のKPIの目標値・算定方法・頻度は財務モデル策定後に確定する。</a:t>
             </a:r>
             <a:endParaRPr lang="ja-JP" sz="1000" dirty="0"/>
           </a:p>
@@ -33124,7 +33016,7 @@
         </p:nvSpPr>
         <p:spPr>
           <a:xfrm flipV="1">
-            <a:off x="1566367" y="2267712"/>
+            <a:off x="1566367" y="2157984"/>
             <a:ext cx="2264054" cy="201168"/>
           </a:xfrm>
           <a:prstGeom prst="line">
@@ -33147,7 +33039,7 @@
         </p:nvSpPr>
         <p:spPr>
           <a:xfrm flipV="1">
-            <a:off x="3830422" y="2066544"/>
+            <a:off x="3830422" y="1956816"/>
             <a:ext cx="2264054" cy="201168"/>
           </a:xfrm>
           <a:prstGeom prst="line">
@@ -33170,7 +33062,7 @@
         </p:nvSpPr>
         <p:spPr>
           <a:xfrm flipV="1">
-            <a:off x="6094476" y="1865376"/>
+            <a:off x="6094476" y="1755648"/>
             <a:ext cx="2264054" cy="201168"/>
           </a:xfrm>
           <a:prstGeom prst="line">
@@ -33193,7 +33085,7 @@
         </p:nvSpPr>
         <p:spPr>
           <a:xfrm flipV="1">
-            <a:off x="8358530" y="1664208"/>
+            <a:off x="8358530" y="1554480"/>
             <a:ext cx="2264054" cy="201168"/>
           </a:xfrm>
           <a:prstGeom prst="line">
@@ -33216,8 +33108,8 @@
         </p:nvSpPr>
         <p:spPr>
           <a:xfrm>
-            <a:off x="548640" y="2651760"/>
-            <a:ext cx="2035454" cy="2514600"/>
+            <a:off x="548640" y="2542032"/>
+            <a:ext cx="2035454" cy="2624328"/>
           </a:xfrm>
           <a:prstGeom prst="rect">
             <a:avLst/>
@@ -33236,7 +33128,7 @@
         </p:nvSpPr>
         <p:spPr>
           <a:xfrm>
-            <a:off x="1493215" y="2395728"/>
+            <a:off x="1493215" y="2286000"/>
             <a:ext cx="146304" cy="146304"/>
           </a:xfrm>
           <a:prstGeom prst="ellipse">
@@ -33256,7 +33148,7 @@
         </p:nvSpPr>
         <p:spPr>
           <a:xfrm>
-            <a:off x="731520" y="2779776"/>
+            <a:off x="731520" y="2670048"/>
             <a:ext cx="1737360" cy="365760"/>
           </a:xfrm>
           <a:prstGeom prst="rect">
@@ -33295,7 +33187,7 @@
         </p:nvSpPr>
         <p:spPr>
           <a:xfrm>
-            <a:off x="731520" y="3145536"/>
+            <a:off x="731520" y="3035808"/>
             <a:ext cx="1737360" cy="219456"/>
           </a:xfrm>
           <a:prstGeom prst="rect">
@@ -33334,7 +33226,7 @@
         </p:nvSpPr>
         <p:spPr>
           <a:xfrm>
-            <a:off x="731520" y="3383280"/>
+            <a:off x="731520" y="3273552"/>
             <a:ext cx="1737360" cy="274320"/>
           </a:xfrm>
           <a:prstGeom prst="rect">
@@ -33373,7 +33265,7 @@
         </p:nvSpPr>
         <p:spPr>
           <a:xfrm>
-            <a:off x="731520" y="3799332"/>
+            <a:off x="731520" y="3689604"/>
             <a:ext cx="54864" cy="54864"/>
           </a:xfrm>
           <a:prstGeom prst="ellipse">
@@ -33393,7 +33285,7 @@
         </p:nvSpPr>
         <p:spPr>
           <a:xfrm>
-            <a:off x="886968" y="3712464"/>
+            <a:off x="886968" y="3602736"/>
             <a:ext cx="1627632" cy="228600"/>
           </a:xfrm>
           <a:prstGeom prst="rect">
@@ -33432,7 +33324,7 @@
         </p:nvSpPr>
         <p:spPr>
           <a:xfrm>
-            <a:off x="731520" y="4027932"/>
+            <a:off x="731520" y="3918204"/>
             <a:ext cx="54864" cy="54864"/>
           </a:xfrm>
           <a:prstGeom prst="ellipse">
@@ -33452,7 +33344,7 @@
         </p:nvSpPr>
         <p:spPr>
           <a:xfrm>
-            <a:off x="886968" y="3941064"/>
+            <a:off x="886968" y="3831336"/>
             <a:ext cx="1627632" cy="228600"/>
           </a:xfrm>
           <a:prstGeom prst="rect">
@@ -33491,7 +33383,7 @@
         </p:nvSpPr>
         <p:spPr>
           <a:xfrm>
-            <a:off x="731520" y="4256532"/>
+            <a:off x="731520" y="4146804"/>
             <a:ext cx="54864" cy="54864"/>
           </a:xfrm>
           <a:prstGeom prst="ellipse">
@@ -33511,7 +33403,7 @@
         </p:nvSpPr>
         <p:spPr>
           <a:xfrm>
-            <a:off x="886968" y="4169664"/>
+            <a:off x="886968" y="4059936"/>
             <a:ext cx="1627632" cy="228600"/>
           </a:xfrm>
           <a:prstGeom prst="rect">
@@ -33550,7 +33442,7 @@
         </p:nvSpPr>
         <p:spPr>
           <a:xfrm>
-            <a:off x="731520" y="4485132"/>
+            <a:off x="731520" y="4375404"/>
             <a:ext cx="54864" cy="54864"/>
           </a:xfrm>
           <a:prstGeom prst="ellipse">
@@ -33570,7 +33462,7 @@
         </p:nvSpPr>
         <p:spPr>
           <a:xfrm>
-            <a:off x="886968" y="4398264"/>
+            <a:off x="886968" y="4288536"/>
             <a:ext cx="1627632" cy="228600"/>
           </a:xfrm>
           <a:prstGeom prst="rect">
@@ -33609,7 +33501,7 @@
         </p:nvSpPr>
         <p:spPr>
           <a:xfrm>
-            <a:off x="731520" y="4713732"/>
+            <a:off x="731520" y="4604004"/>
             <a:ext cx="54864" cy="54864"/>
           </a:xfrm>
           <a:prstGeom prst="ellipse">
@@ -33629,7 +33521,7 @@
         </p:nvSpPr>
         <p:spPr>
           <a:xfrm>
-            <a:off x="886968" y="4626864"/>
+            <a:off x="886968" y="4517136"/>
             <a:ext cx="1627632" cy="228600"/>
           </a:xfrm>
           <a:prstGeom prst="rect">
@@ -33668,7 +33560,7 @@
         </p:nvSpPr>
         <p:spPr>
           <a:xfrm>
-            <a:off x="731520" y="4942332"/>
+            <a:off x="731520" y="4832604"/>
             <a:ext cx="54864" cy="54864"/>
           </a:xfrm>
           <a:prstGeom prst="ellipse">
@@ -33688,7 +33580,7 @@
         </p:nvSpPr>
         <p:spPr>
           <a:xfrm>
-            <a:off x="886968" y="4855464"/>
+            <a:off x="886968" y="4745736"/>
             <a:ext cx="1627632" cy="228600"/>
           </a:xfrm>
           <a:prstGeom prst="rect">
@@ -33727,8 +33619,8 @@
         </p:nvSpPr>
         <p:spPr>
           <a:xfrm>
-            <a:off x="2812694" y="2450592"/>
-            <a:ext cx="2035454" cy="2514600"/>
+            <a:off x="2812694" y="2340864"/>
+            <a:ext cx="2035454" cy="2624328"/>
           </a:xfrm>
           <a:prstGeom prst="rect">
             <a:avLst/>
@@ -33747,7 +33639,7 @@
         </p:nvSpPr>
         <p:spPr>
           <a:xfrm>
-            <a:off x="3757270" y="2194560"/>
+            <a:off x="3757270" y="2084832"/>
             <a:ext cx="146304" cy="146304"/>
           </a:xfrm>
           <a:prstGeom prst="ellipse">
@@ -33767,7 +33659,7 @@
         </p:nvSpPr>
         <p:spPr>
           <a:xfrm>
-            <a:off x="2995574" y="2578608"/>
+            <a:off x="2995574" y="2468880"/>
             <a:ext cx="1737360" cy="365760"/>
           </a:xfrm>
           <a:prstGeom prst="rect">
@@ -33806,7 +33698,7 @@
         </p:nvSpPr>
         <p:spPr>
           <a:xfrm>
-            <a:off x="2995574" y="2944368"/>
+            <a:off x="2995574" y="2834640"/>
             <a:ext cx="1737360" cy="219456"/>
           </a:xfrm>
           <a:prstGeom prst="rect">
@@ -33845,7 +33737,7 @@
         </p:nvSpPr>
         <p:spPr>
           <a:xfrm>
-            <a:off x="2995574" y="3182112"/>
+            <a:off x="2995574" y="3072384"/>
             <a:ext cx="1737360" cy="274320"/>
           </a:xfrm>
           <a:prstGeom prst="rect">
@@ -33884,7 +33776,7 @@
         </p:nvSpPr>
         <p:spPr>
           <a:xfrm>
-            <a:off x="2995574" y="3598164"/>
+            <a:off x="2995574" y="3488436"/>
             <a:ext cx="54864" cy="54864"/>
           </a:xfrm>
           <a:prstGeom prst="ellipse">
@@ -33904,7 +33796,7 @@
         </p:nvSpPr>
         <p:spPr>
           <a:xfrm>
-            <a:off x="3151022" y="3511296"/>
+            <a:off x="3151022" y="3401568"/>
             <a:ext cx="1627632" cy="228600"/>
           </a:xfrm>
           <a:prstGeom prst="rect">
@@ -33943,7 +33835,7 @@
         </p:nvSpPr>
         <p:spPr>
           <a:xfrm>
-            <a:off x="2995574" y="3826764"/>
+            <a:off x="2995574" y="3717036"/>
             <a:ext cx="54864" cy="54864"/>
           </a:xfrm>
           <a:prstGeom prst="ellipse">
@@ -33963,7 +33855,7 @@
         </p:nvSpPr>
         <p:spPr>
           <a:xfrm>
-            <a:off x="3151022" y="3739896"/>
+            <a:off x="3151022" y="3630168"/>
             <a:ext cx="1627632" cy="228600"/>
           </a:xfrm>
           <a:prstGeom prst="rect">
@@ -34002,7 +33894,7 @@
         </p:nvSpPr>
         <p:spPr>
           <a:xfrm>
-            <a:off x="2995574" y="4055364"/>
+            <a:off x="2995574" y="3945636"/>
             <a:ext cx="54864" cy="54864"/>
           </a:xfrm>
           <a:prstGeom prst="ellipse">
@@ -34022,7 +33914,7 @@
         </p:nvSpPr>
         <p:spPr>
           <a:xfrm>
-            <a:off x="3151022" y="3968496"/>
+            <a:off x="3151022" y="3858768"/>
             <a:ext cx="1627632" cy="228600"/>
           </a:xfrm>
           <a:prstGeom prst="rect">
@@ -34061,7 +33953,7 @@
         </p:nvSpPr>
         <p:spPr>
           <a:xfrm>
-            <a:off x="2995574" y="4283964"/>
+            <a:off x="2995574" y="4174236"/>
             <a:ext cx="54864" cy="54864"/>
           </a:xfrm>
           <a:prstGeom prst="ellipse">
@@ -34081,7 +33973,7 @@
         </p:nvSpPr>
         <p:spPr>
           <a:xfrm>
-            <a:off x="3151022" y="4197096"/>
+            <a:off x="3151022" y="4087368"/>
             <a:ext cx="1627632" cy="228600"/>
           </a:xfrm>
           <a:prstGeom prst="rect">
@@ -34120,7 +34012,7 @@
         </p:nvSpPr>
         <p:spPr>
           <a:xfrm>
-            <a:off x="2995574" y="4512564"/>
+            <a:off x="2995574" y="4402836"/>
             <a:ext cx="54864" cy="54864"/>
           </a:xfrm>
           <a:prstGeom prst="ellipse">
@@ -34140,7 +34032,7 @@
         </p:nvSpPr>
         <p:spPr>
           <a:xfrm>
-            <a:off x="3151022" y="4425696"/>
+            <a:off x="3151022" y="4315968"/>
             <a:ext cx="1627632" cy="228600"/>
           </a:xfrm>
           <a:prstGeom prst="rect">
@@ -34179,8 +34071,8 @@
         </p:nvSpPr>
         <p:spPr>
           <a:xfrm>
-            <a:off x="5076749" y="2249424"/>
-            <a:ext cx="2035454" cy="2514600"/>
+            <a:off x="5076749" y="2139696"/>
+            <a:ext cx="2035454" cy="2624328"/>
           </a:xfrm>
           <a:prstGeom prst="rect">
             <a:avLst/>
@@ -34199,7 +34091,7 @@
         </p:nvSpPr>
         <p:spPr>
           <a:xfrm>
-            <a:off x="6021324" y="1993392"/>
+            <a:off x="6021324" y="1883664"/>
             <a:ext cx="146304" cy="146304"/>
           </a:xfrm>
           <a:prstGeom prst="ellipse">
@@ -34219,7 +34111,7 @@
         </p:nvSpPr>
         <p:spPr>
           <a:xfrm>
-            <a:off x="5259629" y="2377440"/>
+            <a:off x="5259629" y="2267712"/>
             <a:ext cx="1737360" cy="365760"/>
           </a:xfrm>
           <a:prstGeom prst="rect">
@@ -34258,7 +34150,7 @@
         </p:nvSpPr>
         <p:spPr>
           <a:xfrm>
-            <a:off x="5259629" y="2743200"/>
+            <a:off x="5259629" y="2633472"/>
             <a:ext cx="1737360" cy="219456"/>
           </a:xfrm>
           <a:prstGeom prst="rect">
@@ -34297,7 +34189,7 @@
         </p:nvSpPr>
         <p:spPr>
           <a:xfrm>
-            <a:off x="5259629" y="2980944"/>
+            <a:off x="5259629" y="2871216"/>
             <a:ext cx="1737360" cy="274320"/>
           </a:xfrm>
           <a:prstGeom prst="rect">
@@ -34336,7 +34228,7 @@
         </p:nvSpPr>
         <p:spPr>
           <a:xfrm>
-            <a:off x="5259629" y="3396996"/>
+            <a:off x="5259629" y="3287268"/>
             <a:ext cx="54864" cy="54864"/>
           </a:xfrm>
           <a:prstGeom prst="ellipse">
@@ -34356,7 +34248,7 @@
         </p:nvSpPr>
         <p:spPr>
           <a:xfrm>
-            <a:off x="5415077" y="3310128"/>
+            <a:off x="5415077" y="3200400"/>
             <a:ext cx="1627632" cy="228600"/>
           </a:xfrm>
           <a:prstGeom prst="rect">
@@ -34395,7 +34287,7 @@
         </p:nvSpPr>
         <p:spPr>
           <a:xfrm>
-            <a:off x="5259629" y="3625596"/>
+            <a:off x="5259629" y="3515868"/>
             <a:ext cx="54864" cy="54864"/>
           </a:xfrm>
           <a:prstGeom prst="ellipse">
@@ -34415,7 +34307,7 @@
         </p:nvSpPr>
         <p:spPr>
           <a:xfrm>
-            <a:off x="5415077" y="3538728"/>
+            <a:off x="5415077" y="3429000"/>
             <a:ext cx="1627632" cy="228600"/>
           </a:xfrm>
           <a:prstGeom prst="rect">
@@ -34454,7 +34346,7 @@
         </p:nvSpPr>
         <p:spPr>
           <a:xfrm>
-            <a:off x="5259629" y="3854196"/>
+            <a:off x="5259629" y="3744468"/>
             <a:ext cx="54864" cy="54864"/>
           </a:xfrm>
           <a:prstGeom prst="ellipse">
@@ -34474,7 +34366,7 @@
         </p:nvSpPr>
         <p:spPr>
           <a:xfrm>
-            <a:off x="5415077" y="3767328"/>
+            <a:off x="5415077" y="3657600"/>
             <a:ext cx="1627632" cy="228600"/>
           </a:xfrm>
           <a:prstGeom prst="rect">
@@ -34513,8 +34405,8 @@
         </p:nvSpPr>
         <p:spPr>
           <a:xfrm>
-            <a:off x="7340803" y="2048256"/>
-            <a:ext cx="2035454" cy="2514600"/>
+            <a:off x="7340803" y="1938528"/>
+            <a:ext cx="2035454" cy="2624328"/>
           </a:xfrm>
           <a:prstGeom prst="rect">
             <a:avLst/>
@@ -34533,7 +34425,7 @@
         </p:nvSpPr>
         <p:spPr>
           <a:xfrm>
-            <a:off x="8285378" y="1792224"/>
+            <a:off x="8285378" y="1682496"/>
             <a:ext cx="146304" cy="146304"/>
           </a:xfrm>
           <a:prstGeom prst="ellipse">
@@ -34553,7 +34445,7 @@
         </p:nvSpPr>
         <p:spPr>
           <a:xfrm>
-            <a:off x="7523683" y="2176272"/>
+            <a:off x="7523683" y="2066544"/>
             <a:ext cx="1737360" cy="365760"/>
           </a:xfrm>
           <a:prstGeom prst="rect">
@@ -34592,7 +34484,7 @@
         </p:nvSpPr>
         <p:spPr>
           <a:xfrm>
-            <a:off x="7523683" y="2542032"/>
+            <a:off x="7523683" y="2432304"/>
             <a:ext cx="1737360" cy="219456"/>
           </a:xfrm>
           <a:prstGeom prst="rect">
@@ -34631,7 +34523,7 @@
         </p:nvSpPr>
         <p:spPr>
           <a:xfrm>
-            <a:off x="7523683" y="2779776"/>
+            <a:off x="7523683" y="2670048"/>
             <a:ext cx="1737360" cy="274320"/>
           </a:xfrm>
           <a:prstGeom prst="rect">
@@ -34670,7 +34562,7 @@
         </p:nvSpPr>
         <p:spPr>
           <a:xfrm>
-            <a:off x="7523683" y="3195828"/>
+            <a:off x="7523683" y="3086100"/>
             <a:ext cx="54864" cy="54864"/>
           </a:xfrm>
           <a:prstGeom prst="ellipse">
@@ -34690,7 +34582,7 @@
         </p:nvSpPr>
         <p:spPr>
           <a:xfrm>
-            <a:off x="7679131" y="3108960"/>
+            <a:off x="7679131" y="2999232"/>
             <a:ext cx="1627632" cy="228600"/>
           </a:xfrm>
           <a:prstGeom prst="rect">
@@ -34729,7 +34621,7 @@
         </p:nvSpPr>
         <p:spPr>
           <a:xfrm>
-            <a:off x="7523683" y="3424428"/>
+            <a:off x="7523683" y="3314700"/>
             <a:ext cx="54864" cy="54864"/>
           </a:xfrm>
           <a:prstGeom prst="ellipse">
@@ -34749,7 +34641,7 @@
         </p:nvSpPr>
         <p:spPr>
           <a:xfrm>
-            <a:off x="7679131" y="3337560"/>
+            <a:off x="7679131" y="3227832"/>
             <a:ext cx="1627632" cy="228600"/>
           </a:xfrm>
           <a:prstGeom prst="rect">
@@ -34788,7 +34680,7 @@
         </p:nvSpPr>
         <p:spPr>
           <a:xfrm>
-            <a:off x="7523683" y="3653028"/>
+            <a:off x="7523683" y="3543300"/>
             <a:ext cx="54864" cy="54864"/>
           </a:xfrm>
           <a:prstGeom prst="ellipse">
@@ -34808,7 +34700,7 @@
         </p:nvSpPr>
         <p:spPr>
           <a:xfrm>
-            <a:off x="7679131" y="3566160"/>
+            <a:off x="7679131" y="3456432"/>
             <a:ext cx="1627632" cy="228600"/>
           </a:xfrm>
           <a:prstGeom prst="rect">
@@ -34847,7 +34739,7 @@
         </p:nvSpPr>
         <p:spPr>
           <a:xfrm>
-            <a:off x="7523683" y="3881628"/>
+            <a:off x="7523683" y="3771900"/>
             <a:ext cx="54864" cy="54864"/>
           </a:xfrm>
           <a:prstGeom prst="ellipse">
@@ -34867,7 +34759,7 @@
         </p:nvSpPr>
         <p:spPr>
           <a:xfrm>
-            <a:off x="7679131" y="3794760"/>
+            <a:off x="7679131" y="3685032"/>
             <a:ext cx="1627632" cy="228600"/>
           </a:xfrm>
           <a:prstGeom prst="rect">
@@ -34906,8 +34798,8 @@
         </p:nvSpPr>
         <p:spPr>
           <a:xfrm>
-            <a:off x="9604858" y="1847088"/>
-            <a:ext cx="2035454" cy="2514600"/>
+            <a:off x="9604858" y="1737360"/>
+            <a:ext cx="2035454" cy="2624328"/>
           </a:xfrm>
           <a:prstGeom prst="rect">
             <a:avLst/>
@@ -34931,7 +34823,7 @@
         </p:nvSpPr>
         <p:spPr>
           <a:xfrm>
-            <a:off x="10522001" y="1563624"/>
+            <a:off x="10522001" y="1453896"/>
             <a:ext cx="201168" cy="201168"/>
           </a:xfrm>
           <a:prstGeom prst="ellipse">
@@ -34956,7 +34848,7 @@
         </p:nvSpPr>
         <p:spPr>
           <a:xfrm>
-            <a:off x="10586009" y="1627632"/>
+            <a:off x="10586009" y="1517904"/>
             <a:ext cx="73152" cy="73152"/>
           </a:xfrm>
           <a:prstGeom prst="ellipse">
@@ -34976,7 +34868,7 @@
         </p:nvSpPr>
         <p:spPr>
           <a:xfrm>
-            <a:off x="9787738" y="1975104"/>
+            <a:off x="9787738" y="1865376"/>
             <a:ext cx="1737360" cy="365760"/>
           </a:xfrm>
           <a:prstGeom prst="rect">
@@ -35015,7 +34907,7 @@
         </p:nvSpPr>
         <p:spPr>
           <a:xfrm>
-            <a:off x="9787738" y="2340864"/>
+            <a:off x="9787738" y="2231136"/>
             <a:ext cx="1737360" cy="420624"/>
           </a:xfrm>
           <a:prstGeom prst="rect">
@@ -35077,7 +34969,7 @@
         </p:nvSpPr>
         <p:spPr>
           <a:xfrm>
-            <a:off x="9787738" y="2779776"/>
+            <a:off x="9787738" y="2670048"/>
             <a:ext cx="1737360" cy="475488"/>
           </a:xfrm>
           <a:prstGeom prst="rect">
@@ -36110,23 +36002,23 @@
         <p:spPr>
           <a:xfrm>
             <a:off x="7863840" y="1847088"/>
-            <a:ext cx="1554480" cy="237744"/>
-          </a:xfrm>
-          <a:prstGeom prst="rect">
-            <a:avLst/>
-          </a:prstGeom>
-          <a:noFill/>
-          <a:ln/>
-        </p:spPr>
-        <p:txBody>
-          <a:bodyPr wrap="square" lIns="0" tIns="0" rIns="0" bIns="0" rtlCol="0" anchor="ctr"/>
-          <a:lstStyle/>
-          <a:p>
-            <a:pPr algn="l" indent="0" marL="0">
-              <a:buNone/>
-            </a:pPr>
-            <a:r>
-              <a:rPr lang="en-US" altLang="en-US" sz="1200" b="1" dirty="0">
+            <a:ext cx="1600200" cy="237744"/>
+          </a:xfrm>
+          <a:prstGeom prst="rect">
+            <a:avLst/>
+          </a:prstGeom>
+          <a:noFill/>
+          <a:ln/>
+        </p:spPr>
+        <p:txBody>
+          <a:bodyPr wrap="square" lIns="0" tIns="0" rIns="0" bIns="0" rtlCol="0" anchor="ctr"/>
+          <a:lstStyle/>
+          <a:p>
+            <a:pPr algn="l" indent="0" marL="0">
+              <a:buNone/>
+            </a:pPr>
+            <a:r>
+              <a:rPr lang="en-US" altLang="en-US" sz="1100" b="1" spc="200" kern="0" dirty="0">
                 <a:solidFill>
                   <a:srgbClr val="C9A96E"/>
                 </a:solidFill>
@@ -36136,7 +36028,7 @@
               </a:rPr>
               <a:t>IPO READY</a:t>
             </a:r>
-            <a:endParaRPr lang="en-US" sz="1200" dirty="0"/>
+            <a:endParaRPr lang="en-US" sz="1100" dirty="0"/>
           </a:p>
         </p:txBody>
       </p:sp>
@@ -36486,7 +36378,7 @@
                 <a:ea typeface="Yu Gothic Medium" charset="-128"/>
                 <a:cs typeface="Yu Gothic Medium" pitchFamily="34" charset="-120"/>
               </a:rPr>
-              <a:t>（連結管理・内部統制はPHASE 1から着手）</a:t>
+              <a:t>（連結管理・内部統制の基盤はPHASE 1から）</a:t>
             </a:r>
             <a:endParaRPr lang="ja-JP" sz="1050" dirty="0"/>
           </a:p>
@@ -37175,7 +37067,7 @@
                 <a:ea typeface="Yu Gothic Medium" charset="-128"/>
                 <a:cs typeface="Yu Gothic Medium" pitchFamily="34" charset="-120"/>
               </a:rPr>
-              <a:t>重要な経営判断をする際は、次の5つの問いで判断する。</a:t>
+              <a:t>重要な経営判断をする際は、次の5つの問いに照らして決める。</a:t>
             </a:r>
             <a:endParaRPr lang="ja-JP" sz="1400" dirty="0"/>
           </a:p>
@@ -38544,7 +38436,7 @@
         </p:nvSpPr>
         <p:spPr>
           <a:xfrm>
-            <a:off x="822960" y="2011680"/>
+            <a:off x="822960" y="1874520"/>
             <a:ext cx="5120640" cy="2834640"/>
           </a:xfrm>
           <a:prstGeom prst="rect">
@@ -38715,7 +38607,7 @@
         </p:nvSpPr>
         <p:spPr>
           <a:xfrm>
-            <a:off x="6400800" y="2011680"/>
+            <a:off x="6400800" y="1874520"/>
             <a:ext cx="5120640" cy="3200400"/>
           </a:xfrm>
           <a:prstGeom prst="rect">
@@ -38926,7 +38818,7 @@
         </p:nvSpPr>
         <p:spPr>
           <a:xfrm>
-            <a:off x="822960" y="5321808"/>
+            <a:off x="822960" y="5394960"/>
             <a:ext cx="10515600" cy="566928"/>
           </a:xfrm>
           <a:prstGeom prst="rect">
@@ -38965,7 +38857,7 @@
         </p:nvSpPr>
         <p:spPr>
           <a:xfrm>
-            <a:off x="822960" y="6144768"/>
+            <a:off x="822960" y="6199632"/>
             <a:ext cx="1417320" cy="0"/>
           </a:xfrm>
           <a:prstGeom prst="line">
@@ -38988,7 +38880,7 @@
         </p:nvSpPr>
         <p:spPr>
           <a:xfrm>
-            <a:off x="2272284" y="6085332"/>
+            <a:off x="2272284" y="6140196"/>
             <a:ext cx="118872" cy="118872"/>
           </a:xfrm>
           <a:prstGeom prst="ellipse">
@@ -39008,7 +38900,7 @@
         </p:nvSpPr>
         <p:spPr>
           <a:xfrm>
-            <a:off x="2560320" y="6016752"/>
+            <a:off x="2560320" y="6071616"/>
             <a:ext cx="3657600" cy="256032"/>
           </a:xfrm>
           <a:prstGeom prst="rect">
@@ -41065,8 +40957,8 @@
         </p:nvSpPr>
         <p:spPr>
           <a:xfrm flipV="1">
-            <a:off x="868680" y="2514600"/>
-            <a:ext cx="0" cy="2894076"/>
+            <a:off x="868680" y="2491740"/>
+            <a:ext cx="0" cy="2935224"/>
           </a:xfrm>
           <a:prstGeom prst="line">
             <a:avLst/>
@@ -41089,7 +40981,7 @@
         </p:nvSpPr>
         <p:spPr>
           <a:xfrm>
-            <a:off x="713232" y="2185416"/>
+            <a:off x="713232" y="2162556"/>
             <a:ext cx="310896" cy="310896"/>
           </a:xfrm>
           <a:prstGeom prst="ellipse">
@@ -41114,7 +41006,7 @@
         </p:nvSpPr>
         <p:spPr>
           <a:xfrm>
-            <a:off x="813816" y="2286000"/>
+            <a:off x="813816" y="2263140"/>
             <a:ext cx="109728" cy="109728"/>
           </a:xfrm>
           <a:prstGeom prst="ellipse">
@@ -41134,7 +41026,7 @@
         </p:nvSpPr>
         <p:spPr>
           <a:xfrm>
-            <a:off x="758952" y="3447288"/>
+            <a:off x="758952" y="3429000"/>
             <a:ext cx="219456" cy="219456"/>
           </a:xfrm>
           <a:prstGeom prst="ellipse">
@@ -41154,7 +41046,7 @@
         </p:nvSpPr>
         <p:spPr>
           <a:xfrm>
-            <a:off x="786384" y="4361688"/>
+            <a:off x="786384" y="4370832"/>
             <a:ext cx="164592" cy="164592"/>
           </a:xfrm>
           <a:prstGeom prst="ellipse">
@@ -41174,7 +41066,7 @@
         </p:nvSpPr>
         <p:spPr>
           <a:xfrm>
-            <a:off x="731520" y="5271516"/>
+            <a:off x="731520" y="5289804"/>
             <a:ext cx="274320" cy="274320"/>
           </a:xfrm>
           <a:prstGeom prst="ellipse">
@@ -41194,8 +41086,8 @@
         </p:nvSpPr>
         <p:spPr>
           <a:xfrm>
-            <a:off x="1325880" y="1691640"/>
-            <a:ext cx="10314432" cy="1298448"/>
+            <a:off x="1325880" y="1645920"/>
+            <a:ext cx="10314432" cy="1344168"/>
           </a:xfrm>
           <a:prstGeom prst="rect">
             <a:avLst/>
@@ -41214,7 +41106,7 @@
         </p:nvSpPr>
         <p:spPr>
           <a:xfrm>
-            <a:off x="1554480" y="1810512"/>
+            <a:off x="1554480" y="1764792"/>
             <a:ext cx="2011680" cy="228600"/>
           </a:xfrm>
           <a:prstGeom prst="rect">
@@ -41253,7 +41145,7 @@
         </p:nvSpPr>
         <p:spPr>
           <a:xfrm>
-            <a:off x="1554480" y="2029968"/>
+            <a:off x="1554480" y="1984248"/>
             <a:ext cx="2011680" cy="502920"/>
           </a:xfrm>
           <a:prstGeom prst="rect">
@@ -41292,7 +41184,7 @@
         </p:nvSpPr>
         <p:spPr>
           <a:xfrm>
-            <a:off x="1554480" y="2551176"/>
+            <a:off x="1554480" y="2505456"/>
             <a:ext cx="2011680" cy="274320"/>
           </a:xfrm>
           <a:prstGeom prst="rect">
@@ -41331,7 +41223,7 @@
         </p:nvSpPr>
         <p:spPr>
           <a:xfrm>
-            <a:off x="3657600" y="1810512"/>
+            <a:off x="3657600" y="1764792"/>
             <a:ext cx="5486400" cy="228600"/>
           </a:xfrm>
           <a:prstGeom prst="rect">
@@ -41370,7 +41262,7 @@
         </p:nvSpPr>
         <p:spPr>
           <a:xfrm>
-            <a:off x="3657600" y="2194560"/>
+            <a:off x="3657600" y="2148840"/>
             <a:ext cx="54864" cy="54864"/>
           </a:xfrm>
           <a:prstGeom prst="ellipse">
@@ -41390,7 +41282,7 @@
         </p:nvSpPr>
         <p:spPr>
           <a:xfrm>
-            <a:off x="3794760" y="2093976"/>
+            <a:off x="3794760" y="2048256"/>
             <a:ext cx="1874520" cy="256032"/>
           </a:xfrm>
           <a:prstGeom prst="rect">
@@ -41429,7 +41321,7 @@
         </p:nvSpPr>
         <p:spPr>
           <a:xfrm>
-            <a:off x="3657600" y="2468880"/>
+            <a:off x="3657600" y="2423160"/>
             <a:ext cx="54864" cy="54864"/>
           </a:xfrm>
           <a:prstGeom prst="ellipse">
@@ -41449,7 +41341,7 @@
         </p:nvSpPr>
         <p:spPr>
           <a:xfrm>
-            <a:off x="3794760" y="2368296"/>
+            <a:off x="3794760" y="2322576"/>
             <a:ext cx="1874520" cy="256032"/>
           </a:xfrm>
           <a:prstGeom prst="rect">
@@ -41488,7 +41380,7 @@
         </p:nvSpPr>
         <p:spPr>
           <a:xfrm>
-            <a:off x="3657600" y="2743200"/>
+            <a:off x="3657600" y="2697480"/>
             <a:ext cx="54864" cy="54864"/>
           </a:xfrm>
           <a:prstGeom prst="ellipse">
@@ -41508,7 +41400,7 @@
         </p:nvSpPr>
         <p:spPr>
           <a:xfrm>
-            <a:off x="3794760" y="2642616"/>
+            <a:off x="3794760" y="2596896"/>
             <a:ext cx="1874520" cy="256032"/>
           </a:xfrm>
           <a:prstGeom prst="rect">
@@ -41547,7 +41439,7 @@
         </p:nvSpPr>
         <p:spPr>
           <a:xfrm>
-            <a:off x="5760720" y="2194560"/>
+            <a:off x="5760720" y="2148840"/>
             <a:ext cx="54864" cy="54864"/>
           </a:xfrm>
           <a:prstGeom prst="ellipse">
@@ -41567,7 +41459,7 @@
         </p:nvSpPr>
         <p:spPr>
           <a:xfrm>
-            <a:off x="5897880" y="2093976"/>
+            <a:off x="5897880" y="2048256"/>
             <a:ext cx="2011680" cy="256032"/>
           </a:xfrm>
           <a:prstGeom prst="rect">
@@ -41606,7 +41498,7 @@
         </p:nvSpPr>
         <p:spPr>
           <a:xfrm>
-            <a:off x="5760720" y="2468880"/>
+            <a:off x="5760720" y="2423160"/>
             <a:ext cx="54864" cy="54864"/>
           </a:xfrm>
           <a:prstGeom prst="ellipse">
@@ -41626,7 +41518,7 @@
         </p:nvSpPr>
         <p:spPr>
           <a:xfrm>
-            <a:off x="5897880" y="2368296"/>
+            <a:off x="5897880" y="2322576"/>
             <a:ext cx="2011680" cy="256032"/>
           </a:xfrm>
           <a:prstGeom prst="rect">
@@ -41665,7 +41557,7 @@
         </p:nvSpPr>
         <p:spPr>
           <a:xfrm>
-            <a:off x="5760720" y="2743200"/>
+            <a:off x="5760720" y="2697480"/>
             <a:ext cx="54864" cy="54864"/>
           </a:xfrm>
           <a:prstGeom prst="ellipse">
@@ -41685,7 +41577,7 @@
         </p:nvSpPr>
         <p:spPr>
           <a:xfrm>
-            <a:off x="5897880" y="2642616"/>
+            <a:off x="5897880" y="2596896"/>
             <a:ext cx="2011680" cy="256032"/>
           </a:xfrm>
           <a:prstGeom prst="rect">
@@ -41724,7 +41616,7 @@
         </p:nvSpPr>
         <p:spPr>
           <a:xfrm>
-            <a:off x="8001000" y="2194560"/>
+            <a:off x="8001000" y="2148840"/>
             <a:ext cx="54864" cy="54864"/>
           </a:xfrm>
           <a:prstGeom prst="ellipse">
@@ -41744,7 +41636,7 @@
         </p:nvSpPr>
         <p:spPr>
           <a:xfrm>
-            <a:off x="8138160" y="2093976"/>
+            <a:off x="8138160" y="2048256"/>
             <a:ext cx="3429000" cy="256032"/>
           </a:xfrm>
           <a:prstGeom prst="rect">
@@ -41783,7 +41675,7 @@
         </p:nvSpPr>
         <p:spPr>
           <a:xfrm>
-            <a:off x="8001000" y="2468880"/>
+            <a:off x="8001000" y="2423160"/>
             <a:ext cx="54864" cy="54864"/>
           </a:xfrm>
           <a:prstGeom prst="ellipse">
@@ -41803,7 +41695,7 @@
         </p:nvSpPr>
         <p:spPr>
           <a:xfrm>
-            <a:off x="8138160" y="2368296"/>
+            <a:off x="8138160" y="2322576"/>
             <a:ext cx="3429000" cy="256032"/>
           </a:xfrm>
           <a:prstGeom prst="rect">
@@ -41842,7 +41734,7 @@
         </p:nvSpPr>
         <p:spPr>
           <a:xfrm>
-            <a:off x="8001000" y="2743200"/>
+            <a:off x="8001000" y="2697480"/>
             <a:ext cx="54864" cy="54864"/>
           </a:xfrm>
           <a:prstGeom prst="ellipse">
@@ -41862,7 +41754,7 @@
         </p:nvSpPr>
         <p:spPr>
           <a:xfrm>
-            <a:off x="8138160" y="2642616"/>
+            <a:off x="8138160" y="2596896"/>
             <a:ext cx="3429000" cy="256032"/>
           </a:xfrm>
           <a:prstGeom prst="rect">
@@ -41901,7 +41793,7 @@
         </p:nvSpPr>
         <p:spPr>
           <a:xfrm>
-            <a:off x="1325880" y="3099816"/>
+            <a:off x="1325880" y="3081528"/>
             <a:ext cx="10314432" cy="914400"/>
           </a:xfrm>
           <a:prstGeom prst="rect">
@@ -41921,7 +41813,7 @@
         </p:nvSpPr>
         <p:spPr>
           <a:xfrm>
-            <a:off x="1554480" y="3209544"/>
+            <a:off x="1554480" y="3191256"/>
             <a:ext cx="2011680" cy="228600"/>
           </a:xfrm>
           <a:prstGeom prst="rect">
@@ -41960,7 +41852,7 @@
         </p:nvSpPr>
         <p:spPr>
           <a:xfrm>
-            <a:off x="1554480" y="3447288"/>
+            <a:off x="1554480" y="3429000"/>
             <a:ext cx="2011680" cy="457200"/>
           </a:xfrm>
           <a:prstGeom prst="rect">
@@ -41999,7 +41891,7 @@
         </p:nvSpPr>
         <p:spPr>
           <a:xfrm>
-            <a:off x="3657600" y="3209544"/>
+            <a:off x="3657600" y="3191256"/>
             <a:ext cx="2743200" cy="228600"/>
           </a:xfrm>
           <a:prstGeom prst="rect">
@@ -42038,7 +41930,7 @@
         </p:nvSpPr>
         <p:spPr>
           <a:xfrm>
-            <a:off x="3657600" y="3483864"/>
+            <a:off x="3657600" y="3465576"/>
             <a:ext cx="3017520" cy="411480"/>
           </a:xfrm>
           <a:prstGeom prst="rect">
@@ -42091,7 +41983,7 @@
         </p:nvSpPr>
         <p:spPr>
           <a:xfrm>
-            <a:off x="6812280" y="3209544"/>
+            <a:off x="6812280" y="3191256"/>
             <a:ext cx="2286000" cy="228600"/>
           </a:xfrm>
           <a:prstGeom prst="rect">
@@ -42130,7 +42022,7 @@
         </p:nvSpPr>
         <p:spPr>
           <a:xfrm>
-            <a:off x="6812280" y="3511296"/>
+            <a:off x="6812280" y="3493008"/>
             <a:ext cx="2423160" cy="365760"/>
           </a:xfrm>
           <a:prstGeom prst="rect">
@@ -42169,7 +42061,7 @@
         </p:nvSpPr>
         <p:spPr>
           <a:xfrm>
-            <a:off x="9326880" y="3209544"/>
+            <a:off x="9326880" y="3191256"/>
             <a:ext cx="2194560" cy="228600"/>
           </a:xfrm>
           <a:prstGeom prst="rect">
@@ -42208,7 +42100,7 @@
         </p:nvSpPr>
         <p:spPr>
           <a:xfrm>
-            <a:off x="9326880" y="3511296"/>
+            <a:off x="9326880" y="3493008"/>
             <a:ext cx="2240280" cy="365760"/>
           </a:xfrm>
           <a:prstGeom prst="rect">
@@ -42247,8 +42139,8 @@
         </p:nvSpPr>
         <p:spPr>
           <a:xfrm>
-            <a:off x="1325880" y="4123944"/>
-            <a:ext cx="10314432" cy="640080"/>
+            <a:off x="1325880" y="4087368"/>
+            <a:ext cx="10314432" cy="731520"/>
           </a:xfrm>
           <a:prstGeom prst="rect">
             <a:avLst/>
@@ -42267,7 +42159,7 @@
         </p:nvSpPr>
         <p:spPr>
           <a:xfrm>
-            <a:off x="1554480" y="4197096"/>
+            <a:off x="1554480" y="4187952"/>
             <a:ext cx="2011680" cy="228600"/>
           </a:xfrm>
           <a:prstGeom prst="rect">
@@ -42306,8 +42198,8 @@
         </p:nvSpPr>
         <p:spPr>
           <a:xfrm>
-            <a:off x="1554480" y="4398264"/>
-            <a:ext cx="1371600" cy="329184"/>
+            <a:off x="1554480" y="4425696"/>
+            <a:ext cx="1371600" cy="292608"/>
           </a:xfrm>
           <a:prstGeom prst="rect">
             <a:avLst/>
@@ -42345,8 +42237,8 @@
         </p:nvSpPr>
         <p:spPr>
           <a:xfrm>
-            <a:off x="3657600" y="4123944"/>
-            <a:ext cx="2743200" cy="640080"/>
+            <a:off x="3657600" y="4087368"/>
+            <a:ext cx="2743200" cy="731520"/>
           </a:xfrm>
           <a:prstGeom prst="rect">
             <a:avLst/>
@@ -42384,34 +42276,34 @@
         </p:nvSpPr>
         <p:spPr>
           <a:xfrm>
-            <a:off x="6812280" y="4123944"/>
-            <a:ext cx="2743200" cy="640080"/>
-          </a:xfrm>
-          <a:prstGeom prst="rect">
-            <a:avLst/>
-          </a:prstGeom>
-          <a:noFill/>
-          <a:ln/>
-        </p:spPr>
-        <p:txBody>
-          <a:bodyPr wrap="square" lIns="0" tIns="0" rIns="0" bIns="0" rtlCol="0" anchor="ctr"/>
-          <a:lstStyle/>
-          <a:p>
-            <a:pPr algn="l" indent="0" marL="0">
-              <a:buNone/>
-            </a:pPr>
-            <a:r>
-              <a:rPr lang="ja-JP" altLang="en-US" sz="1400" dirty="0">
-                <a:solidFill>
-                  <a:srgbClr val="1B1F27"/>
-                </a:solidFill>
-                <a:latin typeface="Yu Gothic Medium" pitchFamily="34" charset="0"/>
-                <a:ea typeface="Yu Gothic Medium" charset="-128"/>
-                <a:cs typeface="Yu Gothic Medium" pitchFamily="34" charset="-120"/>
+            <a:off x="6812280" y="4087368"/>
+            <a:ext cx="2743200" cy="731520"/>
+          </a:xfrm>
+          <a:prstGeom prst="rect">
+            <a:avLst/>
+          </a:prstGeom>
+          <a:noFill/>
+          <a:ln/>
+        </p:spPr>
+        <p:txBody>
+          <a:bodyPr wrap="square" lIns="0" tIns="0" rIns="0" bIns="0" rtlCol="0" anchor="ctr"/>
+          <a:lstStyle/>
+          <a:p>
+            <a:pPr algn="l" indent="0" marL="0">
+              <a:buNone/>
+            </a:pPr>
+            <a:r>
+              <a:rPr lang="ja-JP" altLang="en-US" sz="1500" b="1" dirty="0">
+                <a:solidFill>
+                  <a:srgbClr val="14284B"/>
+                </a:solidFill>
+                <a:latin typeface="Yu Gothic" pitchFamily="34" charset="0"/>
+                <a:ea typeface="Yu Gothic" charset="-128"/>
+                <a:cs typeface="Yu Gothic" pitchFamily="34" charset="-120"/>
               </a:rPr>
               <a:t>グループ経営開始</a:t>
             </a:r>
-            <a:endParaRPr lang="ja-JP" sz="1400" dirty="0"/>
+            <a:endParaRPr lang="ja-JP" sz="1500" dirty="0"/>
           </a:p>
         </p:txBody>
       </p:sp>
@@ -42423,8 +42315,8 @@
         </p:nvSpPr>
         <p:spPr>
           <a:xfrm>
-            <a:off x="1325880" y="4873752"/>
-            <a:ext cx="10314432" cy="1069848"/>
+            <a:off x="1325880" y="4910328"/>
+            <a:ext cx="10314432" cy="1033272"/>
           </a:xfrm>
           <a:prstGeom prst="rect">
             <a:avLst/>
@@ -42448,7 +42340,7 @@
         </p:nvSpPr>
         <p:spPr>
           <a:xfrm>
-            <a:off x="1554480" y="4983480"/>
+            <a:off x="1554480" y="5020056"/>
             <a:ext cx="2011680" cy="228600"/>
           </a:xfrm>
           <a:prstGeom prst="rect">
@@ -42487,7 +42379,7 @@
         </p:nvSpPr>
         <p:spPr>
           <a:xfrm>
-            <a:off x="1554480" y="5221224"/>
+            <a:off x="1554480" y="5257800"/>
             <a:ext cx="2103120" cy="347472"/>
           </a:xfrm>
           <a:prstGeom prst="rect">
@@ -42526,7 +42418,7 @@
         </p:nvSpPr>
         <p:spPr>
           <a:xfrm>
-            <a:off x="1554480" y="5568696"/>
+            <a:off x="1554480" y="5605272"/>
             <a:ext cx="2103120" cy="256032"/>
           </a:xfrm>
           <a:prstGeom prst="rect">
@@ -42565,7 +42457,7 @@
         </p:nvSpPr>
         <p:spPr>
           <a:xfrm>
-            <a:off x="3657600" y="5020056"/>
+            <a:off x="3657600" y="5038344"/>
             <a:ext cx="1874520" cy="777240"/>
           </a:xfrm>
           <a:prstGeom prst="rect">
@@ -42585,7 +42477,7 @@
         </p:nvSpPr>
         <p:spPr>
           <a:xfrm>
-            <a:off x="3822192" y="5093208"/>
+            <a:off x="3822192" y="5111496"/>
             <a:ext cx="1554480" cy="219456"/>
           </a:xfrm>
           <a:prstGeom prst="rect">
@@ -42624,7 +42516,7 @@
         </p:nvSpPr>
         <p:spPr>
           <a:xfrm>
-            <a:off x="3822192" y="5330952"/>
+            <a:off x="3822192" y="5349240"/>
             <a:ext cx="1554480" cy="365760"/>
           </a:xfrm>
           <a:prstGeom prst="rect">
@@ -42663,7 +42555,7 @@
         </p:nvSpPr>
         <p:spPr>
           <a:xfrm>
-            <a:off x="5641848" y="5020056"/>
+            <a:off x="5641848" y="5038344"/>
             <a:ext cx="1874520" cy="777240"/>
           </a:xfrm>
           <a:prstGeom prst="rect">
@@ -42683,7 +42575,7 @@
         </p:nvSpPr>
         <p:spPr>
           <a:xfrm>
-            <a:off x="5806440" y="5093208"/>
+            <a:off x="5806440" y="5111496"/>
             <a:ext cx="1554480" cy="219456"/>
           </a:xfrm>
           <a:prstGeom prst="rect">
@@ -42722,7 +42614,7 @@
         </p:nvSpPr>
         <p:spPr>
           <a:xfrm>
-            <a:off x="5806440" y="5330952"/>
+            <a:off x="5806440" y="5349240"/>
             <a:ext cx="1554480" cy="365760"/>
           </a:xfrm>
           <a:prstGeom prst="rect">
@@ -42761,7 +42653,7 @@
         </p:nvSpPr>
         <p:spPr>
           <a:xfrm>
-            <a:off x="7626096" y="5020056"/>
+            <a:off x="7626096" y="5038344"/>
             <a:ext cx="1874520" cy="777240"/>
           </a:xfrm>
           <a:prstGeom prst="rect">
@@ -42781,7 +42673,7 @@
         </p:nvSpPr>
         <p:spPr>
           <a:xfrm>
-            <a:off x="7790688" y="5093208"/>
+            <a:off x="7790688" y="5111496"/>
             <a:ext cx="1554480" cy="219456"/>
           </a:xfrm>
           <a:prstGeom prst="rect">
@@ -42820,7 +42712,7 @@
         </p:nvSpPr>
         <p:spPr>
           <a:xfrm>
-            <a:off x="7790688" y="5330952"/>
+            <a:off x="7790688" y="5349240"/>
             <a:ext cx="1554480" cy="365760"/>
           </a:xfrm>
           <a:prstGeom prst="rect">
@@ -42859,7 +42751,7 @@
         </p:nvSpPr>
         <p:spPr>
           <a:xfrm>
-            <a:off x="9610344" y="5020056"/>
+            <a:off x="9610344" y="5038344"/>
             <a:ext cx="1874520" cy="777240"/>
           </a:xfrm>
           <a:prstGeom prst="rect">
@@ -42879,7 +42771,7 @@
         </p:nvSpPr>
         <p:spPr>
           <a:xfrm>
-            <a:off x="9774936" y="5093208"/>
+            <a:off x="9774936" y="5111496"/>
             <a:ext cx="1554480" cy="219456"/>
           </a:xfrm>
           <a:prstGeom prst="rect">
@@ -42918,7 +42810,7 @@
         </p:nvSpPr>
         <p:spPr>
           <a:xfrm>
-            <a:off x="9774936" y="5330952"/>
+            <a:off x="9774936" y="5349240"/>
             <a:ext cx="1554480" cy="365760"/>
           </a:xfrm>
           <a:prstGeom prst="rect">
@@ -43242,7 +43134,7 @@
             <a:r>
               <a:rPr lang="en-US" altLang="en-US" sz="1000" b="1" dirty="0">
                 <a:solidFill>
-                  <a:srgbClr val="8C96A6"/>
+                  <a:srgbClr val="7A8494"/>
                 </a:solidFill>
                 <a:latin typeface="Arial" pitchFamily="34" charset="0"/>
                 <a:ea typeface="Arial" charset="-128"/>
@@ -43301,7 +43193,7 @@
             <a:r>
               <a:rPr lang="en-US" altLang="en-US" sz="1000" b="1" dirty="0">
                 <a:solidFill>
-                  <a:srgbClr val="8C96A6"/>
+                  <a:srgbClr val="7A8494"/>
                 </a:solidFill>
                 <a:latin typeface="Arial" pitchFamily="34" charset="0"/>
                 <a:ea typeface="Arial" charset="-128"/>
@@ -43419,7 +43311,7 @@
             <a:r>
               <a:rPr lang="en-US" altLang="en-US" sz="1000" b="1" dirty="0">
                 <a:solidFill>
-                  <a:srgbClr val="8C96A6"/>
+                  <a:srgbClr val="7A8494"/>
                 </a:solidFill>
                 <a:latin typeface="Arial" pitchFamily="34" charset="0"/>
                 <a:ea typeface="Arial" charset="-128"/>
@@ -43517,8 +43409,8 @@
         </p:nvSpPr>
         <p:spPr>
           <a:xfrm>
-            <a:off x="548640" y="1783080"/>
-            <a:ext cx="5411419" cy="2148840"/>
+            <a:off x="548640" y="1737360"/>
+            <a:ext cx="5411419" cy="2011680"/>
           </a:xfrm>
           <a:prstGeom prst="rect">
             <a:avLst/>
@@ -43537,7 +43429,7 @@
         </p:nvSpPr>
         <p:spPr>
           <a:xfrm>
-            <a:off x="822960" y="1947672"/>
+            <a:off x="822960" y="1865376"/>
             <a:ext cx="502920" cy="347472"/>
           </a:xfrm>
           <a:prstGeom prst="rect">
@@ -43576,7 +43468,7 @@
         </p:nvSpPr>
         <p:spPr>
           <a:xfrm>
-            <a:off x="1325880" y="1947672"/>
+            <a:off x="1325880" y="1865376"/>
             <a:ext cx="2743200" cy="347472"/>
           </a:xfrm>
           <a:prstGeom prst="rect">
@@ -43615,7 +43507,7 @@
         </p:nvSpPr>
         <p:spPr>
           <a:xfrm>
-            <a:off x="3566160" y="1947672"/>
+            <a:off x="3566160" y="1865376"/>
             <a:ext cx="2148840" cy="347472"/>
           </a:xfrm>
           <a:prstGeom prst="rect">
@@ -43654,7 +43546,7 @@
         </p:nvSpPr>
         <p:spPr>
           <a:xfrm>
-            <a:off x="813816" y="2560320"/>
+            <a:off x="813816" y="2441448"/>
             <a:ext cx="73152" cy="73152"/>
           </a:xfrm>
           <a:prstGeom prst="ellipse">
@@ -43674,7 +43566,7 @@
         </p:nvSpPr>
         <p:spPr>
           <a:xfrm>
-            <a:off x="1005840" y="2441448"/>
+            <a:off x="1005840" y="2322576"/>
             <a:ext cx="4663440" cy="310896"/>
           </a:xfrm>
           <a:prstGeom prst="rect">
@@ -43727,7 +43619,7 @@
         </p:nvSpPr>
         <p:spPr>
           <a:xfrm>
-            <a:off x="818388" y="2948940"/>
+            <a:off x="818388" y="2793492"/>
             <a:ext cx="64008" cy="64008"/>
           </a:xfrm>
           <a:prstGeom prst="ellipse">
@@ -43747,7 +43639,7 @@
         </p:nvSpPr>
         <p:spPr>
           <a:xfrm>
-            <a:off x="1005840" y="2825496"/>
+            <a:off x="1005840" y="2670048"/>
             <a:ext cx="2331720" cy="310896"/>
           </a:xfrm>
           <a:prstGeom prst="rect">
@@ -43786,7 +43678,7 @@
         </p:nvSpPr>
         <p:spPr>
           <a:xfrm>
-            <a:off x="3378708" y="2948940"/>
+            <a:off x="3378708" y="2793492"/>
             <a:ext cx="64008" cy="64008"/>
           </a:xfrm>
           <a:prstGeom prst="ellipse">
@@ -43806,7 +43698,7 @@
         </p:nvSpPr>
         <p:spPr>
           <a:xfrm>
-            <a:off x="3566160" y="2825496"/>
+            <a:off x="3566160" y="2670048"/>
             <a:ext cx="2331720" cy="310896"/>
           </a:xfrm>
           <a:prstGeom prst="rect">
@@ -43845,7 +43737,7 @@
         </p:nvSpPr>
         <p:spPr>
           <a:xfrm>
-            <a:off x="818388" y="3332988"/>
+            <a:off x="818388" y="3140964"/>
             <a:ext cx="64008" cy="64008"/>
           </a:xfrm>
           <a:prstGeom prst="ellipse">
@@ -43865,7 +43757,7 @@
         </p:nvSpPr>
         <p:spPr>
           <a:xfrm>
-            <a:off x="1005840" y="3209544"/>
+            <a:off x="1005840" y="3017520"/>
             <a:ext cx="2331720" cy="310896"/>
           </a:xfrm>
           <a:prstGeom prst="rect">
@@ -43904,7 +43796,7 @@
         </p:nvSpPr>
         <p:spPr>
           <a:xfrm>
-            <a:off x="3378708" y="3332988"/>
+            <a:off x="818388" y="3488436"/>
             <a:ext cx="64008" cy="64008"/>
           </a:xfrm>
           <a:prstGeom prst="ellipse">
@@ -43924,23 +43816,20 @@
         </p:nvSpPr>
         <p:spPr>
           <a:xfrm>
-            <a:off x="3566160" y="3232404"/>
-            <a:ext cx="2331720" cy="533400"/>
-          </a:xfrm>
-          <a:prstGeom prst="rect">
-            <a:avLst/>
-          </a:prstGeom>
-          <a:noFill/>
-          <a:ln/>
-        </p:spPr>
-        <p:txBody>
-          <a:bodyPr wrap="square" lIns="0" tIns="0" rIns="0" bIns="0" rtlCol="0" anchor="t"/>
-          <a:lstStyle/>
-          <a:p>
-            <a:pPr algn="l" indent="0" marL="0">
-              <a:lnSpc>
-                <a:spcPts val="2100"/>
-              </a:lnSpc>
+            <a:off x="1005840" y="3364992"/>
+            <a:ext cx="4663440" cy="310896"/>
+          </a:xfrm>
+          <a:prstGeom prst="rect">
+            <a:avLst/>
+          </a:prstGeom>
+          <a:noFill/>
+          <a:ln/>
+        </p:spPr>
+        <p:txBody>
+          <a:bodyPr wrap="square" lIns="0" tIns="0" rIns="0" bIns="0" rtlCol="0" anchor="ctr"/>
+          <a:lstStyle/>
+          <a:p>
+            <a:pPr algn="l" indent="0" marL="0">
               <a:buNone/>
             </a:pPr>
             <a:r>
@@ -43952,15 +43841,191 @@
                 <a:ea typeface="Yu Gothic Medium" charset="-128"/>
                 <a:cs typeface="Yu Gothic Medium" pitchFamily="34" charset="-120"/>
               </a:rPr>
-              <a:t>継続的なM&amp;Aを可能にする</a:t>
+              <a:t>継続的なM&amp;Aを可能にする借入余力</a:t>
             </a:r>
             <a:endParaRPr lang="ja-JP" sz="1400" dirty="0"/>
           </a:p>
-          <a:p>
-            <a:pPr algn="l" indent="0" marL="0">
-              <a:lnSpc>
-                <a:spcPts val="2100"/>
-              </a:lnSpc>
+        </p:txBody>
+      </p:sp>
+      <p:sp>
+        <p:nvSpPr>
+          <p:cNvPr id="33" name="Shape 30"/>
+          <p:cNvSpPr/>
+          <p:nvPr/>
+        </p:nvSpPr>
+        <p:spPr>
+          <a:xfrm>
+            <a:off x="6231636" y="1737360"/>
+            <a:ext cx="5411419" cy="2011680"/>
+          </a:xfrm>
+          <a:prstGeom prst="rect">
+            <a:avLst/>
+          </a:prstGeom>
+          <a:solidFill>
+            <a:srgbClr val="F3F5F8"/>
+          </a:solidFill>
+          <a:ln/>
+        </p:spPr>
+      </p:sp>
+      <p:sp>
+        <p:nvSpPr>
+          <p:cNvPr id="34" name="Text 31"/>
+          <p:cNvSpPr txBox="1"/>
+          <p:nvPr/>
+        </p:nvSpPr>
+        <p:spPr>
+          <a:xfrm>
+            <a:off x="6505956" y="1865376"/>
+            <a:ext cx="502920" cy="347472"/>
+          </a:xfrm>
+          <a:prstGeom prst="rect">
+            <a:avLst/>
+          </a:prstGeom>
+          <a:noFill/>
+          <a:ln/>
+        </p:spPr>
+        <p:txBody>
+          <a:bodyPr wrap="square" lIns="0" tIns="0" rIns="0" bIns="0" rtlCol="0" anchor="ctr"/>
+          <a:lstStyle/>
+          <a:p>
+            <a:pPr algn="l" indent="0" marL="0">
+              <a:buNone/>
+            </a:pPr>
+            <a:r>
+              <a:rPr lang="en-US" altLang="en-US" sz="1600" b="1" dirty="0">
+                <a:solidFill>
+                  <a:srgbClr val="8C6D3F"/>
+                </a:solidFill>
+                <a:latin typeface="Cambria" pitchFamily="34" charset="0"/>
+                <a:ea typeface="Cambria" charset="-128"/>
+                <a:cs typeface="Cambria" pitchFamily="34" charset="-120"/>
+              </a:rPr>
+              <a:t>02</a:t>
+            </a:r>
+            <a:endParaRPr lang="en-US" sz="1600" dirty="0"/>
+          </a:p>
+        </p:txBody>
+      </p:sp>
+      <p:sp>
+        <p:nvSpPr>
+          <p:cNvPr id="35" name="Text 32"/>
+          <p:cNvSpPr txBox="1"/>
+          <p:nvPr/>
+        </p:nvSpPr>
+        <p:spPr>
+          <a:xfrm>
+            <a:off x="7008876" y="1865376"/>
+            <a:ext cx="2743200" cy="347472"/>
+          </a:xfrm>
+          <a:prstGeom prst="rect">
+            <a:avLst/>
+          </a:prstGeom>
+          <a:noFill/>
+          <a:ln/>
+        </p:spPr>
+        <p:txBody>
+          <a:bodyPr wrap="square" lIns="0" tIns="0" rIns="0" bIns="0" rtlCol="0" anchor="ctr"/>
+          <a:lstStyle/>
+          <a:p>
+            <a:pPr algn="l" indent="0" marL="0">
+              <a:buNone/>
+            </a:pPr>
+            <a:r>
+              <a:rPr lang="ja-JP" altLang="en-US" sz="1800" b="1" dirty="0">
+                <a:solidFill>
+                  <a:srgbClr val="14284B"/>
+                </a:solidFill>
+                <a:latin typeface="Yu Gothic" pitchFamily="34" charset="0"/>
+                <a:ea typeface="Yu Gothic" charset="-128"/>
+                <a:cs typeface="Yu Gothic" pitchFamily="34" charset="-120"/>
+              </a:rPr>
+              <a:t>事業ポートフォリオ</a:t>
+            </a:r>
+            <a:endParaRPr lang="ja-JP" sz="1800" dirty="0"/>
+          </a:p>
+        </p:txBody>
+      </p:sp>
+      <p:sp>
+        <p:nvSpPr>
+          <p:cNvPr id="36" name="Text 33"/>
+          <p:cNvSpPr txBox="1"/>
+          <p:nvPr/>
+        </p:nvSpPr>
+        <p:spPr>
+          <a:xfrm>
+            <a:off x="9249156" y="1865376"/>
+            <a:ext cx="2148840" cy="347472"/>
+          </a:xfrm>
+          <a:prstGeom prst="rect">
+            <a:avLst/>
+          </a:prstGeom>
+          <a:noFill/>
+          <a:ln/>
+        </p:spPr>
+        <p:txBody>
+          <a:bodyPr wrap="square" lIns="0" tIns="0" rIns="0" bIns="0" rtlCol="0" anchor="ctr"/>
+          <a:lstStyle/>
+          <a:p>
+            <a:pPr algn="r" indent="0" marL="0">
+              <a:buNone/>
+            </a:pPr>
+            <a:r>
+              <a:rPr lang="en-US" altLang="en-US" sz="1100" b="1" spc="200" kern="0" dirty="0">
+                <a:solidFill>
+                  <a:srgbClr val="8C6D3F"/>
+                </a:solidFill>
+                <a:latin typeface="Arial" pitchFamily="34" charset="0"/>
+                <a:ea typeface="Arial" charset="-128"/>
+                <a:cs typeface="Arial" pitchFamily="34" charset="-120"/>
+              </a:rPr>
+              <a:t>PORTFOLIO</a:t>
+            </a:r>
+            <a:endParaRPr lang="en-US" sz="1100" dirty="0"/>
+          </a:p>
+        </p:txBody>
+      </p:sp>
+      <p:sp>
+        <p:nvSpPr>
+          <p:cNvPr id="37" name="Shape 34"/>
+          <p:cNvSpPr/>
+          <p:nvPr/>
+        </p:nvSpPr>
+        <p:spPr>
+          <a:xfrm>
+            <a:off x="6501384" y="2446020"/>
+            <a:ext cx="64008" cy="64008"/>
+          </a:xfrm>
+          <a:prstGeom prst="ellipse">
+            <a:avLst/>
+          </a:prstGeom>
+          <a:solidFill>
+            <a:srgbClr val="B08D57"/>
+          </a:solidFill>
+          <a:ln/>
+        </p:spPr>
+      </p:sp>
+      <p:sp>
+        <p:nvSpPr>
+          <p:cNvPr id="38" name="Text 35"/>
+          <p:cNvSpPr txBox="1"/>
+          <p:nvPr/>
+        </p:nvSpPr>
+        <p:spPr>
+          <a:xfrm>
+            <a:off x="6688836" y="2322576"/>
+            <a:ext cx="2331720" cy="310896"/>
+          </a:xfrm>
+          <a:prstGeom prst="rect">
+            <a:avLst/>
+          </a:prstGeom>
+          <a:noFill/>
+          <a:ln/>
+        </p:spPr>
+        <p:txBody>
+          <a:bodyPr wrap="square" lIns="0" tIns="0" rIns="0" bIns="0" rtlCol="0" anchor="ctr"/>
+          <a:lstStyle/>
+          <a:p>
+            <a:pPr algn="l" indent="0" marL="0">
               <a:buNone/>
             </a:pPr>
             <a:r>
@@ -43972,7 +44037,7 @@
                 <a:ea typeface="Yu Gothic Medium" charset="-128"/>
                 <a:cs typeface="Yu Gothic Medium" pitchFamily="34" charset="-120"/>
               </a:rPr>
-              <a:t>借入余力</a:t>
+              <a:t>複数業種</a:t>
             </a:r>
             <a:endParaRPr lang="ja-JP" sz="1400" dirty="0"/>
           </a:p>
@@ -43980,14 +44045,250 @@
       </p:sp>
       <p:sp>
         <p:nvSpPr>
-          <p:cNvPr id="33" name="Shape 30"/>
-          <p:cNvSpPr/>
-          <p:nvPr/>
-        </p:nvSpPr>
-        <p:spPr>
-          <a:xfrm>
-            <a:off x="6231636" y="1783080"/>
-            <a:ext cx="5411419" cy="2148840"/>
+          <p:cNvPr id="39" name="Shape 36"/>
+          <p:cNvSpPr/>
+          <p:nvPr/>
+        </p:nvSpPr>
+        <p:spPr>
+          <a:xfrm>
+            <a:off x="9061704" y="2446020"/>
+            <a:ext cx="64008" cy="64008"/>
+          </a:xfrm>
+          <a:prstGeom prst="ellipse">
+            <a:avLst/>
+          </a:prstGeom>
+          <a:solidFill>
+            <a:srgbClr val="B08D57"/>
+          </a:solidFill>
+          <a:ln/>
+        </p:spPr>
+      </p:sp>
+      <p:sp>
+        <p:nvSpPr>
+          <p:cNvPr id="40" name="Text 37"/>
+          <p:cNvSpPr txBox="1"/>
+          <p:nvPr/>
+        </p:nvSpPr>
+        <p:spPr>
+          <a:xfrm>
+            <a:off x="9249156" y="2322576"/>
+            <a:ext cx="2331720" cy="310896"/>
+          </a:xfrm>
+          <a:prstGeom prst="rect">
+            <a:avLst/>
+          </a:prstGeom>
+          <a:noFill/>
+          <a:ln/>
+        </p:spPr>
+        <p:txBody>
+          <a:bodyPr wrap="square" lIns="0" tIns="0" rIns="0" bIns="0" rtlCol="0" anchor="ctr"/>
+          <a:lstStyle/>
+          <a:p>
+            <a:pPr algn="l" indent="0" marL="0">
+              <a:buNone/>
+            </a:pPr>
+            <a:r>
+              <a:rPr lang="ja-JP" altLang="en-US" sz="1400" dirty="0">
+                <a:solidFill>
+                  <a:srgbClr val="1B1F27"/>
+                </a:solidFill>
+                <a:latin typeface="Yu Gothic Medium" pitchFamily="34" charset="0"/>
+                <a:ea typeface="Yu Gothic Medium" charset="-128"/>
+                <a:cs typeface="Yu Gothic Medium" pitchFamily="34" charset="-120"/>
+              </a:rPr>
+              <a:t>M&amp;Aによる非連続成長</a:t>
+            </a:r>
+            <a:endParaRPr lang="ja-JP" sz="1400" dirty="0"/>
+          </a:p>
+        </p:txBody>
+      </p:sp>
+      <p:sp>
+        <p:nvSpPr>
+          <p:cNvPr id="41" name="Shape 38"/>
+          <p:cNvSpPr/>
+          <p:nvPr/>
+        </p:nvSpPr>
+        <p:spPr>
+          <a:xfrm>
+            <a:off x="6501384" y="2793492"/>
+            <a:ext cx="64008" cy="64008"/>
+          </a:xfrm>
+          <a:prstGeom prst="ellipse">
+            <a:avLst/>
+          </a:prstGeom>
+          <a:solidFill>
+            <a:srgbClr val="B08D57"/>
+          </a:solidFill>
+          <a:ln/>
+        </p:spPr>
+      </p:sp>
+      <p:sp>
+        <p:nvSpPr>
+          <p:cNvPr id="42" name="Text 39"/>
+          <p:cNvSpPr txBox="1"/>
+          <p:nvPr/>
+        </p:nvSpPr>
+        <p:spPr>
+          <a:xfrm>
+            <a:off x="6688836" y="2670048"/>
+            <a:ext cx="2331720" cy="310896"/>
+          </a:xfrm>
+          <a:prstGeom prst="rect">
+            <a:avLst/>
+          </a:prstGeom>
+          <a:noFill/>
+          <a:ln/>
+        </p:spPr>
+        <p:txBody>
+          <a:bodyPr wrap="square" lIns="0" tIns="0" rIns="0" bIns="0" rtlCol="0" anchor="ctr"/>
+          <a:lstStyle/>
+          <a:p>
+            <a:pPr algn="l" indent="0" marL="0">
+              <a:buNone/>
+            </a:pPr>
+            <a:r>
+              <a:rPr lang="ja-JP" altLang="en-US" sz="1400" dirty="0">
+                <a:solidFill>
+                  <a:srgbClr val="1B1F27"/>
+                </a:solidFill>
+                <a:latin typeface="Yu Gothic Medium" pitchFamily="34" charset="0"/>
+                <a:ea typeface="Yu Gothic Medium" charset="-128"/>
+                <a:cs typeface="Yu Gothic Medium" pitchFamily="34" charset="-120"/>
+              </a:rPr>
+              <a:t>複数事業</a:t>
+            </a:r>
+            <a:endParaRPr lang="ja-JP" sz="1400" dirty="0"/>
+          </a:p>
+        </p:txBody>
+      </p:sp>
+      <p:sp>
+        <p:nvSpPr>
+          <p:cNvPr id="43" name="Shape 40"/>
+          <p:cNvSpPr/>
+          <p:nvPr/>
+        </p:nvSpPr>
+        <p:spPr>
+          <a:xfrm>
+            <a:off x="9061704" y="2793492"/>
+            <a:ext cx="64008" cy="64008"/>
+          </a:xfrm>
+          <a:prstGeom prst="ellipse">
+            <a:avLst/>
+          </a:prstGeom>
+          <a:solidFill>
+            <a:srgbClr val="B08D57"/>
+          </a:solidFill>
+          <a:ln/>
+        </p:spPr>
+      </p:sp>
+      <p:sp>
+        <p:nvSpPr>
+          <p:cNvPr id="44" name="Text 41"/>
+          <p:cNvSpPr txBox="1"/>
+          <p:nvPr/>
+        </p:nvSpPr>
+        <p:spPr>
+          <a:xfrm>
+            <a:off x="9249156" y="2670048"/>
+            <a:ext cx="2331720" cy="310896"/>
+          </a:xfrm>
+          <a:prstGeom prst="rect">
+            <a:avLst/>
+          </a:prstGeom>
+          <a:noFill/>
+          <a:ln/>
+        </p:spPr>
+        <p:txBody>
+          <a:bodyPr wrap="square" lIns="0" tIns="0" rIns="0" bIns="0" rtlCol="0" anchor="ctr"/>
+          <a:lstStyle/>
+          <a:p>
+            <a:pPr algn="l" indent="0" marL="0">
+              <a:buNone/>
+            </a:pPr>
+            <a:r>
+              <a:rPr lang="ja-JP" altLang="en-US" sz="1400" dirty="0">
+                <a:solidFill>
+                  <a:srgbClr val="1B1F27"/>
+                </a:solidFill>
+                <a:latin typeface="Yu Gothic Medium" pitchFamily="34" charset="0"/>
+                <a:ea typeface="Yu Gothic Medium" charset="-128"/>
+                <a:cs typeface="Yu Gothic Medium" pitchFamily="34" charset="-120"/>
+              </a:rPr>
+              <a:t>新規事業創出能力</a:t>
+            </a:r>
+            <a:endParaRPr lang="ja-JP" sz="1400" dirty="0"/>
+          </a:p>
+        </p:txBody>
+      </p:sp>
+      <p:sp>
+        <p:nvSpPr>
+          <p:cNvPr id="45" name="Shape 42"/>
+          <p:cNvSpPr/>
+          <p:nvPr/>
+        </p:nvSpPr>
+        <p:spPr>
+          <a:xfrm>
+            <a:off x="6501384" y="3140964"/>
+            <a:ext cx="64008" cy="64008"/>
+          </a:xfrm>
+          <a:prstGeom prst="ellipse">
+            <a:avLst/>
+          </a:prstGeom>
+          <a:solidFill>
+            <a:srgbClr val="B08D57"/>
+          </a:solidFill>
+          <a:ln/>
+        </p:spPr>
+      </p:sp>
+      <p:sp>
+        <p:nvSpPr>
+          <p:cNvPr id="46" name="Text 43"/>
+          <p:cNvSpPr txBox="1"/>
+          <p:nvPr/>
+        </p:nvSpPr>
+        <p:spPr>
+          <a:xfrm>
+            <a:off x="6688836" y="3017520"/>
+            <a:ext cx="2331720" cy="310896"/>
+          </a:xfrm>
+          <a:prstGeom prst="rect">
+            <a:avLst/>
+          </a:prstGeom>
+          <a:noFill/>
+          <a:ln/>
+        </p:spPr>
+        <p:txBody>
+          <a:bodyPr wrap="square" lIns="0" tIns="0" rIns="0" bIns="0" rtlCol="0" anchor="ctr"/>
+          <a:lstStyle/>
+          <a:p>
+            <a:pPr algn="l" indent="0" marL="0">
+              <a:buNone/>
+            </a:pPr>
+            <a:r>
+              <a:rPr lang="ja-JP" altLang="en-US" sz="1400" dirty="0">
+                <a:solidFill>
+                  <a:srgbClr val="1B1F27"/>
+                </a:solidFill>
+                <a:latin typeface="Yu Gothic Medium" pitchFamily="34" charset="0"/>
+                <a:ea typeface="Yu Gothic Medium" charset="-128"/>
+                <a:cs typeface="Yu Gothic Medium" pitchFamily="34" charset="-120"/>
+              </a:rPr>
+              <a:t>収益源分散</a:t>
+            </a:r>
+            <a:endParaRPr lang="ja-JP" sz="1400" dirty="0"/>
+          </a:p>
+        </p:txBody>
+      </p:sp>
+      <p:sp>
+        <p:nvSpPr>
+          <p:cNvPr id="47" name="Shape 44"/>
+          <p:cNvSpPr/>
+          <p:nvPr/>
+        </p:nvSpPr>
+        <p:spPr>
+          <a:xfrm>
+            <a:off x="548640" y="3977640"/>
+            <a:ext cx="5411419" cy="2011680"/>
           </a:xfrm>
           <a:prstGeom prst="rect">
             <a:avLst/>
@@ -44000,13 +44301,13 @@
       </p:sp>
       <p:sp>
         <p:nvSpPr>
-          <p:cNvPr id="34" name="Text 31"/>
-          <p:cNvSpPr txBox="1"/>
-          <p:nvPr/>
-        </p:nvSpPr>
-        <p:spPr>
-          <a:xfrm>
-            <a:off x="6505956" y="1947672"/>
+          <p:cNvPr id="48" name="Text 45"/>
+          <p:cNvSpPr txBox="1"/>
+          <p:nvPr/>
+        </p:nvSpPr>
+        <p:spPr>
+          <a:xfrm>
+            <a:off x="822960" y="4105656"/>
             <a:ext cx="502920" cy="347472"/>
           </a:xfrm>
           <a:prstGeom prst="rect">
@@ -44031,7 +44332,7 @@
                 <a:ea typeface="Cambria" charset="-128"/>
                 <a:cs typeface="Cambria" pitchFamily="34" charset="-120"/>
               </a:rPr>
-              <a:t>02</a:t>
+              <a:t>03</a:t>
             </a:r>
             <a:endParaRPr lang="en-US" sz="1600" dirty="0"/>
           </a:p>
@@ -44039,13 +44340,13 @@
       </p:sp>
       <p:sp>
         <p:nvSpPr>
-          <p:cNvPr id="35" name="Text 32"/>
-          <p:cNvSpPr txBox="1"/>
-          <p:nvPr/>
-        </p:nvSpPr>
-        <p:spPr>
-          <a:xfrm>
-            <a:off x="7008876" y="1947672"/>
+          <p:cNvPr id="49" name="Text 46"/>
+          <p:cNvSpPr txBox="1"/>
+          <p:nvPr/>
+        </p:nvSpPr>
+        <p:spPr>
+          <a:xfrm>
+            <a:off x="1325880" y="4105656"/>
             <a:ext cx="2743200" cy="347472"/>
           </a:xfrm>
           <a:prstGeom prst="rect">
@@ -44070,7 +44371,7 @@
                 <a:ea typeface="Yu Gothic" charset="-128"/>
                 <a:cs typeface="Yu Gothic" pitchFamily="34" charset="-120"/>
               </a:rPr>
-              <a:t>事業ポートフォリオ</a:t>
+              <a:t>組織</a:t>
             </a:r>
             <a:endParaRPr lang="ja-JP" sz="1800" dirty="0"/>
           </a:p>
@@ -44078,13 +44379,13 @@
       </p:sp>
       <p:sp>
         <p:nvSpPr>
-          <p:cNvPr id="36" name="Text 33"/>
-          <p:cNvSpPr txBox="1"/>
-          <p:nvPr/>
-        </p:nvSpPr>
-        <p:spPr>
-          <a:xfrm>
-            <a:off x="9249156" y="1947672"/>
+          <p:cNvPr id="50" name="Text 47"/>
+          <p:cNvSpPr txBox="1"/>
+          <p:nvPr/>
+        </p:nvSpPr>
+        <p:spPr>
+          <a:xfrm>
+            <a:off x="3566160" y="4105656"/>
             <a:ext cx="2148840" cy="347472"/>
           </a:xfrm>
           <a:prstGeom prst="rect">
@@ -44109,7 +44410,7 @@
                 <a:ea typeface="Arial" charset="-128"/>
                 <a:cs typeface="Arial" pitchFamily="34" charset="-120"/>
               </a:rPr>
-              <a:t>PORTFOLIO</a:t>
+              <a:t>ORGANIZATION</a:t>
             </a:r>
             <a:endParaRPr lang="en-US" sz="1100" dirty="0"/>
           </a:p>
@@ -44117,13 +44418,13 @@
       </p:sp>
       <p:sp>
         <p:nvSpPr>
-          <p:cNvPr id="37" name="Shape 34"/>
-          <p:cNvSpPr/>
-          <p:nvPr/>
-        </p:nvSpPr>
-        <p:spPr>
-          <a:xfrm>
-            <a:off x="6501384" y="2564892"/>
+          <p:cNvPr id="51" name="Shape 48"/>
+          <p:cNvSpPr/>
+          <p:nvPr/>
+        </p:nvSpPr>
+        <p:spPr>
+          <a:xfrm>
+            <a:off x="818388" y="4686300"/>
             <a:ext cx="64008" cy="64008"/>
           </a:xfrm>
           <a:prstGeom prst="ellipse">
@@ -44137,13 +44438,13 @@
       </p:sp>
       <p:sp>
         <p:nvSpPr>
-          <p:cNvPr id="38" name="Text 35"/>
-          <p:cNvSpPr txBox="1"/>
-          <p:nvPr/>
-        </p:nvSpPr>
-        <p:spPr>
-          <a:xfrm>
-            <a:off x="6688836" y="2441448"/>
+          <p:cNvPr id="52" name="Text 49"/>
+          <p:cNvSpPr txBox="1"/>
+          <p:nvPr/>
+        </p:nvSpPr>
+        <p:spPr>
+          <a:xfrm>
+            <a:off x="1005840" y="4562856"/>
             <a:ext cx="2331720" cy="310896"/>
           </a:xfrm>
           <a:prstGeom prst="rect">
@@ -44168,7 +44469,7 @@
                 <a:ea typeface="Yu Gothic Medium" charset="-128"/>
                 <a:cs typeface="Yu Gothic Medium" pitchFamily="34" charset="-120"/>
               </a:rPr>
-              <a:t>複数業種</a:t>
+              <a:t>各子会社に経営責任者</a:t>
             </a:r>
             <a:endParaRPr lang="ja-JP" sz="1400" dirty="0"/>
           </a:p>
@@ -44176,13 +44477,13 @@
       </p:sp>
       <p:sp>
         <p:nvSpPr>
-          <p:cNvPr id="39" name="Shape 36"/>
-          <p:cNvSpPr/>
-          <p:nvPr/>
-        </p:nvSpPr>
-        <p:spPr>
-          <a:xfrm>
-            <a:off x="9061704" y="2564892"/>
+          <p:cNvPr id="53" name="Shape 50"/>
+          <p:cNvSpPr/>
+          <p:nvPr/>
+        </p:nvSpPr>
+        <p:spPr>
+          <a:xfrm>
+            <a:off x="3378708" y="4686300"/>
             <a:ext cx="64008" cy="64008"/>
           </a:xfrm>
           <a:prstGeom prst="ellipse">
@@ -44196,13 +44497,13 @@
       </p:sp>
       <p:sp>
         <p:nvSpPr>
-          <p:cNvPr id="40" name="Text 37"/>
-          <p:cNvSpPr txBox="1"/>
-          <p:nvPr/>
-        </p:nvSpPr>
-        <p:spPr>
-          <a:xfrm>
-            <a:off x="9249156" y="2441448"/>
+          <p:cNvPr id="54" name="Text 51"/>
+          <p:cNvSpPr txBox="1"/>
+          <p:nvPr/>
+        </p:nvSpPr>
+        <p:spPr>
+          <a:xfrm>
+            <a:off x="3566160" y="4562856"/>
             <a:ext cx="2331720" cy="310896"/>
           </a:xfrm>
           <a:prstGeom prst="rect">
@@ -44227,7 +44528,7 @@
                 <a:ea typeface="Yu Gothic Medium" charset="-128"/>
                 <a:cs typeface="Yu Gothic Medium" pitchFamily="34" charset="-120"/>
               </a:rPr>
-              <a:t>M&amp;Aによる非連続成長</a:t>
+              <a:t>創業者非依存</a:t>
             </a:r>
             <a:endParaRPr lang="ja-JP" sz="1400" dirty="0"/>
           </a:p>
@@ -44235,13 +44536,13 @@
       </p:sp>
       <p:sp>
         <p:nvSpPr>
-          <p:cNvPr id="41" name="Shape 38"/>
-          <p:cNvSpPr/>
-          <p:nvPr/>
-        </p:nvSpPr>
-        <p:spPr>
-          <a:xfrm>
-            <a:off x="6501384" y="2948940"/>
+          <p:cNvPr id="55" name="Shape 52"/>
+          <p:cNvSpPr/>
+          <p:nvPr/>
+        </p:nvSpPr>
+        <p:spPr>
+          <a:xfrm>
+            <a:off x="818388" y="5033772"/>
             <a:ext cx="64008" cy="64008"/>
           </a:xfrm>
           <a:prstGeom prst="ellipse">
@@ -44255,13 +44556,13 @@
       </p:sp>
       <p:sp>
         <p:nvSpPr>
-          <p:cNvPr id="42" name="Text 39"/>
-          <p:cNvSpPr txBox="1"/>
-          <p:nvPr/>
-        </p:nvSpPr>
-        <p:spPr>
-          <a:xfrm>
-            <a:off x="6688836" y="2825496"/>
+          <p:cNvPr id="56" name="Text 53"/>
+          <p:cNvSpPr txBox="1"/>
+          <p:nvPr/>
+        </p:nvSpPr>
+        <p:spPr>
+          <a:xfrm>
+            <a:off x="1005840" y="4910328"/>
             <a:ext cx="2331720" cy="310896"/>
           </a:xfrm>
           <a:prstGeom prst="rect">
@@ -44286,7 +44587,7 @@
                 <a:ea typeface="Yu Gothic Medium" charset="-128"/>
                 <a:cs typeface="Yu Gothic Medium" pitchFamily="34" charset="-120"/>
               </a:rPr>
-              <a:t>複数事業</a:t>
+              <a:t>親会社経営陣</a:t>
             </a:r>
             <a:endParaRPr lang="ja-JP" sz="1400" dirty="0"/>
           </a:p>
@@ -44294,13 +44595,13 @@
       </p:sp>
       <p:sp>
         <p:nvSpPr>
-          <p:cNvPr id="43" name="Shape 40"/>
-          <p:cNvSpPr/>
-          <p:nvPr/>
-        </p:nvSpPr>
-        <p:spPr>
-          <a:xfrm>
-            <a:off x="9061704" y="2948940"/>
+          <p:cNvPr id="57" name="Shape 54"/>
+          <p:cNvSpPr/>
+          <p:nvPr/>
+        </p:nvSpPr>
+        <p:spPr>
+          <a:xfrm>
+            <a:off x="3378708" y="5033772"/>
             <a:ext cx="64008" cy="64008"/>
           </a:xfrm>
           <a:prstGeom prst="ellipse">
@@ -44314,13 +44615,13 @@
       </p:sp>
       <p:sp>
         <p:nvSpPr>
-          <p:cNvPr id="44" name="Text 41"/>
-          <p:cNvSpPr txBox="1"/>
-          <p:nvPr/>
-        </p:nvSpPr>
-        <p:spPr>
-          <a:xfrm>
-            <a:off x="9249156" y="2825496"/>
+          <p:cNvPr id="58" name="Text 55"/>
+          <p:cNvSpPr txBox="1"/>
+          <p:nvPr/>
+        </p:nvSpPr>
+        <p:spPr>
+          <a:xfrm>
+            <a:off x="3566160" y="4910328"/>
             <a:ext cx="2331720" cy="310896"/>
           </a:xfrm>
           <a:prstGeom prst="rect">
@@ -44345,7 +44646,7 @@
                 <a:ea typeface="Yu Gothic Medium" charset="-128"/>
                 <a:cs typeface="Yu Gothic Medium" pitchFamily="34" charset="-120"/>
               </a:rPr>
-              <a:t>新規事業創出能力</a:t>
+              <a:t>共通管理機能</a:t>
             </a:r>
             <a:endParaRPr lang="ja-JP" sz="1400" dirty="0"/>
           </a:p>
@@ -44353,13 +44654,13 @@
       </p:sp>
       <p:sp>
         <p:nvSpPr>
-          <p:cNvPr id="45" name="Shape 42"/>
-          <p:cNvSpPr/>
-          <p:nvPr/>
-        </p:nvSpPr>
-        <p:spPr>
-          <a:xfrm>
-            <a:off x="6501384" y="3332988"/>
+          <p:cNvPr id="59" name="Shape 56"/>
+          <p:cNvSpPr/>
+          <p:nvPr/>
+        </p:nvSpPr>
+        <p:spPr>
+          <a:xfrm>
+            <a:off x="818388" y="5381244"/>
             <a:ext cx="64008" cy="64008"/>
           </a:xfrm>
           <a:prstGeom prst="ellipse">
@@ -44373,13 +44674,13 @@
       </p:sp>
       <p:sp>
         <p:nvSpPr>
-          <p:cNvPr id="46" name="Text 43"/>
-          <p:cNvSpPr txBox="1"/>
-          <p:nvPr/>
-        </p:nvSpPr>
-        <p:spPr>
-          <a:xfrm>
-            <a:off x="6688836" y="3209544"/>
+          <p:cNvPr id="60" name="Text 57"/>
+          <p:cNvSpPr txBox="1"/>
+          <p:nvPr/>
+        </p:nvSpPr>
+        <p:spPr>
+          <a:xfrm>
+            <a:off x="1005840" y="5257800"/>
             <a:ext cx="2331720" cy="310896"/>
           </a:xfrm>
           <a:prstGeom prst="rect">
@@ -44404,7 +44705,7 @@
                 <a:ea typeface="Yu Gothic Medium" charset="-128"/>
                 <a:cs typeface="Yu Gothic Medium" pitchFamily="34" charset="-120"/>
               </a:rPr>
-              <a:t>収益源分散</a:t>
+              <a:t>経営人材育成</a:t>
             </a:r>
             <a:endParaRPr lang="ja-JP" sz="1400" dirty="0"/>
           </a:p>
@@ -44412,14 +44713,14 @@
       </p:sp>
       <p:sp>
         <p:nvSpPr>
-          <p:cNvPr id="47" name="Shape 44"/>
-          <p:cNvSpPr/>
-          <p:nvPr/>
-        </p:nvSpPr>
-        <p:spPr>
-          <a:xfrm>
-            <a:off x="548640" y="4160520"/>
-            <a:ext cx="5411419" cy="1828800"/>
+          <p:cNvPr id="61" name="Shape 58"/>
+          <p:cNvSpPr/>
+          <p:nvPr/>
+        </p:nvSpPr>
+        <p:spPr>
+          <a:xfrm>
+            <a:off x="6231636" y="3977640"/>
+            <a:ext cx="5411419" cy="2011680"/>
           </a:xfrm>
           <a:prstGeom prst="rect">
             <a:avLst/>
@@ -44432,13 +44733,13 @@
       </p:sp>
       <p:sp>
         <p:nvSpPr>
-          <p:cNvPr id="48" name="Text 45"/>
-          <p:cNvSpPr txBox="1"/>
-          <p:nvPr/>
-        </p:nvSpPr>
-        <p:spPr>
-          <a:xfrm>
-            <a:off x="822960" y="4325112"/>
+          <p:cNvPr id="62" name="Text 59"/>
+          <p:cNvSpPr txBox="1"/>
+          <p:nvPr/>
+        </p:nvSpPr>
+        <p:spPr>
+          <a:xfrm>
+            <a:off x="6505956" y="4105656"/>
             <a:ext cx="502920" cy="347472"/>
           </a:xfrm>
           <a:prstGeom prst="rect">
@@ -44463,7 +44764,7 @@
                 <a:ea typeface="Cambria" charset="-128"/>
                 <a:cs typeface="Cambria" pitchFamily="34" charset="-120"/>
               </a:rPr>
-              <a:t>03</a:t>
+              <a:t>04</a:t>
             </a:r>
             <a:endParaRPr lang="en-US" sz="1600" dirty="0"/>
           </a:p>
@@ -44471,13 +44772,13 @@
       </p:sp>
       <p:sp>
         <p:nvSpPr>
-          <p:cNvPr id="49" name="Text 46"/>
-          <p:cNvSpPr txBox="1"/>
-          <p:nvPr/>
-        </p:nvSpPr>
-        <p:spPr>
-          <a:xfrm>
-            <a:off x="1325880" y="4325112"/>
+          <p:cNvPr id="63" name="Text 60"/>
+          <p:cNvSpPr txBox="1"/>
+          <p:nvPr/>
+        </p:nvSpPr>
+        <p:spPr>
+          <a:xfrm>
+            <a:off x="7008876" y="4105656"/>
             <a:ext cx="2743200" cy="347472"/>
           </a:xfrm>
           <a:prstGeom prst="rect">
@@ -44502,7 +44803,7 @@
                 <a:ea typeface="Yu Gothic" charset="-128"/>
                 <a:cs typeface="Yu Gothic" pitchFamily="34" charset="-120"/>
               </a:rPr>
-              <a:t>組織</a:t>
+              <a:t>経営管理</a:t>
             </a:r>
             <a:endParaRPr lang="ja-JP" sz="1800" dirty="0"/>
           </a:p>
@@ -44510,13 +44811,13 @@
       </p:sp>
       <p:sp>
         <p:nvSpPr>
-          <p:cNvPr id="50" name="Text 47"/>
-          <p:cNvSpPr txBox="1"/>
-          <p:nvPr/>
-        </p:nvSpPr>
-        <p:spPr>
-          <a:xfrm>
-            <a:off x="3566160" y="4325112"/>
+          <p:cNvPr id="64" name="Text 61"/>
+          <p:cNvSpPr txBox="1"/>
+          <p:nvPr/>
+        </p:nvSpPr>
+        <p:spPr>
+          <a:xfrm>
+            <a:off x="9249156" y="4105656"/>
             <a:ext cx="2148840" cy="347472"/>
           </a:xfrm>
           <a:prstGeom prst="rect">
@@ -44541,7 +44842,7 @@
                 <a:ea typeface="Arial" charset="-128"/>
                 <a:cs typeface="Arial" pitchFamily="34" charset="-120"/>
               </a:rPr>
-              <a:t>ORGANIZATION</a:t>
+              <a:t>MANAGEMENT</a:t>
             </a:r>
             <a:endParaRPr lang="en-US" sz="1100" dirty="0"/>
           </a:p>
@@ -44549,13 +44850,13 @@
       </p:sp>
       <p:sp>
         <p:nvSpPr>
-          <p:cNvPr id="51" name="Shape 48"/>
-          <p:cNvSpPr/>
-          <p:nvPr/>
-        </p:nvSpPr>
-        <p:spPr>
-          <a:xfrm>
-            <a:off x="818388" y="4942332"/>
+          <p:cNvPr id="65" name="Shape 62"/>
+          <p:cNvSpPr/>
+          <p:nvPr/>
+        </p:nvSpPr>
+        <p:spPr>
+          <a:xfrm>
+            <a:off x="6501384" y="4686300"/>
             <a:ext cx="64008" cy="64008"/>
           </a:xfrm>
           <a:prstGeom prst="ellipse">
@@ -44569,13 +44870,13 @@
       </p:sp>
       <p:sp>
         <p:nvSpPr>
-          <p:cNvPr id="52" name="Text 49"/>
-          <p:cNvSpPr txBox="1"/>
-          <p:nvPr/>
-        </p:nvSpPr>
-        <p:spPr>
-          <a:xfrm>
-            <a:off x="1005840" y="4818888"/>
+          <p:cNvPr id="66" name="Text 63"/>
+          <p:cNvSpPr txBox="1"/>
+          <p:nvPr/>
+        </p:nvSpPr>
+        <p:spPr>
+          <a:xfrm>
+            <a:off x="6688836" y="4562856"/>
             <a:ext cx="2331720" cy="310896"/>
           </a:xfrm>
           <a:prstGeom prst="rect">
@@ -44600,7 +44901,7 @@
                 <a:ea typeface="Yu Gothic Medium" charset="-128"/>
                 <a:cs typeface="Yu Gothic Medium" pitchFamily="34" charset="-120"/>
               </a:rPr>
-              <a:t>各子会社に経営責任者</a:t>
+              <a:t>連結管理</a:t>
             </a:r>
             <a:endParaRPr lang="ja-JP" sz="1400" dirty="0"/>
           </a:p>
@@ -44608,13 +44909,13 @@
       </p:sp>
       <p:sp>
         <p:nvSpPr>
-          <p:cNvPr id="53" name="Shape 50"/>
-          <p:cNvSpPr/>
-          <p:nvPr/>
-        </p:nvSpPr>
-        <p:spPr>
-          <a:xfrm>
-            <a:off x="3378708" y="4942332"/>
+          <p:cNvPr id="67" name="Shape 64"/>
+          <p:cNvSpPr/>
+          <p:nvPr/>
+        </p:nvSpPr>
+        <p:spPr>
+          <a:xfrm>
+            <a:off x="9061704" y="4686300"/>
             <a:ext cx="64008" cy="64008"/>
           </a:xfrm>
           <a:prstGeom prst="ellipse">
@@ -44628,13 +44929,13 @@
       </p:sp>
       <p:sp>
         <p:nvSpPr>
-          <p:cNvPr id="54" name="Text 51"/>
-          <p:cNvSpPr txBox="1"/>
-          <p:nvPr/>
-        </p:nvSpPr>
-        <p:spPr>
-          <a:xfrm>
-            <a:off x="3566160" y="4818888"/>
+          <p:cNvPr id="68" name="Text 65"/>
+          <p:cNvSpPr txBox="1"/>
+          <p:nvPr/>
+        </p:nvSpPr>
+        <p:spPr>
+          <a:xfrm>
+            <a:off x="9249156" y="4562856"/>
             <a:ext cx="2331720" cy="310896"/>
           </a:xfrm>
           <a:prstGeom prst="rect">
@@ -44659,7 +44960,7 @@
                 <a:ea typeface="Yu Gothic Medium" charset="-128"/>
                 <a:cs typeface="Yu Gothic Medium" pitchFamily="34" charset="-120"/>
               </a:rPr>
-              <a:t>創業者非依存</a:t>
+              <a:t>資本配分</a:t>
             </a:r>
             <a:endParaRPr lang="ja-JP" sz="1400" dirty="0"/>
           </a:p>
@@ -44667,13 +44968,13 @@
       </p:sp>
       <p:sp>
         <p:nvSpPr>
-          <p:cNvPr id="55" name="Shape 52"/>
-          <p:cNvSpPr/>
-          <p:nvPr/>
-        </p:nvSpPr>
-        <p:spPr>
-          <a:xfrm>
-            <a:off x="818388" y="5326380"/>
+          <p:cNvPr id="69" name="Shape 66"/>
+          <p:cNvSpPr/>
+          <p:nvPr/>
+        </p:nvSpPr>
+        <p:spPr>
+          <a:xfrm>
+            <a:off x="6501384" y="5033772"/>
             <a:ext cx="64008" cy="64008"/>
           </a:xfrm>
           <a:prstGeom prst="ellipse">
@@ -44687,13 +44988,13 @@
       </p:sp>
       <p:sp>
         <p:nvSpPr>
-          <p:cNvPr id="56" name="Text 53"/>
-          <p:cNvSpPr txBox="1"/>
-          <p:nvPr/>
-        </p:nvSpPr>
-        <p:spPr>
-          <a:xfrm>
-            <a:off x="1005840" y="5202936"/>
+          <p:cNvPr id="70" name="Text 67"/>
+          <p:cNvSpPr txBox="1"/>
+          <p:nvPr/>
+        </p:nvSpPr>
+        <p:spPr>
+          <a:xfrm>
+            <a:off x="6688836" y="4910328"/>
             <a:ext cx="2331720" cy="310896"/>
           </a:xfrm>
           <a:prstGeom prst="rect">
@@ -44718,7 +45019,7 @@
                 <a:ea typeface="Yu Gothic Medium" charset="-128"/>
                 <a:cs typeface="Yu Gothic Medium" pitchFamily="34" charset="-120"/>
               </a:rPr>
-              <a:t>親会社経営陣</a:t>
+              <a:t>予実管理</a:t>
             </a:r>
             <a:endParaRPr lang="ja-JP" sz="1400" dirty="0"/>
           </a:p>
@@ -44726,13 +45027,13 @@
       </p:sp>
       <p:sp>
         <p:nvSpPr>
-          <p:cNvPr id="57" name="Shape 54"/>
-          <p:cNvSpPr/>
-          <p:nvPr/>
-        </p:nvSpPr>
-        <p:spPr>
-          <a:xfrm>
-            <a:off x="3378708" y="5326380"/>
+          <p:cNvPr id="71" name="Shape 68"/>
+          <p:cNvSpPr/>
+          <p:nvPr/>
+        </p:nvSpPr>
+        <p:spPr>
+          <a:xfrm>
+            <a:off x="9061704" y="5033772"/>
             <a:ext cx="64008" cy="64008"/>
           </a:xfrm>
           <a:prstGeom prst="ellipse">
@@ -44746,13 +45047,13 @@
       </p:sp>
       <p:sp>
         <p:nvSpPr>
-          <p:cNvPr id="58" name="Text 55"/>
-          <p:cNvSpPr txBox="1"/>
-          <p:nvPr/>
-        </p:nvSpPr>
-        <p:spPr>
-          <a:xfrm>
-            <a:off x="3566160" y="5202936"/>
+          <p:cNvPr id="72" name="Text 69"/>
+          <p:cNvSpPr txBox="1"/>
+          <p:nvPr/>
+        </p:nvSpPr>
+        <p:spPr>
+          <a:xfrm>
+            <a:off x="9249156" y="4910328"/>
             <a:ext cx="2331720" cy="310896"/>
           </a:xfrm>
           <a:prstGeom prst="rect">
@@ -44777,7 +45078,7 @@
                 <a:ea typeface="Yu Gothic Medium" charset="-128"/>
                 <a:cs typeface="Yu Gothic Medium" pitchFamily="34" charset="-120"/>
               </a:rPr>
-              <a:t>共通管理機能</a:t>
+              <a:t>PMI</a:t>
             </a:r>
             <a:endParaRPr lang="ja-JP" sz="1400" dirty="0"/>
           </a:p>
@@ -44785,13 +45086,13 @@
       </p:sp>
       <p:sp>
         <p:nvSpPr>
-          <p:cNvPr id="59" name="Shape 56"/>
-          <p:cNvSpPr/>
-          <p:nvPr/>
-        </p:nvSpPr>
-        <p:spPr>
-          <a:xfrm>
-            <a:off x="818388" y="5710428"/>
+          <p:cNvPr id="73" name="Shape 70"/>
+          <p:cNvSpPr/>
+          <p:nvPr/>
+        </p:nvSpPr>
+        <p:spPr>
+          <a:xfrm>
+            <a:off x="6501384" y="5381244"/>
             <a:ext cx="64008" cy="64008"/>
           </a:xfrm>
           <a:prstGeom prst="ellipse">
@@ -44805,13 +45106,13 @@
       </p:sp>
       <p:sp>
         <p:nvSpPr>
-          <p:cNvPr id="60" name="Text 57"/>
-          <p:cNvSpPr txBox="1"/>
-          <p:nvPr/>
-        </p:nvSpPr>
-        <p:spPr>
-          <a:xfrm>
-            <a:off x="1005840" y="5586984"/>
+          <p:cNvPr id="74" name="Text 71"/>
+          <p:cNvSpPr txBox="1"/>
+          <p:nvPr/>
+        </p:nvSpPr>
+        <p:spPr>
+          <a:xfrm>
+            <a:off x="6688836" y="5257800"/>
             <a:ext cx="2331720" cy="310896"/>
           </a:xfrm>
           <a:prstGeom prst="rect">
@@ -44836,7 +45137,7 @@
                 <a:ea typeface="Yu Gothic Medium" charset="-128"/>
                 <a:cs typeface="Yu Gothic Medium" pitchFamily="34" charset="-120"/>
               </a:rPr>
-              <a:t>経営人材育成</a:t>
+              <a:t>キャッシュ管理</a:t>
             </a:r>
             <a:endParaRPr lang="ja-JP" sz="1400" dirty="0"/>
           </a:p>
@@ -44844,150 +45145,13 @@
       </p:sp>
       <p:sp>
         <p:nvSpPr>
-          <p:cNvPr id="61" name="Shape 58"/>
-          <p:cNvSpPr/>
-          <p:nvPr/>
-        </p:nvSpPr>
-        <p:spPr>
-          <a:xfrm>
-            <a:off x="6231636" y="4160520"/>
-            <a:ext cx="5411419" cy="1828800"/>
-          </a:xfrm>
-          <a:prstGeom prst="rect">
-            <a:avLst/>
-          </a:prstGeom>
-          <a:solidFill>
-            <a:srgbClr val="F3F5F8"/>
-          </a:solidFill>
-          <a:ln/>
-        </p:spPr>
-      </p:sp>
-      <p:sp>
-        <p:nvSpPr>
-          <p:cNvPr id="62" name="Text 59"/>
-          <p:cNvSpPr txBox="1"/>
-          <p:nvPr/>
-        </p:nvSpPr>
-        <p:spPr>
-          <a:xfrm>
-            <a:off x="6505956" y="4325112"/>
-            <a:ext cx="502920" cy="347472"/>
-          </a:xfrm>
-          <a:prstGeom prst="rect">
-            <a:avLst/>
-          </a:prstGeom>
-          <a:noFill/>
-          <a:ln/>
-        </p:spPr>
-        <p:txBody>
-          <a:bodyPr wrap="square" lIns="0" tIns="0" rIns="0" bIns="0" rtlCol="0" anchor="ctr"/>
-          <a:lstStyle/>
-          <a:p>
-            <a:pPr algn="l" indent="0" marL="0">
-              <a:buNone/>
-            </a:pPr>
-            <a:r>
-              <a:rPr lang="en-US" altLang="en-US" sz="1600" b="1" dirty="0">
-                <a:solidFill>
-                  <a:srgbClr val="8C6D3F"/>
-                </a:solidFill>
-                <a:latin typeface="Cambria" pitchFamily="34" charset="0"/>
-                <a:ea typeface="Cambria" charset="-128"/>
-                <a:cs typeface="Cambria" pitchFamily="34" charset="-120"/>
-              </a:rPr>
-              <a:t>04</a:t>
-            </a:r>
-            <a:endParaRPr lang="en-US" sz="1600" dirty="0"/>
-          </a:p>
-        </p:txBody>
-      </p:sp>
-      <p:sp>
-        <p:nvSpPr>
-          <p:cNvPr id="63" name="Text 60"/>
-          <p:cNvSpPr txBox="1"/>
-          <p:nvPr/>
-        </p:nvSpPr>
-        <p:spPr>
-          <a:xfrm>
-            <a:off x="7008876" y="4325112"/>
-            <a:ext cx="2743200" cy="347472"/>
-          </a:xfrm>
-          <a:prstGeom prst="rect">
-            <a:avLst/>
-          </a:prstGeom>
-          <a:noFill/>
-          <a:ln/>
-        </p:spPr>
-        <p:txBody>
-          <a:bodyPr wrap="square" lIns="0" tIns="0" rIns="0" bIns="0" rtlCol="0" anchor="ctr"/>
-          <a:lstStyle/>
-          <a:p>
-            <a:pPr algn="l" indent="0" marL="0">
-              <a:buNone/>
-            </a:pPr>
-            <a:r>
-              <a:rPr lang="ja-JP" altLang="en-US" sz="1800" b="1" dirty="0">
-                <a:solidFill>
-                  <a:srgbClr val="14284B"/>
-                </a:solidFill>
-                <a:latin typeface="Yu Gothic" pitchFamily="34" charset="0"/>
-                <a:ea typeface="Yu Gothic" charset="-128"/>
-                <a:cs typeface="Yu Gothic" pitchFamily="34" charset="-120"/>
-              </a:rPr>
-              <a:t>経営管理</a:t>
-            </a:r>
-            <a:endParaRPr lang="ja-JP" sz="1800" dirty="0"/>
-          </a:p>
-        </p:txBody>
-      </p:sp>
-      <p:sp>
-        <p:nvSpPr>
-          <p:cNvPr id="64" name="Text 61"/>
-          <p:cNvSpPr txBox="1"/>
-          <p:nvPr/>
-        </p:nvSpPr>
-        <p:spPr>
-          <a:xfrm>
-            <a:off x="9249156" y="4325112"/>
-            <a:ext cx="2148840" cy="347472"/>
-          </a:xfrm>
-          <a:prstGeom prst="rect">
-            <a:avLst/>
-          </a:prstGeom>
-          <a:noFill/>
-          <a:ln/>
-        </p:spPr>
-        <p:txBody>
-          <a:bodyPr wrap="square" lIns="0" tIns="0" rIns="0" bIns="0" rtlCol="0" anchor="ctr"/>
-          <a:lstStyle/>
-          <a:p>
-            <a:pPr algn="r" indent="0" marL="0">
-              <a:buNone/>
-            </a:pPr>
-            <a:r>
-              <a:rPr lang="en-US" altLang="en-US" sz="1100" b="1" spc="200" kern="0" dirty="0">
-                <a:solidFill>
-                  <a:srgbClr val="8C6D3F"/>
-                </a:solidFill>
-                <a:latin typeface="Arial" pitchFamily="34" charset="0"/>
-                <a:ea typeface="Arial" charset="-128"/>
-                <a:cs typeface="Arial" pitchFamily="34" charset="-120"/>
-              </a:rPr>
-              <a:t>MANAGEMENT</a:t>
-            </a:r>
-            <a:endParaRPr lang="en-US" sz="1100" dirty="0"/>
-          </a:p>
-        </p:txBody>
-      </p:sp>
-      <p:sp>
-        <p:nvSpPr>
-          <p:cNvPr id="65" name="Shape 62"/>
-          <p:cNvSpPr/>
-          <p:nvPr/>
-        </p:nvSpPr>
-        <p:spPr>
-          <a:xfrm>
-            <a:off x="6501384" y="4942332"/>
+          <p:cNvPr id="75" name="Shape 72"/>
+          <p:cNvSpPr/>
+          <p:nvPr/>
+        </p:nvSpPr>
+        <p:spPr>
+          <a:xfrm>
+            <a:off x="9061704" y="5381244"/>
             <a:ext cx="64008" cy="64008"/>
           </a:xfrm>
           <a:prstGeom prst="ellipse">
@@ -45001,308 +45165,13 @@
       </p:sp>
       <p:sp>
         <p:nvSpPr>
-          <p:cNvPr id="66" name="Text 63"/>
-          <p:cNvSpPr txBox="1"/>
-          <p:nvPr/>
-        </p:nvSpPr>
-        <p:spPr>
-          <a:xfrm>
-            <a:off x="6688836" y="4818888"/>
-            <a:ext cx="2331720" cy="310896"/>
-          </a:xfrm>
-          <a:prstGeom prst="rect">
-            <a:avLst/>
-          </a:prstGeom>
-          <a:noFill/>
-          <a:ln/>
-        </p:spPr>
-        <p:txBody>
-          <a:bodyPr wrap="square" lIns="0" tIns="0" rIns="0" bIns="0" rtlCol="0" anchor="ctr"/>
-          <a:lstStyle/>
-          <a:p>
-            <a:pPr algn="l" indent="0" marL="0">
-              <a:buNone/>
-            </a:pPr>
-            <a:r>
-              <a:rPr lang="ja-JP" altLang="en-US" sz="1400" dirty="0">
-                <a:solidFill>
-                  <a:srgbClr val="1B1F27"/>
-                </a:solidFill>
-                <a:latin typeface="Yu Gothic Medium" pitchFamily="34" charset="0"/>
-                <a:ea typeface="Yu Gothic Medium" charset="-128"/>
-                <a:cs typeface="Yu Gothic Medium" pitchFamily="34" charset="-120"/>
-              </a:rPr>
-              <a:t>連結管理</a:t>
-            </a:r>
-            <a:endParaRPr lang="ja-JP" sz="1400" dirty="0"/>
-          </a:p>
-        </p:txBody>
-      </p:sp>
-      <p:sp>
-        <p:nvSpPr>
-          <p:cNvPr id="67" name="Shape 64"/>
-          <p:cNvSpPr/>
-          <p:nvPr/>
-        </p:nvSpPr>
-        <p:spPr>
-          <a:xfrm>
-            <a:off x="9061704" y="4942332"/>
-            <a:ext cx="64008" cy="64008"/>
-          </a:xfrm>
-          <a:prstGeom prst="ellipse">
-            <a:avLst/>
-          </a:prstGeom>
-          <a:solidFill>
-            <a:srgbClr val="B08D57"/>
-          </a:solidFill>
-          <a:ln/>
-        </p:spPr>
-      </p:sp>
-      <p:sp>
-        <p:nvSpPr>
-          <p:cNvPr id="68" name="Text 65"/>
-          <p:cNvSpPr txBox="1"/>
-          <p:nvPr/>
-        </p:nvSpPr>
-        <p:spPr>
-          <a:xfrm>
-            <a:off x="9249156" y="4818888"/>
-            <a:ext cx="2331720" cy="310896"/>
-          </a:xfrm>
-          <a:prstGeom prst="rect">
-            <a:avLst/>
-          </a:prstGeom>
-          <a:noFill/>
-          <a:ln/>
-        </p:spPr>
-        <p:txBody>
-          <a:bodyPr wrap="square" lIns="0" tIns="0" rIns="0" bIns="0" rtlCol="0" anchor="ctr"/>
-          <a:lstStyle/>
-          <a:p>
-            <a:pPr algn="l" indent="0" marL="0">
-              <a:buNone/>
-            </a:pPr>
-            <a:r>
-              <a:rPr lang="ja-JP" altLang="en-US" sz="1400" dirty="0">
-                <a:solidFill>
-                  <a:srgbClr val="1B1F27"/>
-                </a:solidFill>
-                <a:latin typeface="Yu Gothic Medium" pitchFamily="34" charset="0"/>
-                <a:ea typeface="Yu Gothic Medium" charset="-128"/>
-                <a:cs typeface="Yu Gothic Medium" pitchFamily="34" charset="-120"/>
-              </a:rPr>
-              <a:t>資本配分</a:t>
-            </a:r>
-            <a:endParaRPr lang="ja-JP" sz="1400" dirty="0"/>
-          </a:p>
-        </p:txBody>
-      </p:sp>
-      <p:sp>
-        <p:nvSpPr>
-          <p:cNvPr id="69" name="Shape 66"/>
-          <p:cNvSpPr/>
-          <p:nvPr/>
-        </p:nvSpPr>
-        <p:spPr>
-          <a:xfrm>
-            <a:off x="6501384" y="5326380"/>
-            <a:ext cx="64008" cy="64008"/>
-          </a:xfrm>
-          <a:prstGeom prst="ellipse">
-            <a:avLst/>
-          </a:prstGeom>
-          <a:solidFill>
-            <a:srgbClr val="B08D57"/>
-          </a:solidFill>
-          <a:ln/>
-        </p:spPr>
-      </p:sp>
-      <p:sp>
-        <p:nvSpPr>
-          <p:cNvPr id="70" name="Text 67"/>
-          <p:cNvSpPr txBox="1"/>
-          <p:nvPr/>
-        </p:nvSpPr>
-        <p:spPr>
-          <a:xfrm>
-            <a:off x="6688836" y="5202936"/>
-            <a:ext cx="2331720" cy="310896"/>
-          </a:xfrm>
-          <a:prstGeom prst="rect">
-            <a:avLst/>
-          </a:prstGeom>
-          <a:noFill/>
-          <a:ln/>
-        </p:spPr>
-        <p:txBody>
-          <a:bodyPr wrap="square" lIns="0" tIns="0" rIns="0" bIns="0" rtlCol="0" anchor="ctr"/>
-          <a:lstStyle/>
-          <a:p>
-            <a:pPr algn="l" indent="0" marL="0">
-              <a:buNone/>
-            </a:pPr>
-            <a:r>
-              <a:rPr lang="ja-JP" altLang="en-US" sz="1400" dirty="0">
-                <a:solidFill>
-                  <a:srgbClr val="1B1F27"/>
-                </a:solidFill>
-                <a:latin typeface="Yu Gothic Medium" pitchFamily="34" charset="0"/>
-                <a:ea typeface="Yu Gothic Medium" charset="-128"/>
-                <a:cs typeface="Yu Gothic Medium" pitchFamily="34" charset="-120"/>
-              </a:rPr>
-              <a:t>予実管理</a:t>
-            </a:r>
-            <a:endParaRPr lang="ja-JP" sz="1400" dirty="0"/>
-          </a:p>
-        </p:txBody>
-      </p:sp>
-      <p:sp>
-        <p:nvSpPr>
-          <p:cNvPr id="71" name="Shape 68"/>
-          <p:cNvSpPr/>
-          <p:nvPr/>
-        </p:nvSpPr>
-        <p:spPr>
-          <a:xfrm>
-            <a:off x="9061704" y="5326380"/>
-            <a:ext cx="64008" cy="64008"/>
-          </a:xfrm>
-          <a:prstGeom prst="ellipse">
-            <a:avLst/>
-          </a:prstGeom>
-          <a:solidFill>
-            <a:srgbClr val="B08D57"/>
-          </a:solidFill>
-          <a:ln/>
-        </p:spPr>
-      </p:sp>
-      <p:sp>
-        <p:nvSpPr>
-          <p:cNvPr id="72" name="Text 69"/>
-          <p:cNvSpPr txBox="1"/>
-          <p:nvPr/>
-        </p:nvSpPr>
-        <p:spPr>
-          <a:xfrm>
-            <a:off x="9249156" y="5202936"/>
-            <a:ext cx="2331720" cy="310896"/>
-          </a:xfrm>
-          <a:prstGeom prst="rect">
-            <a:avLst/>
-          </a:prstGeom>
-          <a:noFill/>
-          <a:ln/>
-        </p:spPr>
-        <p:txBody>
-          <a:bodyPr wrap="square" lIns="0" tIns="0" rIns="0" bIns="0" rtlCol="0" anchor="ctr"/>
-          <a:lstStyle/>
-          <a:p>
-            <a:pPr algn="l" indent="0" marL="0">
-              <a:buNone/>
-            </a:pPr>
-            <a:r>
-              <a:rPr lang="ja-JP" altLang="en-US" sz="1400" dirty="0">
-                <a:solidFill>
-                  <a:srgbClr val="1B1F27"/>
-                </a:solidFill>
-                <a:latin typeface="Yu Gothic Medium" pitchFamily="34" charset="0"/>
-                <a:ea typeface="Yu Gothic Medium" charset="-128"/>
-                <a:cs typeface="Yu Gothic Medium" pitchFamily="34" charset="-120"/>
-              </a:rPr>
-              <a:t>PMI</a:t>
-            </a:r>
-            <a:endParaRPr lang="ja-JP" sz="1400" dirty="0"/>
-          </a:p>
-        </p:txBody>
-      </p:sp>
-      <p:sp>
-        <p:nvSpPr>
-          <p:cNvPr id="73" name="Shape 70"/>
-          <p:cNvSpPr/>
-          <p:nvPr/>
-        </p:nvSpPr>
-        <p:spPr>
-          <a:xfrm>
-            <a:off x="6501384" y="5710428"/>
-            <a:ext cx="64008" cy="64008"/>
-          </a:xfrm>
-          <a:prstGeom prst="ellipse">
-            <a:avLst/>
-          </a:prstGeom>
-          <a:solidFill>
-            <a:srgbClr val="B08D57"/>
-          </a:solidFill>
-          <a:ln/>
-        </p:spPr>
-      </p:sp>
-      <p:sp>
-        <p:nvSpPr>
-          <p:cNvPr id="74" name="Text 71"/>
-          <p:cNvSpPr txBox="1"/>
-          <p:nvPr/>
-        </p:nvSpPr>
-        <p:spPr>
-          <a:xfrm>
-            <a:off x="6688836" y="5586984"/>
-            <a:ext cx="2331720" cy="310896"/>
-          </a:xfrm>
-          <a:prstGeom prst="rect">
-            <a:avLst/>
-          </a:prstGeom>
-          <a:noFill/>
-          <a:ln/>
-        </p:spPr>
-        <p:txBody>
-          <a:bodyPr wrap="square" lIns="0" tIns="0" rIns="0" bIns="0" rtlCol="0" anchor="ctr"/>
-          <a:lstStyle/>
-          <a:p>
-            <a:pPr algn="l" indent="0" marL="0">
-              <a:buNone/>
-            </a:pPr>
-            <a:r>
-              <a:rPr lang="ja-JP" altLang="en-US" sz="1400" dirty="0">
-                <a:solidFill>
-                  <a:srgbClr val="1B1F27"/>
-                </a:solidFill>
-                <a:latin typeface="Yu Gothic Medium" pitchFamily="34" charset="0"/>
-                <a:ea typeface="Yu Gothic Medium" charset="-128"/>
-                <a:cs typeface="Yu Gothic Medium" pitchFamily="34" charset="-120"/>
-              </a:rPr>
-              <a:t>キャッシュ管理</a:t>
-            </a:r>
-            <a:endParaRPr lang="ja-JP" sz="1400" dirty="0"/>
-          </a:p>
-        </p:txBody>
-      </p:sp>
-      <p:sp>
-        <p:nvSpPr>
-          <p:cNvPr id="75" name="Shape 72"/>
-          <p:cNvSpPr/>
-          <p:nvPr/>
-        </p:nvSpPr>
-        <p:spPr>
-          <a:xfrm>
-            <a:off x="9061704" y="5710428"/>
-            <a:ext cx="64008" cy="64008"/>
-          </a:xfrm>
-          <a:prstGeom prst="ellipse">
-            <a:avLst/>
-          </a:prstGeom>
-          <a:solidFill>
-            <a:srgbClr val="B08D57"/>
-          </a:solidFill>
-          <a:ln/>
-        </p:spPr>
-      </p:sp>
-      <p:sp>
-        <p:nvSpPr>
           <p:cNvPr id="76" name="Text 73"/>
           <p:cNvSpPr txBox="1"/>
           <p:nvPr/>
         </p:nvSpPr>
         <p:spPr>
           <a:xfrm>
-            <a:off x="9249156" y="5586984"/>
+            <a:off x="9249156" y="5257800"/>
             <a:ext cx="2331720" cy="310896"/>
           </a:xfrm>
           <a:prstGeom prst="rect">
@@ -45764,7 +45633,7 @@
             <a:r>
               <a:rPr lang="en-US" altLang="en-US" sz="1000" b="1" dirty="0">
                 <a:solidFill>
-                  <a:srgbClr val="8C96A6"/>
+                  <a:srgbClr val="7A8494"/>
                 </a:solidFill>
                 <a:latin typeface="Arial" pitchFamily="34" charset="0"/>
                 <a:ea typeface="Arial" charset="-128"/>
@@ -45901,7 +45770,7 @@
         </p:nvSpPr>
         <p:spPr>
           <a:xfrm>
-            <a:off x="6355080" y="1737360"/>
+            <a:off x="6254496" y="1737360"/>
             <a:ext cx="1463040" cy="292608"/>
           </a:xfrm>
           <a:prstGeom prst="rect">
@@ -45944,7 +45813,7 @@
         </p:nvGraphicFramePr>
         <p:xfrm>
           <a:off x="548640" y="2103120"/>
-          <a:ext cx="7315200" cy="3520440"/>
+          <a:ext cx="7315200" cy="3456432"/>
         </p:xfrm>
         <a:graphic xmlns:a="http://schemas.openxmlformats.org/drawingml/2006/main">
           <a:graphicData uri="http://schemas.openxmlformats.org/drawingml/2006/chart">
@@ -45960,17 +45829,19 @@
         </p:nvSpPr>
         <p:spPr>
           <a:xfrm>
-            <a:off x="1420978" y="4404116"/>
-            <a:ext cx="1005840" cy="310896"/>
-          </a:xfrm>
-          <a:prstGeom prst="rect">
-            <a:avLst/>
-          </a:prstGeom>
-          <a:noFill/>
-          <a:ln/>
-        </p:spPr>
-        <p:txBody>
-          <a:bodyPr wrap="square" lIns="0" tIns="0" rIns="0" bIns="0" rtlCol="0" anchor="b"/>
+            <a:off x="1623202" y="4368930"/>
+            <a:ext cx="601391" cy="292608"/>
+          </a:xfrm>
+          <a:prstGeom prst="rect">
+            <a:avLst/>
+          </a:prstGeom>
+          <a:solidFill>
+            <a:srgbClr val="FFFFFF"/>
+          </a:solidFill>
+          <a:ln/>
+        </p:spPr>
+        <p:txBody>
+          <a:bodyPr wrap="square" lIns="0" tIns="0" rIns="0" bIns="0" rtlCol="0" anchor="ctr"/>
           <a:lstStyle/>
           <a:p>
             <a:pPr algn="ctr" indent="0" marL="0">
@@ -45999,17 +45870,19 @@
         </p:nvSpPr>
         <p:spPr>
           <a:xfrm>
-            <a:off x="2708453" y="4168750"/>
-            <a:ext cx="1005840" cy="310896"/>
-          </a:xfrm>
-          <a:prstGeom prst="rect">
-            <a:avLst/>
-          </a:prstGeom>
-          <a:noFill/>
-          <a:ln/>
-        </p:spPr>
-        <p:txBody>
-          <a:bodyPr wrap="square" lIns="0" tIns="0" rIns="0" bIns="0" rtlCol="0" anchor="b"/>
+            <a:off x="2910677" y="4137843"/>
+            <a:ext cx="601391" cy="292608"/>
+          </a:xfrm>
+          <a:prstGeom prst="rect">
+            <a:avLst/>
+          </a:prstGeom>
+          <a:solidFill>
+            <a:srgbClr val="FFFFFF"/>
+          </a:solidFill>
+          <a:ln/>
+        </p:spPr>
+        <p:txBody>
+          <a:bodyPr wrap="square" lIns="0" tIns="0" rIns="0" bIns="0" rtlCol="0" anchor="ctr"/>
           <a:lstStyle/>
           <a:p>
             <a:pPr algn="ctr" indent="0" marL="0">
@@ -46038,17 +45911,19 @@
         </p:nvSpPr>
         <p:spPr>
           <a:xfrm>
-            <a:off x="3995928" y="3776472"/>
-            <a:ext cx="1005840" cy="310896"/>
-          </a:xfrm>
-          <a:prstGeom prst="rect">
-            <a:avLst/>
-          </a:prstGeom>
-          <a:noFill/>
-          <a:ln/>
-        </p:spPr>
-        <p:txBody>
-          <a:bodyPr wrap="square" lIns="0" tIns="0" rIns="0" bIns="0" rtlCol="0" anchor="b"/>
+            <a:off x="4146377" y="3752698"/>
+            <a:ext cx="704941" cy="292608"/>
+          </a:xfrm>
+          <a:prstGeom prst="rect">
+            <a:avLst/>
+          </a:prstGeom>
+          <a:solidFill>
+            <a:srgbClr val="FFFFFF"/>
+          </a:solidFill>
+          <a:ln/>
+        </p:spPr>
+        <p:txBody>
+          <a:bodyPr wrap="square" lIns="0" tIns="0" rIns="0" bIns="0" rtlCol="0" anchor="ctr"/>
           <a:lstStyle/>
           <a:p>
             <a:pPr algn="ctr" indent="0" marL="0">
@@ -46077,17 +45952,19 @@
         </p:nvSpPr>
         <p:spPr>
           <a:xfrm>
-            <a:off x="5283403" y="3148828"/>
-            <a:ext cx="1005840" cy="310896"/>
-          </a:xfrm>
-          <a:prstGeom prst="rect">
-            <a:avLst/>
-          </a:prstGeom>
-          <a:noFill/>
-          <a:ln/>
-        </p:spPr>
-        <p:txBody>
-          <a:bodyPr wrap="square" lIns="0" tIns="0" rIns="0" bIns="0" rtlCol="0" anchor="b"/>
+            <a:off x="5433852" y="3136465"/>
+            <a:ext cx="704941" cy="292608"/>
+          </a:xfrm>
+          <a:prstGeom prst="rect">
+            <a:avLst/>
+          </a:prstGeom>
+          <a:solidFill>
+            <a:srgbClr val="FFFFFF"/>
+          </a:solidFill>
+          <a:ln/>
+        </p:spPr>
+        <p:txBody>
+          <a:bodyPr wrap="square" lIns="0" tIns="0" rIns="0" bIns="0" rtlCol="0" anchor="ctr"/>
           <a:lstStyle/>
           <a:p>
             <a:pPr algn="ctr" indent="0" marL="0">
@@ -46116,17 +45993,19 @@
         </p:nvSpPr>
         <p:spPr>
           <a:xfrm>
-            <a:off x="6570878" y="2207362"/>
-            <a:ext cx="1005840" cy="310896"/>
-          </a:xfrm>
-          <a:prstGeom prst="rect">
-            <a:avLst/>
-          </a:prstGeom>
-          <a:noFill/>
-          <a:ln/>
-        </p:spPr>
-        <p:txBody>
-          <a:bodyPr wrap="square" lIns="0" tIns="0" rIns="0" bIns="0" rtlCol="0" anchor="b"/>
+            <a:off x="6680119" y="2212116"/>
+            <a:ext cx="787359" cy="292608"/>
+          </a:xfrm>
+          <a:prstGeom prst="rect">
+            <a:avLst/>
+          </a:prstGeom>
+          <a:solidFill>
+            <a:srgbClr val="FFFFFF"/>
+          </a:solidFill>
+          <a:ln/>
+        </p:spPr>
+        <p:txBody>
+          <a:bodyPr wrap="square" lIns="0" tIns="0" rIns="0" bIns="0" rtlCol="0" anchor="ctr"/>
           <a:lstStyle/>
           <a:p>
             <a:pPr algn="ctr" indent="0" marL="0">
@@ -46156,7 +46035,7 @@
         <p:spPr>
           <a:xfrm>
             <a:off x="8183880" y="1737360"/>
-            <a:ext cx="3456432" cy="3886200"/>
+            <a:ext cx="3456432" cy="3840480"/>
           </a:xfrm>
           <a:prstGeom prst="rect">
             <a:avLst/>
@@ -46292,7 +46171,7 @@
         </p:nvSpPr>
         <p:spPr>
           <a:xfrm>
-            <a:off x="8412480" y="3456432"/>
+            <a:off x="8412480" y="3401568"/>
             <a:ext cx="1005840" cy="237744"/>
           </a:xfrm>
           <a:prstGeom prst="rect">
@@ -46331,7 +46210,7 @@
         </p:nvSpPr>
         <p:spPr>
           <a:xfrm>
-            <a:off x="9464040" y="3456432"/>
+            <a:off x="9464040" y="3401568"/>
             <a:ext cx="1005840" cy="237744"/>
           </a:xfrm>
           <a:prstGeom prst="rect">
@@ -46370,7 +46249,7 @@
         </p:nvSpPr>
         <p:spPr>
           <a:xfrm>
-            <a:off x="10515600" y="3456432"/>
+            <a:off x="10515600" y="3401568"/>
             <a:ext cx="914400" cy="237744"/>
           </a:xfrm>
           <a:prstGeom prst="rect">
@@ -46409,7 +46288,7 @@
         </p:nvSpPr>
         <p:spPr>
           <a:xfrm>
-            <a:off x="8412480" y="3730752"/>
+            <a:off x="8412480" y="3675888"/>
             <a:ext cx="3017520" cy="0"/>
           </a:xfrm>
           <a:prstGeom prst="line">
@@ -46432,7 +46311,7 @@
         </p:nvSpPr>
         <p:spPr>
           <a:xfrm>
-            <a:off x="8412480" y="3767328"/>
+            <a:off x="8412480" y="3712464"/>
             <a:ext cx="1005840" cy="274320"/>
           </a:xfrm>
           <a:prstGeom prst="rect">
@@ -46471,7 +46350,7 @@
         </p:nvSpPr>
         <p:spPr>
           <a:xfrm>
-            <a:off x="9464040" y="3767328"/>
+            <a:off x="9464040" y="3712464"/>
             <a:ext cx="1005840" cy="274320"/>
           </a:xfrm>
           <a:prstGeom prst="rect">
@@ -46510,7 +46389,7 @@
         </p:nvSpPr>
         <p:spPr>
           <a:xfrm>
-            <a:off x="10515600" y="3767328"/>
+            <a:off x="10515600" y="3712464"/>
             <a:ext cx="914400" cy="274320"/>
           </a:xfrm>
           <a:prstGeom prst="rect">
@@ -46549,7 +46428,7 @@
         </p:nvSpPr>
         <p:spPr>
           <a:xfrm>
-            <a:off x="8412480" y="4059936"/>
+            <a:off x="8412480" y="3995928"/>
             <a:ext cx="3017520" cy="0"/>
           </a:xfrm>
           <a:prstGeom prst="line">
@@ -46572,7 +46451,7 @@
         </p:nvSpPr>
         <p:spPr>
           <a:xfrm>
-            <a:off x="8412480" y="4078224"/>
+            <a:off x="8412480" y="4005072"/>
             <a:ext cx="1005840" cy="274320"/>
           </a:xfrm>
           <a:prstGeom prst="rect">
@@ -46611,7 +46490,7 @@
         </p:nvSpPr>
         <p:spPr>
           <a:xfrm>
-            <a:off x="9464040" y="4078224"/>
+            <a:off x="9464040" y="4005072"/>
             <a:ext cx="1005840" cy="274320"/>
           </a:xfrm>
           <a:prstGeom prst="rect">
@@ -46650,7 +46529,7 @@
         </p:nvSpPr>
         <p:spPr>
           <a:xfrm>
-            <a:off x="10515600" y="4078224"/>
+            <a:off x="10515600" y="4005072"/>
             <a:ext cx="914400" cy="274320"/>
           </a:xfrm>
           <a:prstGeom prst="rect">
@@ -46689,7 +46568,7 @@
         </p:nvSpPr>
         <p:spPr>
           <a:xfrm>
-            <a:off x="8412480" y="4370832"/>
+            <a:off x="8412480" y="4288536"/>
             <a:ext cx="3017520" cy="0"/>
           </a:xfrm>
           <a:prstGeom prst="line">
@@ -46712,7 +46591,7 @@
         </p:nvSpPr>
         <p:spPr>
           <a:xfrm>
-            <a:off x="8412480" y="4389120"/>
+            <a:off x="8412480" y="4297680"/>
             <a:ext cx="1005840" cy="274320"/>
           </a:xfrm>
           <a:prstGeom prst="rect">
@@ -46751,7 +46630,7 @@
         </p:nvSpPr>
         <p:spPr>
           <a:xfrm>
-            <a:off x="9464040" y="4389120"/>
+            <a:off x="9464040" y="4297680"/>
             <a:ext cx="1005840" cy="274320"/>
           </a:xfrm>
           <a:prstGeom prst="rect">
@@ -46790,7 +46669,7 @@
         </p:nvSpPr>
         <p:spPr>
           <a:xfrm>
-            <a:off x="10515600" y="4389120"/>
+            <a:off x="10515600" y="4297680"/>
             <a:ext cx="914400" cy="274320"/>
           </a:xfrm>
           <a:prstGeom prst="rect">
@@ -46829,7 +46708,7 @@
         </p:nvSpPr>
         <p:spPr>
           <a:xfrm>
-            <a:off x="8412480" y="4681728"/>
+            <a:off x="8412480" y="4581144"/>
             <a:ext cx="3017520" cy="0"/>
           </a:xfrm>
           <a:prstGeom prst="line">
@@ -46852,7 +46731,7 @@
         </p:nvSpPr>
         <p:spPr>
           <a:xfrm>
-            <a:off x="8412480" y="4700016"/>
+            <a:off x="8412480" y="4590288"/>
             <a:ext cx="1005840" cy="274320"/>
           </a:xfrm>
           <a:prstGeom prst="rect">
@@ -46891,7 +46770,7 @@
         </p:nvSpPr>
         <p:spPr>
           <a:xfrm>
-            <a:off x="9464040" y="4700016"/>
+            <a:off x="9464040" y="4590288"/>
             <a:ext cx="1005840" cy="274320"/>
           </a:xfrm>
           <a:prstGeom prst="rect">
@@ -46930,7 +46809,7 @@
         </p:nvSpPr>
         <p:spPr>
           <a:xfrm>
-            <a:off x="10515600" y="4700016"/>
+            <a:off x="10515600" y="4590288"/>
             <a:ext cx="914400" cy="274320"/>
           </a:xfrm>
           <a:prstGeom prst="rect">
@@ -46969,7 +46848,7 @@
         </p:nvSpPr>
         <p:spPr>
           <a:xfrm>
-            <a:off x="8412480" y="4992624"/>
+            <a:off x="8412480" y="4873752"/>
             <a:ext cx="3017520" cy="0"/>
           </a:xfrm>
           <a:prstGeom prst="line">
@@ -46992,7 +46871,7 @@
         </p:nvSpPr>
         <p:spPr>
           <a:xfrm>
-            <a:off x="8412480" y="5010912"/>
+            <a:off x="8412480" y="4882896"/>
             <a:ext cx="1005840" cy="274320"/>
           </a:xfrm>
           <a:prstGeom prst="rect">
@@ -47031,7 +46910,7 @@
         </p:nvSpPr>
         <p:spPr>
           <a:xfrm>
-            <a:off x="9464040" y="5010912"/>
+            <a:off x="9464040" y="4882896"/>
             <a:ext cx="1005840" cy="274320"/>
           </a:xfrm>
           <a:prstGeom prst="rect">
@@ -47070,7 +46949,7 @@
         </p:nvSpPr>
         <p:spPr>
           <a:xfrm>
-            <a:off x="10515600" y="5010912"/>
+            <a:off x="10515600" y="4882896"/>
             <a:ext cx="914400" cy="274320"/>
           </a:xfrm>
           <a:prstGeom prst="rect">
@@ -47109,7 +46988,7 @@
         </p:nvSpPr>
         <p:spPr>
           <a:xfrm>
-            <a:off x="8412480" y="5303520"/>
+            <a:off x="8412480" y="5212080"/>
             <a:ext cx="3017520" cy="237744"/>
           </a:xfrm>
           <a:prstGeom prst="rect">
@@ -47149,22 +47028,19 @@
         <p:spPr>
           <a:xfrm>
             <a:off x="548640" y="5705856"/>
-            <a:ext cx="11094415" cy="420624"/>
-          </a:xfrm>
-          <a:prstGeom prst="rect">
-            <a:avLst/>
-          </a:prstGeom>
-          <a:noFill/>
-          <a:ln/>
-        </p:spPr>
-        <p:txBody>
-          <a:bodyPr wrap="square" lIns="0" tIns="0" rIns="0" bIns="0" rtlCol="0" anchor="t"/>
-          <a:lstStyle/>
-          <a:p>
-            <a:pPr algn="l" indent="0" marL="0">
-              <a:lnSpc>
-                <a:spcPts val="1500"/>
-              </a:lnSpc>
+            <a:ext cx="11094415" cy="237744"/>
+          </a:xfrm>
+          <a:prstGeom prst="rect">
+            <a:avLst/>
+          </a:prstGeom>
+          <a:noFill/>
+          <a:ln/>
+        </p:spPr>
+        <p:txBody>
+          <a:bodyPr wrap="square" lIns="0" tIns="0" rIns="0" bIns="0" rtlCol="0" anchor="ctr"/>
+          <a:lstStyle/>
+          <a:p>
+            <a:pPr algn="l" indent="0" marL="0">
               <a:buNone/>
             </a:pPr>
             <a:r>
@@ -47176,27 +47052,7 @@
                 <a:ea typeface="Yu Gothic Medium" charset="-128"/>
                 <a:cs typeface="Yu Gothic Medium" pitchFamily="34" charset="-120"/>
               </a:rPr>
-              <a:t>※ FY＝10月〜翌9月の12か月（FY2027＝2026年10月〜2027年9月）。FY2027は親会社設立（2028年3月）前のためROOTIVE単体。</a:t>
-            </a:r>
-            <a:endParaRPr lang="ja-JP" sz="1000" dirty="0"/>
-          </a:p>
-          <a:p>
-            <a:pPr algn="l" indent="0" marL="0">
-              <a:lnSpc>
-                <a:spcPts val="1500"/>
-              </a:lnSpc>
-              <a:buNone/>
-            </a:pPr>
-            <a:r>
-              <a:rPr lang="ja-JP" altLang="en-US" sz="1000" dirty="0">
-                <a:solidFill>
-                  <a:srgbClr val="5B6675"/>
-                </a:solidFill>
-                <a:latin typeface="Yu Gothic Medium" pitchFamily="34" charset="0"/>
-                <a:ea typeface="Yu Gothic Medium" charset="-128"/>
-                <a:cs typeface="Yu Gothic Medium" pitchFamily="34" charset="-120"/>
-              </a:rPr>
-              <a:t>　 数値はすべて暫定経営目標であり、財務モデル策定後に確定する。</a:t>
+              <a:t>※ FY＝10月〜翌9月（FY2027＝2026.10–2027.9）。FY2027は親会社設立（2028.3）前のためROOTIVE単体。数値はすべて暫定経営目標（財務モデル策定後に確定）。</a:t>
             </a:r>
             <a:endParaRPr lang="ja-JP" sz="1000" dirty="0"/>
           </a:p>
@@ -47672,7 +47528,7 @@
             <a:r>
               <a:rPr lang="en-US" altLang="en-US" sz="1000" b="1" dirty="0">
                 <a:solidFill>
-                  <a:srgbClr val="8C96A6"/>
+                  <a:srgbClr val="7A8494"/>
                 </a:solidFill>
                 <a:latin typeface="Arial" pitchFamily="34" charset="0"/>
                 <a:ea typeface="Arial" charset="-128"/>
@@ -48514,8 +48370,8 @@
         </p:nvSpPr>
         <p:spPr>
           <a:xfrm>
-            <a:off x="3017520" y="2441448"/>
-            <a:ext cx="6537960" cy="566928"/>
+            <a:off x="3017520" y="2377440"/>
+            <a:ext cx="6537960" cy="694944"/>
           </a:xfrm>
           <a:prstGeom prst="rect">
             <a:avLst/>
@@ -48534,8 +48390,8 @@
         </p:nvSpPr>
         <p:spPr>
           <a:xfrm>
-            <a:off x="3200400" y="2441448"/>
-            <a:ext cx="4572000" cy="566928"/>
+            <a:off x="3200400" y="2377440"/>
+            <a:ext cx="4572000" cy="694944"/>
           </a:xfrm>
           <a:prstGeom prst="rect">
             <a:avLst/>
@@ -48573,8 +48429,8 @@
         </p:nvSpPr>
         <p:spPr>
           <a:xfrm>
-            <a:off x="4343400" y="3493008"/>
-            <a:ext cx="1234440" cy="566928"/>
+            <a:off x="4343400" y="3429000"/>
+            <a:ext cx="1234440" cy="694944"/>
           </a:xfrm>
           <a:prstGeom prst="rect">
             <a:avLst/>
@@ -48639,8 +48495,8 @@
         </p:nvSpPr>
         <p:spPr>
           <a:xfrm>
-            <a:off x="8321040" y="3493008"/>
-            <a:ext cx="1234440" cy="566928"/>
+            <a:off x="8321040" y="3429000"/>
+            <a:ext cx="1234440" cy="694944"/>
           </a:xfrm>
           <a:prstGeom prst="rect">
             <a:avLst/>
@@ -48703,8 +48559,8 @@
         </p:nvSpPr>
         <p:spPr>
           <a:xfrm>
-            <a:off x="4343400" y="4544568"/>
-            <a:ext cx="1234440" cy="566928"/>
+            <a:off x="4343400" y="4480560"/>
+            <a:ext cx="1234440" cy="694944"/>
           </a:xfrm>
           <a:prstGeom prst="rect">
             <a:avLst/>
@@ -48769,8 +48625,8 @@
         </p:nvSpPr>
         <p:spPr>
           <a:xfrm>
-            <a:off x="5669280" y="4544568"/>
-            <a:ext cx="1234440" cy="566928"/>
+            <a:off x="5669280" y="4480560"/>
+            <a:ext cx="1234440" cy="694944"/>
           </a:xfrm>
           <a:prstGeom prst="rect">
             <a:avLst/>
@@ -48810,8 +48666,8 @@
         </p:nvSpPr>
         <p:spPr>
           <a:xfrm>
-            <a:off x="6995160" y="4544568"/>
-            <a:ext cx="1234440" cy="566928"/>
+            <a:off x="6995160" y="4480560"/>
+            <a:ext cx="1234440" cy="694944"/>
           </a:xfrm>
           <a:prstGeom prst="rect">
             <a:avLst/>
@@ -48851,8 +48707,8 @@
         </p:nvSpPr>
         <p:spPr>
           <a:xfrm>
-            <a:off x="8321040" y="4544568"/>
-            <a:ext cx="1234440" cy="566928"/>
+            <a:off x="8321040" y="4480560"/>
+            <a:ext cx="1234440" cy="694944"/>
           </a:xfrm>
           <a:prstGeom prst="rect">
             <a:avLst/>
@@ -49008,8 +48864,8 @@
         </p:nvSpPr>
         <p:spPr>
           <a:xfrm>
-            <a:off x="9966960" y="2240280"/>
-            <a:ext cx="1673352" cy="3108960"/>
+            <a:off x="9966960" y="2313432"/>
+            <a:ext cx="1673352" cy="2926080"/>
           </a:xfrm>
           <a:prstGeom prst="rect">
             <a:avLst/>
@@ -49028,7 +48884,7 @@
         </p:nvSpPr>
         <p:spPr>
           <a:xfrm>
-            <a:off x="9966960" y="2395728"/>
+            <a:off x="9966960" y="2615184"/>
             <a:ext cx="1673352" cy="420624"/>
           </a:xfrm>
           <a:prstGeom prst="rect">
@@ -49090,7 +48946,7 @@
         </p:nvSpPr>
         <p:spPr>
           <a:xfrm>
-            <a:off x="9966960" y="2926080"/>
+            <a:off x="9966960" y="3145536"/>
             <a:ext cx="1673352" cy="640080"/>
           </a:xfrm>
           <a:prstGeom prst="rect">
@@ -49152,7 +49008,7 @@
         </p:nvSpPr>
         <p:spPr>
           <a:xfrm>
-            <a:off x="9966960" y="3767328"/>
+            <a:off x="9966960" y="3968496"/>
             <a:ext cx="1673352" cy="237744"/>
           </a:xfrm>
           <a:prstGeom prst="rect">
@@ -49191,7 +49047,7 @@
         </p:nvSpPr>
         <p:spPr>
           <a:xfrm>
-            <a:off x="9966960" y="4023360"/>
+            <a:off x="9966960" y="4224528"/>
             <a:ext cx="1673352" cy="457200"/>
           </a:xfrm>
           <a:prstGeom prst="rect">
@@ -49230,7 +49086,7 @@
         </p:nvSpPr>
         <p:spPr>
           <a:xfrm>
-            <a:off x="9966960" y="4526280"/>
+            <a:off x="9966960" y="4727448"/>
             <a:ext cx="1673352" cy="237744"/>
           </a:xfrm>
           <a:prstGeom prst="rect">
@@ -49731,7 +49587,7 @@
             <a:r>
               <a:rPr lang="en-US" altLang="en-US" sz="1000" b="1" dirty="0">
                 <a:solidFill>
-                  <a:srgbClr val="8C96A6"/>
+                  <a:srgbClr val="7A8494"/>
                 </a:solidFill>
                 <a:latin typeface="Arial" pitchFamily="34" charset="0"/>
                 <a:ea typeface="Arial" charset="-128"/>
@@ -50586,7 +50442,7 @@
         </p:nvSpPr>
         <p:spPr>
           <a:xfrm>
-            <a:off x="731520" y="4937760"/>
+            <a:off x="731520" y="4828032"/>
             <a:ext cx="1737360" cy="237744"/>
           </a:xfrm>
           <a:prstGeom prst="rect">
@@ -50625,7 +50481,7 @@
         </p:nvSpPr>
         <p:spPr>
           <a:xfrm>
-            <a:off x="731520" y="5157216"/>
+            <a:off x="731520" y="5047488"/>
             <a:ext cx="1737360" cy="457200"/>
           </a:xfrm>
           <a:prstGeom prst="rect">
@@ -50678,7 +50534,7 @@
         </p:nvSpPr>
         <p:spPr>
           <a:xfrm>
-            <a:off x="731520" y="5614416"/>
+            <a:off x="731520" y="5504688"/>
             <a:ext cx="1737360" cy="219456"/>
           </a:xfrm>
           <a:prstGeom prst="rect">
@@ -50838,7 +50694,7 @@
         </p:nvSpPr>
         <p:spPr>
           <a:xfrm>
-            <a:off x="3005176" y="4590288"/>
+            <a:off x="3005176" y="4425696"/>
             <a:ext cx="1600200" cy="274320"/>
           </a:xfrm>
           <a:prstGeom prst="rect">
@@ -50881,7 +50737,7 @@
         </p:nvSpPr>
         <p:spPr>
           <a:xfrm>
-            <a:off x="3005176" y="4937760"/>
+            <a:off x="3005176" y="4828032"/>
             <a:ext cx="1737360" cy="237744"/>
           </a:xfrm>
           <a:prstGeom prst="rect">
@@ -50920,7 +50776,7 @@
         </p:nvSpPr>
         <p:spPr>
           <a:xfrm>
-            <a:off x="3005176" y="5157216"/>
+            <a:off x="3005176" y="5047488"/>
             <a:ext cx="1737360" cy="457200"/>
           </a:xfrm>
           <a:prstGeom prst="rect">
@@ -50973,7 +50829,7 @@
         </p:nvSpPr>
         <p:spPr>
           <a:xfrm>
-            <a:off x="3005176" y="5614416"/>
+            <a:off x="3005176" y="5504688"/>
             <a:ext cx="1737360" cy="219456"/>
           </a:xfrm>
           <a:prstGeom prst="rect">
@@ -51133,7 +50989,7 @@
         </p:nvSpPr>
         <p:spPr>
           <a:xfrm>
-            <a:off x="5278831" y="4937760"/>
+            <a:off x="5278831" y="4828032"/>
             <a:ext cx="1737360" cy="237744"/>
           </a:xfrm>
           <a:prstGeom prst="rect">
@@ -51172,7 +51028,7 @@
         </p:nvSpPr>
         <p:spPr>
           <a:xfrm>
-            <a:off x="5278831" y="5157216"/>
+            <a:off x="5278831" y="5047488"/>
             <a:ext cx="1737360" cy="457200"/>
           </a:xfrm>
           <a:prstGeom prst="rect">
@@ -51225,7 +51081,7 @@
         </p:nvSpPr>
         <p:spPr>
           <a:xfrm>
-            <a:off x="5278831" y="5614416"/>
+            <a:off x="5278831" y="5504688"/>
             <a:ext cx="1737360" cy="219456"/>
           </a:xfrm>
           <a:prstGeom prst="rect">
@@ -51385,7 +51241,7 @@
         </p:nvSpPr>
         <p:spPr>
           <a:xfrm>
-            <a:off x="7552487" y="4937760"/>
+            <a:off x="7552487" y="4828032"/>
             <a:ext cx="1737360" cy="237744"/>
           </a:xfrm>
           <a:prstGeom prst="rect">
@@ -51424,7 +51280,7 @@
         </p:nvSpPr>
         <p:spPr>
           <a:xfrm>
-            <a:off x="7552487" y="5157216"/>
+            <a:off x="7552487" y="5047488"/>
             <a:ext cx="1737360" cy="457200"/>
           </a:xfrm>
           <a:prstGeom prst="rect">
@@ -51477,7 +51333,7 @@
         </p:nvSpPr>
         <p:spPr>
           <a:xfrm>
-            <a:off x="7552487" y="5614416"/>
+            <a:off x="7552487" y="5504688"/>
             <a:ext cx="1737360" cy="219456"/>
           </a:xfrm>
           <a:prstGeom prst="rect">
@@ -51657,7 +51513,7 @@
         </p:nvSpPr>
         <p:spPr>
           <a:xfrm>
-            <a:off x="9826142" y="4937760"/>
+            <a:off x="9826142" y="4828032"/>
             <a:ext cx="1737360" cy="237744"/>
           </a:xfrm>
           <a:prstGeom prst="rect">
@@ -51696,7 +51552,7 @@
         </p:nvSpPr>
         <p:spPr>
           <a:xfrm>
-            <a:off x="9826142" y="5157216"/>
+            <a:off x="9826142" y="5047488"/>
             <a:ext cx="1737360" cy="457200"/>
           </a:xfrm>
           <a:prstGeom prst="rect">
@@ -51749,7 +51605,7 @@
         </p:nvSpPr>
         <p:spPr>
           <a:xfrm>
-            <a:off x="9826142" y="5614416"/>
+            <a:off x="9826142" y="5504688"/>
             <a:ext cx="1737360" cy="219456"/>
           </a:xfrm>
           <a:prstGeom prst="rect">
@@ -51912,7 +51768,7 @@
                 <a:ea typeface="Yu Gothic" charset="-128"/>
                 <a:cs typeface="Yu Gothic" pitchFamily="34" charset="-120"/>
               </a:rPr>
-              <a:t>最初の18か月は「次の会社を買える企業になる18か月」</a:t>
+              <a:t>最初の18か月は「次の会社を買える企業になる18か月」。</a:t>
             </a:r>
             <a:endParaRPr lang="ja-JP" sz="2600" dirty="0"/>
           </a:p>
